--- a/METplus - Parquet Summary.pptx
+++ b/METplus - Parquet Summary.pptx
@@ -13,6 +13,7 @@
     <p:sldId id="258" r:id="rId11"/>
     <p:sldId id="259" r:id="rId12"/>
     <p:sldId id="260" r:id="rId13"/>
+    <p:sldId id="261" r:id="rId14"/>
   </p:sldIdLst>
   <p:sldSz cx="12192000" cy="6858000"/>
   <p:notesSz cx="6858000" cy="9144000"/>
@@ -4794,89 +4795,14 @@
       <p:grpSpPr/>
       <p:sp>
         <p:nvSpPr>
-          <p:cNvPr id="2" name="Picture Placeholder 1"/>
-          <p:cNvSpPr>
-            <a:spLocks noGrp="1"/>
-          </p:cNvSpPr>
-          <p:nvPr>
-            <p:ph type="pic" idx="11" sz="quarter"/>
-          </p:nvPr>
-        </p:nvSpPr>
-        <p:spPr/>
-      </p:sp>
-      <p:sp>
-        <p:nvSpPr>
-          <p:cNvPr id="3" name="Picture Placeholder 2"/>
-          <p:cNvSpPr>
-            <a:spLocks noGrp="1"/>
-          </p:cNvSpPr>
-          <p:nvPr>
-            <p:ph type="pic" idx="12" sz="quarter"/>
-          </p:nvPr>
-        </p:nvSpPr>
-        <p:spPr/>
-      </p:sp>
-      <p:sp>
-        <p:nvSpPr>
-          <p:cNvPr id="4" name="Text Placeholder 3"/>
-          <p:cNvSpPr>
-            <a:spLocks noGrp="1"/>
-          </p:cNvSpPr>
-          <p:nvPr>
-            <p:ph type="body" idx="10" sz="quarter"/>
-          </p:nvPr>
-        </p:nvSpPr>
-        <p:spPr/>
-        <p:txBody>
-          <a:bodyPr/>
-          <a:lstStyle/>
-          <a:p/>
-        </p:txBody>
-      </p:sp>
-      <p:sp>
-        <p:nvSpPr>
-          <p:cNvPr id="5" name="Text Placeholder 4"/>
-          <p:cNvSpPr>
-            <a:spLocks noGrp="1"/>
-          </p:cNvSpPr>
-          <p:nvPr>
-            <p:ph type="body" idx="13" sz="quarter"/>
-          </p:nvPr>
-        </p:nvSpPr>
-        <p:spPr/>
-        <p:txBody>
-          <a:bodyPr/>
-          <a:lstStyle/>
-          <a:p/>
-        </p:txBody>
-      </p:sp>
-      <p:sp>
-        <p:nvSpPr>
-          <p:cNvPr id="6" name="Title 5"/>
-          <p:cNvSpPr>
-            <a:spLocks noGrp="1"/>
-          </p:cNvSpPr>
-          <p:nvPr>
-            <p:ph type="title"/>
-          </p:nvPr>
-        </p:nvSpPr>
-        <p:spPr/>
-        <p:txBody>
-          <a:bodyPr/>
-          <a:lstStyle/>
-          <a:p/>
-        </p:txBody>
-      </p:sp>
-      <p:sp>
-        <p:nvSpPr>
-          <p:cNvPr id="7" name="TextBox 6"/>
+          <p:cNvPr id="2" name="TextBox 1"/>
           <p:cNvSpPr txBox="1"/>
           <p:nvPr/>
         </p:nvSpPr>
         <p:spPr>
           <a:xfrm>
-            <a:off x="512064" y="429768"/>
-            <a:ext cx="11430000" cy="502920"/>
+            <a:off x="411480" y="182880"/>
+            <a:ext cx="11338560" cy="475488"/>
           </a:xfrm>
           <a:prstGeom prst="rect">
             <a:avLst/>
@@ -4890,7 +4816,7 @@
           <a:lstStyle/>
           <a:p>
             <a:r>
-              <a:rPr b="1" sz="2400">
+              <a:rPr b="1" sz="2200">
                 <a:solidFill>
                   <a:srgbClr val="2461E5"/>
                 </a:solidFill>
@@ -4902,224 +4828,14 @@
       </p:sp>
       <p:sp>
         <p:nvSpPr>
-          <p:cNvPr id="8" name="TextBox 7"/>
-          <p:cNvSpPr txBox="1"/>
-          <p:nvPr/>
-        </p:nvSpPr>
-        <p:spPr>
-          <a:xfrm>
-            <a:off x="457200" y="1051560"/>
-            <a:ext cx="5303520" cy="5029200"/>
-          </a:xfrm>
-          <a:prstGeom prst="rect">
-            <a:avLst/>
-          </a:prstGeom>
-          <a:noFill/>
-        </p:spPr>
-        <p:txBody>
-          <a:bodyPr wrap="square">
-            <a:spAutoFit/>
-          </a:bodyPr>
-          <a:lstStyle/>
-          <a:p>
-            <a:pPr algn="l"/>
-            <a:r>
-              <a:rPr sz="1100" b="0">
-                <a:solidFill>
-                  <a:srgbClr val="2D2D2D"/>
-                </a:solidFill>
-              </a:rPr>
-              <a:t>METplus runs routine NWP verification and writes</a:t>
-            </a:r>
-          </a:p>
-          <a:p>
-            <a:pPr algn="l"/>
-            <a:r>
-              <a:rPr sz="1100" b="0">
-                <a:solidFill>
-                  <a:srgbClr val="2D2D2D"/>
-                </a:solidFill>
-              </a:rPr>
-              <a:t>results to structured output folders.</a:t>
-            </a:r>
-          </a:p>
-          <a:p>
-            <a:pPr algn="l"/>
-            <a:r>
-              <a:rPr sz="1100" b="0">
-                <a:solidFill>
-                  <a:srgbClr val="2D2D2D"/>
-                </a:solidFill>
-              </a:rPr>
-              <a:t/>
-            </a:r>
-          </a:p>
-          <a:p>
-            <a:pPr algn="l"/>
-            <a:r>
-              <a:rPr sz="1100" b="0">
-                <a:solidFill>
-                  <a:srgbClr val="2D2D2D"/>
-                </a:solidFill>
-              </a:rPr>
-              <a:t>Each configuration produces a folder named:</a:t>
-            </a:r>
-          </a:p>
-          <a:p>
-            <a:pPr algn="l"/>
-            <a:r>
-              <a:rPr sz="1100" b="0">
-                <a:solidFill>
-                  <a:srgbClr val="2D2D2D"/>
-                </a:solidFill>
-              </a:rPr>
-              <a:t>  &lt;Model&gt;_&lt;Obs&gt;_&lt;Parameter&gt;_&lt;Timestep&gt;</a:t>
-            </a:r>
-          </a:p>
-          <a:p>
-            <a:pPr algn="l"/>
-            <a:r>
-              <a:rPr sz="1100" b="0">
-                <a:solidFill>
-                  <a:srgbClr val="2D2D2D"/>
-                </a:solidFill>
-              </a:rPr>
-              <a:t/>
-            </a:r>
-          </a:p>
-          <a:p>
-            <a:pPr algn="l"/>
-            <a:r>
-              <a:rPr sz="1100" b="0">
-                <a:solidFill>
-                  <a:srgbClr val="2D2D2D"/>
-                </a:solidFill>
-              </a:rPr>
-              <a:t>Inside each folder are daily YYYYMMDDHH</a:t>
-            </a:r>
-          </a:p>
-          <a:p>
-            <a:pPr algn="l"/>
-            <a:r>
-              <a:rPr sz="1100" b="0">
-                <a:solidFill>
-                  <a:srgbClr val="2D2D2D"/>
-                </a:solidFill>
-              </a:rPr>
-              <a:t>subdirectories, each containing .stat files</a:t>
-            </a:r>
-          </a:p>
-          <a:p>
-            <a:pPr algn="l"/>
-            <a:r>
-              <a:rPr sz="1100" b="0">
-                <a:solidFill>
-                  <a:srgbClr val="2D2D2D"/>
-                </a:solidFill>
-              </a:rPr>
-              <a:t>for every forecast lead time and domain.</a:t>
-            </a:r>
-          </a:p>
-          <a:p>
-            <a:pPr algn="l"/>
-            <a:r>
-              <a:rPr sz="1100" b="0">
-                <a:solidFill>
-                  <a:srgbClr val="2D2D2D"/>
-                </a:solidFill>
-              </a:rPr>
-              <a:t/>
-            </a:r>
-          </a:p>
-          <a:p>
-            <a:pPr algn="l"/>
-            <a:r>
-              <a:rPr sz="1100" b="0">
-                <a:solidFill>
-                  <a:srgbClr val="2D2D2D"/>
-                </a:solidFill>
-              </a:rPr>
-              <a:t>Two types of verification output:</a:t>
-            </a:r>
-          </a:p>
-          <a:p>
-            <a:pPr algn="l"/>
-            <a:r>
-              <a:rPr sz="1100" b="0">
-                <a:solidFill>
-                  <a:srgbClr val="2D2D2D"/>
-                </a:solidFill>
-              </a:rPr>
-              <a:t/>
-            </a:r>
-          </a:p>
-          <a:p>
-            <a:pPr algn="l"/>
-            <a:r>
-              <a:rPr sz="1100" b="0">
-                <a:solidFill>
-                  <a:srgbClr val="2D2D2D"/>
-                </a:solidFill>
-              </a:rPr>
-              <a:t>  GridStat  — deterministic scores</a:t>
-            </a:r>
-          </a:p>
-          <a:p>
-            <a:pPr algn="l"/>
-            <a:r>
-              <a:rPr sz="1100" b="0">
-                <a:solidFill>
-                  <a:srgbClr val="2D2D2D"/>
-                </a:solidFill>
-              </a:rPr>
-              <a:t>  (bias, RMSE, MAE)</a:t>
-            </a:r>
-          </a:p>
-          <a:p>
-            <a:pPr algn="l"/>
-            <a:r>
-              <a:rPr sz="1100" b="0">
-                <a:solidFill>
-                  <a:srgbClr val="2D2D2D"/>
-                </a:solidFill>
-              </a:rPr>
-              <a:t/>
-            </a:r>
-          </a:p>
-          <a:p>
-            <a:pPr algn="l"/>
-            <a:r>
-              <a:rPr sz="1100" b="0">
-                <a:solidFill>
-                  <a:srgbClr val="2D2D2D"/>
-                </a:solidFill>
-              </a:rPr>
-              <a:t>  EnsembleStat — ensemble scores</a:t>
-            </a:r>
-          </a:p>
-          <a:p>
-            <a:pPr algn="l"/>
-            <a:r>
-              <a:rPr sz="1100" b="0">
-                <a:solidFill>
-                  <a:srgbClr val="2D2D2D"/>
-                </a:solidFill>
-              </a:rPr>
-              <a:t>  (CRPS, Spread, Skill Score)</a:t>
-            </a:r>
-          </a:p>
-        </p:txBody>
-      </p:sp>
-      <p:sp>
-        <p:nvSpPr>
-          <p:cNvPr id="9" name="Rectangle 8"/>
+          <p:cNvPr id="3" name="Rectangle 2"/>
           <p:cNvSpPr/>
           <p:nvPr/>
         </p:nvSpPr>
         <p:spPr>
           <a:xfrm>
-            <a:off x="6217920" y="1005840"/>
-            <a:ext cx="5669280" cy="365760"/>
+            <a:off x="411480" y="694944"/>
+            <a:ext cx="11338560" cy="20116"/>
           </a:xfrm>
           <a:prstGeom prst="rect">
             <a:avLst/>
@@ -5127,10 +4843,8 @@
           <a:solidFill>
             <a:srgbClr val="2461E5"/>
           </a:solidFill>
-          <a:ln w="9525">
-            <a:solidFill>
-              <a:srgbClr val="2461E5"/>
-            </a:solidFill>
+          <a:ln>
+            <a:noFill/>
           </a:ln>
         </p:spPr>
         <p:style>
@@ -5148,42 +4862,242 @@
           </a:fontRef>
         </p:style>
         <p:txBody>
-          <a:bodyPr rtlCol="0" anchor="ctr" wrap="square" lIns="54864" rIns="54864" tIns="36576" bIns="36576"/>
+          <a:bodyPr rtlCol="0" anchor="ctr"/>
           <a:lstStyle/>
           <a:p>
             <a:pPr algn="ctr"/>
-            <a:r>
-              <a:rPr sz="1000" b="1">
-                <a:solidFill>
-                  <a:srgbClr val="FFFFFF"/>
-                </a:solidFill>
-              </a:rPr>
-              <a:t>input_all/</a:t>
-            </a:r>
-          </a:p>
-        </p:txBody>
-      </p:sp>
-      <p:sp>
-        <p:nvSpPr>
-          <p:cNvPr id="10" name="Rectangle 9"/>
+          </a:p>
+        </p:txBody>
+      </p:sp>
+      <p:sp>
+        <p:nvSpPr>
+          <p:cNvPr id="4" name="TextBox 3"/>
+          <p:cNvSpPr txBox="1"/>
+          <p:nvPr/>
+        </p:nvSpPr>
+        <p:spPr>
+          <a:xfrm>
+            <a:off x="411480" y="868680"/>
+            <a:ext cx="5120640" cy="5029200"/>
+          </a:xfrm>
+          <a:prstGeom prst="rect">
+            <a:avLst/>
+          </a:prstGeom>
+          <a:noFill/>
+        </p:spPr>
+        <p:txBody>
+          <a:bodyPr wrap="square">
+            <a:spAutoFit/>
+          </a:bodyPr>
+          <a:lstStyle/>
+          <a:p>
+            <a:pPr algn="l"/>
+            <a:r>
+              <a:rPr sz="1100" b="0">
+                <a:solidFill>
+                  <a:srgbClr val="1C1C28"/>
+                </a:solidFill>
+              </a:rPr>
+              <a:t>METplus runs routine NWP verification and writes</a:t>
+            </a:r>
+          </a:p>
+          <a:p>
+            <a:pPr algn="l"/>
+            <a:r>
+              <a:rPr sz="1100" b="0">
+                <a:solidFill>
+                  <a:srgbClr val="1C1C28"/>
+                </a:solidFill>
+              </a:rPr>
+              <a:t>results to structured output folders.</a:t>
+            </a:r>
+          </a:p>
+          <a:p>
+            <a:pPr algn="l"/>
+            <a:r>
+              <a:rPr sz="1100" b="0">
+                <a:solidFill>
+                  <a:srgbClr val="1C1C28"/>
+                </a:solidFill>
+              </a:rPr>
+              <a:t/>
+            </a:r>
+          </a:p>
+          <a:p>
+            <a:pPr algn="l"/>
+            <a:r>
+              <a:rPr sz="1100" b="0">
+                <a:solidFill>
+                  <a:srgbClr val="1C1C28"/>
+                </a:solidFill>
+              </a:rPr>
+              <a:t>Each configuration produces a folder named:</a:t>
+            </a:r>
+          </a:p>
+          <a:p>
+            <a:pPr algn="l"/>
+            <a:r>
+              <a:rPr sz="1100" b="0">
+                <a:solidFill>
+                  <a:srgbClr val="1C1C28"/>
+                </a:solidFill>
+              </a:rPr>
+              <a:t>  &lt;Model&gt;_&lt;Obs&gt;_&lt;Parameter&gt;_&lt;Timestep&gt;</a:t>
+            </a:r>
+          </a:p>
+          <a:p>
+            <a:pPr algn="l"/>
+            <a:r>
+              <a:rPr sz="1100" b="0">
+                <a:solidFill>
+                  <a:srgbClr val="1C1C28"/>
+                </a:solidFill>
+              </a:rPr>
+              <a:t/>
+            </a:r>
+          </a:p>
+          <a:p>
+            <a:pPr algn="l"/>
+            <a:r>
+              <a:rPr sz="1100" b="0">
+                <a:solidFill>
+                  <a:srgbClr val="1C1C28"/>
+                </a:solidFill>
+              </a:rPr>
+              <a:t>Inside each folder are daily YYYYMMDDHH</a:t>
+            </a:r>
+          </a:p>
+          <a:p>
+            <a:pPr algn="l"/>
+            <a:r>
+              <a:rPr sz="1100" b="0">
+                <a:solidFill>
+                  <a:srgbClr val="1C1C28"/>
+                </a:solidFill>
+              </a:rPr>
+              <a:t>subdirectories, each containing .stat files</a:t>
+            </a:r>
+          </a:p>
+          <a:p>
+            <a:pPr algn="l"/>
+            <a:r>
+              <a:rPr sz="1100" b="0">
+                <a:solidFill>
+                  <a:srgbClr val="1C1C28"/>
+                </a:solidFill>
+              </a:rPr>
+              <a:t>for every forecast lead time and domain.</a:t>
+            </a:r>
+          </a:p>
+          <a:p>
+            <a:pPr algn="l"/>
+            <a:r>
+              <a:rPr sz="1100" b="0">
+                <a:solidFill>
+                  <a:srgbClr val="1C1C28"/>
+                </a:solidFill>
+              </a:rPr>
+              <a:t/>
+            </a:r>
+          </a:p>
+          <a:p>
+            <a:pPr algn="l"/>
+            <a:r>
+              <a:rPr sz="1100" b="0">
+                <a:solidFill>
+                  <a:srgbClr val="1C1C28"/>
+                </a:solidFill>
+              </a:rPr>
+              <a:t>Two types of verification output:</a:t>
+            </a:r>
+          </a:p>
+          <a:p>
+            <a:pPr algn="l"/>
+            <a:r>
+              <a:rPr sz="1100" b="0">
+                <a:solidFill>
+                  <a:srgbClr val="1C1C28"/>
+                </a:solidFill>
+              </a:rPr>
+              <a:t/>
+            </a:r>
+          </a:p>
+          <a:p>
+            <a:pPr algn="l"/>
+            <a:r>
+              <a:rPr sz="1100" b="0">
+                <a:solidFill>
+                  <a:srgbClr val="1C1C28"/>
+                </a:solidFill>
+              </a:rPr>
+              <a:t>  GridStat - deterministic scores</a:t>
+            </a:r>
+          </a:p>
+          <a:p>
+            <a:pPr algn="l"/>
+            <a:r>
+              <a:rPr sz="1100" b="0">
+                <a:solidFill>
+                  <a:srgbClr val="1C1C28"/>
+                </a:solidFill>
+              </a:rPr>
+              <a:t>  (bias, RMSE, MAE)</a:t>
+            </a:r>
+          </a:p>
+          <a:p>
+            <a:pPr algn="l"/>
+            <a:r>
+              <a:rPr sz="1100" b="0">
+                <a:solidFill>
+                  <a:srgbClr val="1C1C28"/>
+                </a:solidFill>
+              </a:rPr>
+              <a:t/>
+            </a:r>
+          </a:p>
+          <a:p>
+            <a:pPr algn="l"/>
+            <a:r>
+              <a:rPr sz="1100" b="0">
+                <a:solidFill>
+                  <a:srgbClr val="1C1C28"/>
+                </a:solidFill>
+              </a:rPr>
+              <a:t>  EnsembleStat - ensemble scores</a:t>
+            </a:r>
+          </a:p>
+          <a:p>
+            <a:pPr algn="l"/>
+            <a:r>
+              <a:rPr sz="1100" b="0">
+                <a:solidFill>
+                  <a:srgbClr val="1C1C28"/>
+                </a:solidFill>
+              </a:rPr>
+              <a:t>  (CRPS, Spread, Skill Score)</a:t>
+            </a:r>
+          </a:p>
+        </p:txBody>
+      </p:sp>
+      <p:sp>
+        <p:nvSpPr>
+          <p:cNvPr id="5" name="Rounded Rectangle 4"/>
           <p:cNvSpPr/>
           <p:nvPr/>
         </p:nvSpPr>
         <p:spPr>
           <a:xfrm>
-            <a:off x="6217920" y="1554480"/>
-            <a:ext cx="2743200" cy="347472"/>
-          </a:xfrm>
-          <a:prstGeom prst="rect">
+            <a:off x="6126480" y="914400"/>
+            <a:ext cx="5669280" cy="384048"/>
+          </a:xfrm>
+          <a:prstGeom prst="roundRect">
             <a:avLst/>
           </a:prstGeom>
           <a:solidFill>
-            <a:srgbClr val="EBF3FF"/>
+            <a:srgbClr val="2461E5"/>
           </a:solidFill>
-          <a:ln w="6350">
-            <a:solidFill>
-              <a:srgbClr val="2461E5"/>
-            </a:solidFill>
+          <a:ln>
+            <a:noFill/>
           </a:ln>
         </p:spPr>
         <p:style>
@@ -5201,92 +5115,40 @@
           </a:fontRef>
         </p:style>
         <p:txBody>
-          <a:bodyPr rtlCol="0" anchor="ctr" wrap="square" lIns="54864" rIns="54864" tIns="36576" bIns="36576"/>
+          <a:bodyPr rtlCol="0" anchor="ctr" wrap="square" lIns="73152" rIns="73152" tIns="36576" bIns="36576"/>
           <a:lstStyle/>
           <a:p>
             <a:pPr algn="ctr"/>
             <a:r>
-              <a:rPr sz="850" b="0">
-                <a:solidFill>
-                  <a:srgbClr val="2D2D2D"/>
-                </a:solidFill>
-              </a:rPr>
-              <a:t>AGlobal4_Analysis_T_AllLevels_00Z/</a:t>
-            </a:r>
-          </a:p>
-        </p:txBody>
-      </p:sp>
-      <p:sp>
-        <p:nvSpPr>
-          <p:cNvPr id="11" name="Rectangle 10"/>
-          <p:cNvSpPr/>
-          <p:nvPr/>
-        </p:nvSpPr>
-        <p:spPr>
-          <a:xfrm>
-            <a:off x="9052560" y="1554480"/>
-            <a:ext cx="2743200" cy="347472"/>
-          </a:xfrm>
-          <a:prstGeom prst="rect">
-            <a:avLst/>
-          </a:prstGeom>
-          <a:solidFill>
-            <a:srgbClr val="EBF3FF"/>
-          </a:solidFill>
-          <a:ln w="6350">
-            <a:solidFill>
-              <a:srgbClr val="2461E5"/>
-            </a:solidFill>
-          </a:ln>
-        </p:spPr>
-        <p:style>
-          <a:lnRef idx="1">
-            <a:schemeClr val="accent1"/>
-          </a:lnRef>
-          <a:fillRef idx="3">
-            <a:schemeClr val="accent1"/>
-          </a:fillRef>
-          <a:effectRef idx="2">
-            <a:schemeClr val="accent1"/>
-          </a:effectRef>
-          <a:fontRef idx="minor">
-            <a:schemeClr val="lt1"/>
-          </a:fontRef>
-        </p:style>
-        <p:txBody>
-          <a:bodyPr rtlCol="0" anchor="ctr" wrap="square" lIns="54864" rIns="54864" tIns="36576" bIns="36576"/>
-          <a:lstStyle/>
-          <a:p>
-            <a:pPr algn="ctr"/>
-            <a:r>
-              <a:rPr sz="850" b="0">
-                <a:solidFill>
-                  <a:srgbClr val="2D2D2D"/>
-                </a:solidFill>
-              </a:rPr>
-              <a:t>AGlobal4E_Analysis_T850_00Z/</a:t>
+              <a:rPr sz="1000" b="1">
+                <a:solidFill>
+                  <a:srgbClr val="FFFFFF"/>
+                </a:solidFill>
+              </a:rPr>
+              <a:t>input_all/</a:t>
             </a:r>
           </a:p>
         </p:txBody>
       </p:sp>
       <p:cxnSp>
         <p:nvCxnSpPr>
-          <p:cNvPr id="12" name="Connector 11"/>
+          <p:cNvPr id="6" name="Connector 5"/>
           <p:cNvCxnSpPr/>
           <p:nvPr/>
         </p:nvCxnSpPr>
         <p:spPr>
           <a:xfrm>
-            <a:off x="7589520" y="1371600"/>
-            <a:ext cx="0" cy="182880"/>
+            <a:off x="7543800" y="1298448"/>
+            <a:ext cx="0" cy="237744"/>
           </a:xfrm>
           <a:prstGeom prst="line">
             <a:avLst/>
           </a:prstGeom>
           <a:ln w="12700">
             <a:solidFill>
-              <a:srgbClr val="CCCCCC"/>
+              <a:srgbClr val="B8B8C4"/>
             </a:solidFill>
+            <a:tailEnd type="arrow" w="med" len="med"/>
           </a:ln>
         </p:spPr>
         <p:style>
@@ -5306,22 +5168,23 @@
       </p:cxnSp>
       <p:cxnSp>
         <p:nvCxnSpPr>
-          <p:cNvPr id="13" name="Connector 12"/>
+          <p:cNvPr id="7" name="Connector 6"/>
           <p:cNvCxnSpPr/>
           <p:nvPr/>
         </p:nvCxnSpPr>
         <p:spPr>
           <a:xfrm>
-            <a:off x="10424159" y="1371600"/>
-            <a:ext cx="0" cy="182880"/>
+            <a:off x="10378440" y="1298448"/>
+            <a:ext cx="0" cy="237744"/>
           </a:xfrm>
           <a:prstGeom prst="line">
             <a:avLst/>
           </a:prstGeom>
           <a:ln w="12700">
             <a:solidFill>
-              <a:srgbClr val="CCCCCC"/>
+              <a:srgbClr val="B8B8C4"/>
             </a:solidFill>
+            <a:tailEnd type="arrow" w="med" len="med"/>
           </a:ln>
         </p:spPr>
         <p:style>
@@ -5341,22 +5204,23 @@
       </p:cxnSp>
       <p:cxnSp>
         <p:nvCxnSpPr>
-          <p:cNvPr id="14" name="Connector 13"/>
+          <p:cNvPr id="8" name="Connector 7"/>
           <p:cNvCxnSpPr/>
           <p:nvPr/>
         </p:nvCxnSpPr>
         <p:spPr>
           <a:xfrm>
-            <a:off x="7589520" y="1371600"/>
-            <a:ext cx="2834639" cy="0"/>
+            <a:off x="7543800" y="1417320"/>
+            <a:ext cx="2834640" cy="0"/>
           </a:xfrm>
           <a:prstGeom prst="line">
             <a:avLst/>
           </a:prstGeom>
           <a:ln w="12700">
             <a:solidFill>
-              <a:srgbClr val="CCCCCC"/>
+              <a:srgbClr val="B8B8C4"/>
             </a:solidFill>
+            <a:tailEnd type="arrow" w="med" len="med"/>
           </a:ln>
         </p:spPr>
         <p:style>
@@ -5376,25 +5240,23 @@
       </p:cxnSp>
       <p:sp>
         <p:nvSpPr>
-          <p:cNvPr id="15" name="Rectangle 14"/>
+          <p:cNvPr id="9" name="Rounded Rectangle 8"/>
           <p:cNvSpPr/>
           <p:nvPr/>
         </p:nvSpPr>
         <p:spPr>
           <a:xfrm>
-            <a:off x="6217920" y="2057400"/>
-            <a:ext cx="2743200" cy="320040"/>
-          </a:xfrm>
-          <a:prstGeom prst="rect">
+            <a:off x="6126480" y="1536192"/>
+            <a:ext cx="2743200" cy="365760"/>
+          </a:xfrm>
+          <a:prstGeom prst="roundRect">
             <a:avLst/>
           </a:prstGeom>
           <a:solidFill>
-            <a:srgbClr val="F2F2F2"/>
+            <a:srgbClr val="153ABF"/>
           </a:solidFill>
-          <a:ln w="6350">
-            <a:solidFill>
-              <a:srgbClr val="CCCCCC"/>
-            </a:solidFill>
+          <a:ln>
+            <a:noFill/>
           </a:ln>
         </p:spPr>
         <p:style>
@@ -5412,42 +5274,40 @@
           </a:fontRef>
         </p:style>
         <p:txBody>
-          <a:bodyPr rtlCol="0" anchor="ctr" wrap="square" lIns="54864" rIns="54864" tIns="36576" bIns="36576"/>
+          <a:bodyPr rtlCol="0" anchor="ctr" wrap="square" lIns="73152" rIns="73152" tIns="36576" bIns="36576"/>
           <a:lstStyle/>
           <a:p>
             <a:pPr algn="ctr"/>
             <a:r>
               <a:rPr sz="850" b="0">
                 <a:solidFill>
-                  <a:srgbClr val="2D2D2D"/>
-                </a:solidFill>
-              </a:rPr>
-              <a:t>GridStat/  2026041000/</a:t>
-            </a:r>
-          </a:p>
-        </p:txBody>
-      </p:sp>
-      <p:sp>
-        <p:nvSpPr>
-          <p:cNvPr id="16" name="Rectangle 15"/>
+                  <a:srgbClr val="FFFFFF"/>
+                </a:solidFill>
+              </a:rPr>
+              <a:t>AGlobal4_Analysis_T_AllLevels_00Z/</a:t>
+            </a:r>
+          </a:p>
+        </p:txBody>
+      </p:sp>
+      <p:sp>
+        <p:nvSpPr>
+          <p:cNvPr id="10" name="Rounded Rectangle 9"/>
           <p:cNvSpPr/>
           <p:nvPr/>
         </p:nvSpPr>
         <p:spPr>
           <a:xfrm>
-            <a:off x="6217920" y="2532888"/>
-            <a:ext cx="841248" cy="256032"/>
-          </a:xfrm>
-          <a:prstGeom prst="rect">
+            <a:off x="8961120" y="1536192"/>
+            <a:ext cx="2743200" cy="365760"/>
+          </a:xfrm>
+          <a:prstGeom prst="roundRect">
             <a:avLst/>
           </a:prstGeom>
           <a:solidFill>
-            <a:srgbClr val="E8F5E9"/>
+            <a:srgbClr val="153ABF"/>
           </a:solidFill>
-          <a:ln w="6350">
-            <a:solidFill>
-              <a:srgbClr val="107C10"/>
-            </a:solidFill>
+          <a:ln>
+            <a:noFill/>
           </a:ln>
         </p:spPr>
         <p:style>
@@ -5465,41 +5325,77 @@
           </a:fontRef>
         </p:style>
         <p:txBody>
-          <a:bodyPr rtlCol="0" anchor="ctr" wrap="square" lIns="54864" rIns="54864" tIns="36576" bIns="36576"/>
+          <a:bodyPr rtlCol="0" anchor="ctr" wrap="square" lIns="73152" rIns="73152" tIns="36576" bIns="36576"/>
           <a:lstStyle/>
           <a:p>
             <a:pPr algn="ctr"/>
             <a:r>
-              <a:rPr sz="800" b="0">
-                <a:solidFill>
-                  <a:srgbClr val="107C10"/>
-                </a:solidFill>
-              </a:rPr>
-              <a:t>_cnt.txt</a:t>
-            </a:r>
-          </a:p>
-        </p:txBody>
-      </p:sp>
-      <p:sp>
-        <p:nvSpPr>
-          <p:cNvPr id="17" name="Rectangle 16"/>
+              <a:rPr sz="850" b="0">
+                <a:solidFill>
+                  <a:srgbClr val="FFFFFF"/>
+                </a:solidFill>
+              </a:rPr>
+              <a:t>AGlobal4E_Analysis_T850_00Z/</a:t>
+            </a:r>
+          </a:p>
+        </p:txBody>
+      </p:sp>
+      <p:cxnSp>
+        <p:nvCxnSpPr>
+          <p:cNvPr id="11" name="Connector 10"/>
+          <p:cNvCxnSpPr/>
+          <p:nvPr/>
+        </p:nvCxnSpPr>
+        <p:spPr>
+          <a:xfrm>
+            <a:off x="7498079" y="1901952"/>
+            <a:ext cx="0" cy="201168"/>
+          </a:xfrm>
+          <a:prstGeom prst="line">
+            <a:avLst/>
+          </a:prstGeom>
+          <a:ln w="10160">
+            <a:solidFill>
+              <a:srgbClr val="B8B8C4"/>
+            </a:solidFill>
+            <a:tailEnd type="arrow" w="med" len="med"/>
+          </a:ln>
+        </p:spPr>
+        <p:style>
+          <a:lnRef idx="2">
+            <a:schemeClr val="accent1"/>
+          </a:lnRef>
+          <a:fillRef idx="0">
+            <a:schemeClr val="accent1"/>
+          </a:fillRef>
+          <a:effectRef idx="1">
+            <a:schemeClr val="accent1"/>
+          </a:effectRef>
+          <a:fontRef idx="minor">
+            <a:schemeClr val="tx1"/>
+          </a:fontRef>
+        </p:style>
+      </p:cxnSp>
+      <p:sp>
+        <p:nvSpPr>
+          <p:cNvPr id="12" name="Rectangle 11"/>
           <p:cNvSpPr/>
           <p:nvPr/>
         </p:nvSpPr>
         <p:spPr>
           <a:xfrm>
-            <a:off x="7104888" y="2532888"/>
-            <a:ext cx="896112" cy="256032"/>
+            <a:off x="6126480" y="2103120"/>
+            <a:ext cx="2743200" cy="329184"/>
           </a:xfrm>
           <a:prstGeom prst="rect">
             <a:avLst/>
           </a:prstGeom>
           <a:solidFill>
-            <a:srgbClr val="E8F5E9"/>
+            <a:srgbClr val="F5F5F7"/>
           </a:solidFill>
-          <a:ln w="6350">
+          <a:ln w="5080">
             <a:solidFill>
-              <a:srgbClr val="107C10"/>
+              <a:srgbClr val="B8B8C4"/>
             </a:solidFill>
           </a:ln>
         </p:spPr>
@@ -5518,42 +5414,40 @@
           </a:fontRef>
         </p:style>
         <p:txBody>
-          <a:bodyPr rtlCol="0" anchor="ctr" wrap="square" lIns="54864" rIns="54864" tIns="36576" bIns="36576"/>
+          <a:bodyPr rtlCol="0" anchor="ctr" wrap="square" lIns="73152" rIns="73152" tIns="36576" bIns="36576"/>
           <a:lstStyle/>
           <a:p>
             <a:pPr algn="ctr"/>
             <a:r>
-              <a:rPr sz="800" b="0">
-                <a:solidFill>
-                  <a:srgbClr val="107C10"/>
-                </a:solidFill>
-              </a:rPr>
-              <a:t>_sl1l2.txt</a:t>
-            </a:r>
-          </a:p>
-        </p:txBody>
-      </p:sp>
-      <p:sp>
-        <p:nvSpPr>
-          <p:cNvPr id="18" name="Rectangle 17"/>
+              <a:rPr sz="850" b="0">
+                <a:solidFill>
+                  <a:srgbClr val="6E6E78"/>
+                </a:solidFill>
+              </a:rPr>
+              <a:t>GridStat/  2026041000/</a:t>
+            </a:r>
+          </a:p>
+        </p:txBody>
+      </p:sp>
+      <p:sp>
+        <p:nvSpPr>
+          <p:cNvPr id="13" name="Rounded Rectangle 12"/>
           <p:cNvSpPr/>
           <p:nvPr/>
         </p:nvSpPr>
         <p:spPr>
           <a:xfrm>
-            <a:off x="8046720" y="2532888"/>
-            <a:ext cx="896112" cy="256032"/>
-          </a:xfrm>
-          <a:prstGeom prst="rect">
+            <a:off x="6126480" y="2560320"/>
+            <a:ext cx="841248" cy="256032"/>
+          </a:xfrm>
+          <a:prstGeom prst="roundRect">
             <a:avLst/>
           </a:prstGeom>
           <a:solidFill>
-            <a:srgbClr val="E8F5E9"/>
+            <a:srgbClr val="107C10"/>
           </a:solidFill>
-          <a:ln w="6350">
-            <a:solidFill>
-              <a:srgbClr val="107C10"/>
-            </a:solidFill>
+          <a:ln>
+            <a:noFill/>
           </a:ln>
         </p:spPr>
         <p:style>
@@ -5571,42 +5465,40 @@
           </a:fontRef>
         </p:style>
         <p:txBody>
-          <a:bodyPr rtlCol="0" anchor="ctr" wrap="square" lIns="54864" rIns="54864" tIns="36576" bIns="36576"/>
+          <a:bodyPr rtlCol="0" anchor="ctr" wrap="square" lIns="73152" rIns="73152" tIns="36576" bIns="36576"/>
           <a:lstStyle/>
           <a:p>
             <a:pPr algn="ctr"/>
             <a:r>
               <a:rPr sz="800" b="0">
                 <a:solidFill>
-                  <a:srgbClr val="107C10"/>
-                </a:solidFill>
-              </a:rPr>
-              <a:t>_sal1l2.txt</a:t>
-            </a:r>
-          </a:p>
-        </p:txBody>
-      </p:sp>
-      <p:sp>
-        <p:nvSpPr>
-          <p:cNvPr id="19" name="Rectangle 18"/>
+                  <a:srgbClr val="FFFFFF"/>
+                </a:solidFill>
+              </a:rPr>
+              <a:t>_cnt.txt</a:t>
+            </a:r>
+          </a:p>
+        </p:txBody>
+      </p:sp>
+      <p:sp>
+        <p:nvSpPr>
+          <p:cNvPr id="14" name="Rounded Rectangle 13"/>
           <p:cNvSpPr/>
           <p:nvPr/>
         </p:nvSpPr>
         <p:spPr>
           <a:xfrm>
-            <a:off x="9052560" y="2057400"/>
-            <a:ext cx="1325880" cy="320040"/>
-          </a:xfrm>
-          <a:prstGeom prst="rect">
+            <a:off x="7013448" y="2560320"/>
+            <a:ext cx="896112" cy="256032"/>
+          </a:xfrm>
+          <a:prstGeom prst="roundRect">
             <a:avLst/>
           </a:prstGeom>
           <a:solidFill>
-            <a:srgbClr val="F2F2F2"/>
+            <a:srgbClr val="107C10"/>
           </a:solidFill>
-          <a:ln w="6350">
-            <a:solidFill>
-              <a:srgbClr val="CCCCCC"/>
-            </a:solidFill>
+          <a:ln>
+            <a:noFill/>
           </a:ln>
         </p:spPr>
         <p:style>
@@ -5624,42 +5516,40 @@
           </a:fontRef>
         </p:style>
         <p:txBody>
-          <a:bodyPr rtlCol="0" anchor="ctr" wrap="square" lIns="54864" rIns="54864" tIns="36576" bIns="36576"/>
+          <a:bodyPr rtlCol="0" anchor="ctr" wrap="square" lIns="73152" rIns="73152" tIns="36576" bIns="36576"/>
           <a:lstStyle/>
           <a:p>
             <a:pPr algn="ctr"/>
             <a:r>
-              <a:rPr sz="850" b="0">
-                <a:solidFill>
-                  <a:srgbClr val="2D2D2D"/>
-                </a:solidFill>
-              </a:rPr>
-              <a:t>GridStat/</a:t>
-            </a:r>
-          </a:p>
-        </p:txBody>
-      </p:sp>
-      <p:sp>
-        <p:nvSpPr>
-          <p:cNvPr id="20" name="Rectangle 19"/>
+              <a:rPr sz="800" b="0">
+                <a:solidFill>
+                  <a:srgbClr val="FFFFFF"/>
+                </a:solidFill>
+              </a:rPr>
+              <a:t>_sl1l2.txt</a:t>
+            </a:r>
+          </a:p>
+        </p:txBody>
+      </p:sp>
+      <p:sp>
+        <p:nvSpPr>
+          <p:cNvPr id="15" name="Rounded Rectangle 14"/>
           <p:cNvSpPr/>
           <p:nvPr/>
         </p:nvSpPr>
         <p:spPr>
           <a:xfrm>
-            <a:off x="10469880" y="2057400"/>
-            <a:ext cx="1325880" cy="320040"/>
-          </a:xfrm>
-          <a:prstGeom prst="rect">
+            <a:off x="7955279" y="2560320"/>
+            <a:ext cx="896112" cy="256032"/>
+          </a:xfrm>
+          <a:prstGeom prst="roundRect">
             <a:avLst/>
           </a:prstGeom>
           <a:solidFill>
-            <a:srgbClr val="F2F2F2"/>
+            <a:srgbClr val="107C10"/>
           </a:solidFill>
-          <a:ln w="6350">
-            <a:solidFill>
-              <a:srgbClr val="CCCCCC"/>
-            </a:solidFill>
+          <a:ln>
+            <a:noFill/>
           </a:ln>
         </p:spPr>
         <p:style>
@@ -5677,41 +5567,77 @@
           </a:fontRef>
         </p:style>
         <p:txBody>
-          <a:bodyPr rtlCol="0" anchor="ctr" wrap="square" lIns="54864" rIns="54864" tIns="36576" bIns="36576"/>
+          <a:bodyPr rtlCol="0" anchor="ctr" wrap="square" lIns="73152" rIns="73152" tIns="36576" bIns="36576"/>
           <a:lstStyle/>
           <a:p>
             <a:pPr algn="ctr"/>
             <a:r>
-              <a:rPr sz="850" b="0">
-                <a:solidFill>
-                  <a:srgbClr val="2D2D2D"/>
-                </a:solidFill>
-              </a:rPr>
-              <a:t>EnsembleStat/</a:t>
-            </a:r>
-          </a:p>
-        </p:txBody>
-      </p:sp>
-      <p:sp>
-        <p:nvSpPr>
-          <p:cNvPr id="21" name="Rectangle 20"/>
+              <a:rPr sz="800" b="0">
+                <a:solidFill>
+                  <a:srgbClr val="FFFFFF"/>
+                </a:solidFill>
+              </a:rPr>
+              <a:t>_sal1l2.txt</a:t>
+            </a:r>
+          </a:p>
+        </p:txBody>
+      </p:sp>
+      <p:cxnSp>
+        <p:nvCxnSpPr>
+          <p:cNvPr id="16" name="Connector 15"/>
+          <p:cNvCxnSpPr/>
+          <p:nvPr/>
+        </p:nvCxnSpPr>
+        <p:spPr>
+          <a:xfrm>
+            <a:off x="10332720" y="1901952"/>
+            <a:ext cx="0" cy="201168"/>
+          </a:xfrm>
+          <a:prstGeom prst="line">
+            <a:avLst/>
+          </a:prstGeom>
+          <a:ln w="10160">
+            <a:solidFill>
+              <a:srgbClr val="B8B8C4"/>
+            </a:solidFill>
+            <a:tailEnd type="arrow" w="med" len="med"/>
+          </a:ln>
+        </p:spPr>
+        <p:style>
+          <a:lnRef idx="2">
+            <a:schemeClr val="accent1"/>
+          </a:lnRef>
+          <a:fillRef idx="0">
+            <a:schemeClr val="accent1"/>
+          </a:fillRef>
+          <a:effectRef idx="1">
+            <a:schemeClr val="accent1"/>
+          </a:effectRef>
+          <a:fontRef idx="minor">
+            <a:schemeClr val="tx1"/>
+          </a:fontRef>
+        </p:style>
+      </p:cxnSp>
+      <p:sp>
+        <p:nvSpPr>
+          <p:cNvPr id="17" name="Rectangle 16"/>
           <p:cNvSpPr/>
           <p:nvPr/>
         </p:nvSpPr>
         <p:spPr>
           <a:xfrm>
-            <a:off x="9052560" y="2532888"/>
-            <a:ext cx="1325880" cy="256032"/>
+            <a:off x="8961120" y="2103120"/>
+            <a:ext cx="1325880" cy="329184"/>
           </a:xfrm>
           <a:prstGeom prst="rect">
             <a:avLst/>
           </a:prstGeom>
           <a:solidFill>
-            <a:srgbClr val="E8F5E9"/>
+            <a:srgbClr val="F5F5F7"/>
           </a:solidFill>
-          <a:ln w="6350">
+          <a:ln w="5080">
             <a:solidFill>
-              <a:srgbClr val="107C10"/>
+              <a:srgbClr val="B8B8C4"/>
             </a:solidFill>
           </a:ln>
         </p:spPr>
@@ -5730,41 +5656,41 @@
           </a:fontRef>
         </p:style>
         <p:txBody>
-          <a:bodyPr rtlCol="0" anchor="ctr" wrap="square" lIns="54864" rIns="54864" tIns="36576" bIns="36576"/>
+          <a:bodyPr rtlCol="0" anchor="ctr" wrap="square" lIns="73152" rIns="73152" tIns="36576" bIns="36576"/>
           <a:lstStyle/>
           <a:p>
             <a:pPr algn="ctr"/>
             <a:r>
-              <a:rPr sz="800" b="0">
-                <a:solidFill>
-                  <a:srgbClr val="107C10"/>
-                </a:solidFill>
-              </a:rPr>
-              <a:t>_cnt.txt</a:t>
-            </a:r>
-          </a:p>
-        </p:txBody>
-      </p:sp>
-      <p:sp>
-        <p:nvSpPr>
-          <p:cNvPr id="22" name="Rectangle 21"/>
+              <a:rPr sz="850" b="0">
+                <a:solidFill>
+                  <a:srgbClr val="6E6E78"/>
+                </a:solidFill>
+              </a:rPr>
+              <a:t>GridStat/</a:t>
+            </a:r>
+          </a:p>
+        </p:txBody>
+      </p:sp>
+      <p:sp>
+        <p:nvSpPr>
+          <p:cNvPr id="18" name="Rectangle 17"/>
           <p:cNvSpPr/>
           <p:nvPr/>
         </p:nvSpPr>
         <p:spPr>
           <a:xfrm>
-            <a:off x="10469880" y="2532888"/>
-            <a:ext cx="1325880" cy="256032"/>
+            <a:off x="10378440" y="2103120"/>
+            <a:ext cx="1325880" cy="329184"/>
           </a:xfrm>
           <a:prstGeom prst="rect">
             <a:avLst/>
           </a:prstGeom>
           <a:solidFill>
-            <a:srgbClr val="FEF0E7"/>
+            <a:srgbClr val="F5F5F7"/>
           </a:solidFill>
-          <a:ln w="6350">
+          <a:ln w="5080">
             <a:solidFill>
-              <a:srgbClr val="CC5000"/>
+              <a:srgbClr val="B8B8C4"/>
             </a:solidFill>
           </a:ln>
         </p:spPr>
@@ -5783,42 +5709,40 @@
           </a:fontRef>
         </p:style>
         <p:txBody>
-          <a:bodyPr rtlCol="0" anchor="ctr" wrap="square" lIns="54864" rIns="54864" tIns="36576" bIns="36576"/>
+          <a:bodyPr rtlCol="0" anchor="ctr" wrap="square" lIns="73152" rIns="73152" tIns="36576" bIns="36576"/>
           <a:lstStyle/>
           <a:p>
             <a:pPr algn="ctr"/>
             <a:r>
-              <a:rPr sz="800" b="0">
-                <a:solidFill>
-                  <a:srgbClr val="CC5000"/>
-                </a:solidFill>
-              </a:rPr>
-              <a:t>_ecnt.txt</a:t>
-            </a:r>
-          </a:p>
-        </p:txBody>
-      </p:sp>
-      <p:sp>
-        <p:nvSpPr>
-          <p:cNvPr id="23" name="Rectangle 22"/>
+              <a:rPr sz="850" b="0">
+                <a:solidFill>
+                  <a:srgbClr val="6E6E78"/>
+                </a:solidFill>
+              </a:rPr>
+              <a:t>EnsembleStat/</a:t>
+            </a:r>
+          </a:p>
+        </p:txBody>
+      </p:sp>
+      <p:sp>
+        <p:nvSpPr>
+          <p:cNvPr id="19" name="Rounded Rectangle 18"/>
           <p:cNvSpPr/>
           <p:nvPr/>
         </p:nvSpPr>
         <p:spPr>
           <a:xfrm>
-            <a:off x="6217920" y="2971800"/>
-            <a:ext cx="5669280" cy="9144"/>
-          </a:xfrm>
-          <a:prstGeom prst="rect">
+            <a:off x="8961120" y="2560320"/>
+            <a:ext cx="1325880" cy="256032"/>
+          </a:xfrm>
+          <a:prstGeom prst="roundRect">
             <a:avLst/>
           </a:prstGeom>
           <a:solidFill>
-            <a:srgbClr val="CCCCCC"/>
+            <a:srgbClr val="107C10"/>
           </a:solidFill>
-          <a:ln w="9525">
-            <a:solidFill>
-              <a:srgbClr val="CCCCCC"/>
-            </a:solidFill>
+          <a:ln>
+            <a:noFill/>
           </a:ln>
         </p:spPr>
         <p:style>
@@ -5836,68 +5760,40 @@
           </a:fontRef>
         </p:style>
         <p:txBody>
-          <a:bodyPr rtlCol="0" anchor="ctr"/>
+          <a:bodyPr rtlCol="0" anchor="ctr" wrap="square" lIns="73152" rIns="73152" tIns="36576" bIns="36576"/>
           <a:lstStyle/>
           <a:p>
             <a:pPr algn="ctr"/>
-          </a:p>
-        </p:txBody>
-      </p:sp>
-      <p:sp>
-        <p:nvSpPr>
-          <p:cNvPr id="24" name="TextBox 23"/>
-          <p:cNvSpPr txBox="1"/>
-          <p:nvPr/>
-        </p:nvSpPr>
-        <p:spPr>
-          <a:xfrm>
-            <a:off x="6217920" y="3063240"/>
-            <a:ext cx="5669280" cy="274320"/>
-          </a:xfrm>
-          <a:prstGeom prst="rect">
-            <a:avLst/>
-          </a:prstGeom>
-          <a:noFill/>
-        </p:spPr>
-        <p:txBody>
-          <a:bodyPr wrap="square">
-            <a:spAutoFit/>
-          </a:bodyPr>
-          <a:lstStyle/>
-          <a:p>
-            <a:pPr algn="l"/>
-            <a:r>
-              <a:rPr sz="850" b="1">
-                <a:solidFill>
-                  <a:srgbClr val="606060"/>
-                </a:solidFill>
-              </a:rPr>
-              <a:t>Legend:</a:t>
-            </a:r>
-          </a:p>
-        </p:txBody>
-      </p:sp>
-      <p:sp>
-        <p:nvSpPr>
-          <p:cNvPr id="25" name="Rectangle 24"/>
+            <a:r>
+              <a:rPr sz="800" b="0">
+                <a:solidFill>
+                  <a:srgbClr val="FFFFFF"/>
+                </a:solidFill>
+              </a:rPr>
+              <a:t>_cnt.txt</a:t>
+            </a:r>
+          </a:p>
+        </p:txBody>
+      </p:sp>
+      <p:sp>
+        <p:nvSpPr>
+          <p:cNvPr id="20" name="Rounded Rectangle 19"/>
           <p:cNvSpPr/>
           <p:nvPr/>
         </p:nvSpPr>
         <p:spPr>
           <a:xfrm>
-            <a:off x="6217920" y="3337560"/>
-            <a:ext cx="914400" cy="256032"/>
-          </a:xfrm>
-          <a:prstGeom prst="rect">
+            <a:off x="10378440" y="2560320"/>
+            <a:ext cx="1325880" cy="256032"/>
+          </a:xfrm>
+          <a:prstGeom prst="roundRect">
             <a:avLst/>
           </a:prstGeom>
           <a:solidFill>
-            <a:srgbClr val="E8F5E9"/>
+            <a:srgbClr val="C04800"/>
           </a:solidFill>
-          <a:ln w="6350">
-            <a:solidFill>
-              <a:srgbClr val="107C10"/>
-            </a:solidFill>
+          <a:ln>
+            <a:noFill/>
           </a:ln>
         </p:spPr>
         <p:style>
@@ -5915,31 +5811,31 @@
           </a:fontRef>
         </p:style>
         <p:txBody>
-          <a:bodyPr rtlCol="0" anchor="ctr" wrap="square" lIns="54864" rIns="54864" tIns="36576" bIns="36576"/>
+          <a:bodyPr rtlCol="0" anchor="ctr" wrap="square" lIns="73152" rIns="73152" tIns="36576" bIns="36576"/>
           <a:lstStyle/>
           <a:p>
             <a:pPr algn="ctr"/>
             <a:r>
               <a:rPr sz="800" b="0">
                 <a:solidFill>
-                  <a:srgbClr val="107C10"/>
-                </a:solidFill>
-              </a:rPr>
-              <a:t>GridStat</a:t>
-            </a:r>
-          </a:p>
-        </p:txBody>
-      </p:sp>
-      <p:sp>
-        <p:nvSpPr>
-          <p:cNvPr id="26" name="TextBox 25"/>
+                  <a:srgbClr val="FFFFFF"/>
+                </a:solidFill>
+              </a:rPr>
+              <a:t>_ecnt.txt</a:t>
+            </a:r>
+          </a:p>
+        </p:txBody>
+      </p:sp>
+      <p:sp>
+        <p:nvSpPr>
+          <p:cNvPr id="21" name="TextBox 20"/>
           <p:cNvSpPr txBox="1"/>
           <p:nvPr/>
         </p:nvSpPr>
         <p:spPr>
           <a:xfrm>
-            <a:off x="7223760" y="3337560"/>
-            <a:ext cx="1828800" cy="274320"/>
+            <a:off x="6126480" y="3017520"/>
+            <a:ext cx="5669280" cy="256032"/>
           </a:xfrm>
           <a:prstGeom prst="rect">
             <a:avLst/>
@@ -5954,37 +5850,35 @@
           <a:p>
             <a:pPr algn="l"/>
             <a:r>
-              <a:rPr sz="850" b="0">
-                <a:solidFill>
-                  <a:srgbClr val="2D2D2D"/>
-                </a:solidFill>
-              </a:rPr>
-              <a:t>Deterministic stats (CNT, SL1L2, SAL1L2)</a:t>
-            </a:r>
-          </a:p>
-        </p:txBody>
-      </p:sp>
-      <p:sp>
-        <p:nvSpPr>
-          <p:cNvPr id="27" name="Rectangle 26"/>
+              <a:rPr sz="850" b="1">
+                <a:solidFill>
+                  <a:srgbClr val="6E6E78"/>
+                </a:solidFill>
+              </a:rPr>
+              <a:t>Legend</a:t>
+            </a:r>
+          </a:p>
+        </p:txBody>
+      </p:sp>
+      <p:sp>
+        <p:nvSpPr>
+          <p:cNvPr id="22" name="Rounded Rectangle 21"/>
           <p:cNvSpPr/>
           <p:nvPr/>
         </p:nvSpPr>
         <p:spPr>
           <a:xfrm>
-            <a:off x="9052560" y="3337560"/>
-            <a:ext cx="1097280" cy="256032"/>
-          </a:xfrm>
-          <a:prstGeom prst="rect">
+            <a:off x="6126480" y="3291840"/>
+            <a:ext cx="868680" cy="256032"/>
+          </a:xfrm>
+          <a:prstGeom prst="roundRect">
             <a:avLst/>
           </a:prstGeom>
           <a:solidFill>
-            <a:srgbClr val="FEF0E7"/>
+            <a:srgbClr val="107C10"/>
           </a:solidFill>
-          <a:ln w="6350">
-            <a:solidFill>
-              <a:srgbClr val="CC5000"/>
-            </a:solidFill>
+          <a:ln>
+            <a:noFill/>
           </a:ln>
         </p:spPr>
         <p:style>
@@ -6002,31 +5896,31 @@
           </a:fontRef>
         </p:style>
         <p:txBody>
-          <a:bodyPr rtlCol="0" anchor="ctr" wrap="square" lIns="54864" rIns="54864" tIns="36576" bIns="36576"/>
+          <a:bodyPr rtlCol="0" anchor="ctr" wrap="square" lIns="73152" rIns="73152" tIns="36576" bIns="36576"/>
           <a:lstStyle/>
           <a:p>
             <a:pPr algn="ctr"/>
             <a:r>
               <a:rPr sz="800" b="0">
                 <a:solidFill>
-                  <a:srgbClr val="CC5000"/>
-                </a:solidFill>
-              </a:rPr>
-              <a:t>EnsembleStat</a:t>
-            </a:r>
-          </a:p>
-        </p:txBody>
-      </p:sp>
-      <p:sp>
-        <p:nvSpPr>
-          <p:cNvPr id="28" name="TextBox 27"/>
+                  <a:srgbClr val="FFFFFF"/>
+                </a:solidFill>
+              </a:rPr>
+              <a:t>GridStat</a:t>
+            </a:r>
+          </a:p>
+        </p:txBody>
+      </p:sp>
+      <p:sp>
+        <p:nvSpPr>
+          <p:cNvPr id="23" name="TextBox 22"/>
           <p:cNvSpPr txBox="1"/>
           <p:nvPr/>
         </p:nvSpPr>
         <p:spPr>
           <a:xfrm>
-            <a:off x="10241280" y="3337560"/>
-            <a:ext cx="1828800" cy="274320"/>
+            <a:off x="7086600" y="3291840"/>
+            <a:ext cx="2011680" cy="274320"/>
           </a:xfrm>
           <a:prstGeom prst="rect">
             <a:avLst/>
@@ -6043,10 +5937,95 @@
             <a:r>
               <a:rPr sz="850" b="0">
                 <a:solidFill>
-                  <a:srgbClr val="2D2D2D"/>
-                </a:solidFill>
-              </a:rPr>
-              <a:t>Ensemble stats (ECNT)</a:t>
+                  <a:srgbClr val="1C1C28"/>
+                </a:solidFill>
+              </a:rPr>
+              <a:t>Deterministic (CNT, SL1L2, SAL1L2)</a:t>
+            </a:r>
+          </a:p>
+        </p:txBody>
+      </p:sp>
+      <p:sp>
+        <p:nvSpPr>
+          <p:cNvPr id="24" name="Rounded Rectangle 23"/>
+          <p:cNvSpPr/>
+          <p:nvPr/>
+        </p:nvSpPr>
+        <p:spPr>
+          <a:xfrm>
+            <a:off x="8961120" y="3291840"/>
+            <a:ext cx="1097280" cy="256032"/>
+          </a:xfrm>
+          <a:prstGeom prst="roundRect">
+            <a:avLst/>
+          </a:prstGeom>
+          <a:solidFill>
+            <a:srgbClr val="C04800"/>
+          </a:solidFill>
+          <a:ln>
+            <a:noFill/>
+          </a:ln>
+        </p:spPr>
+        <p:style>
+          <a:lnRef idx="1">
+            <a:schemeClr val="accent1"/>
+          </a:lnRef>
+          <a:fillRef idx="3">
+            <a:schemeClr val="accent1"/>
+          </a:fillRef>
+          <a:effectRef idx="2">
+            <a:schemeClr val="accent1"/>
+          </a:effectRef>
+          <a:fontRef idx="minor">
+            <a:schemeClr val="lt1"/>
+          </a:fontRef>
+        </p:style>
+        <p:txBody>
+          <a:bodyPr rtlCol="0" anchor="ctr" wrap="square" lIns="73152" rIns="73152" tIns="36576" bIns="36576"/>
+          <a:lstStyle/>
+          <a:p>
+            <a:pPr algn="ctr"/>
+            <a:r>
+              <a:rPr sz="800" b="0">
+                <a:solidFill>
+                  <a:srgbClr val="FFFFFF"/>
+                </a:solidFill>
+              </a:rPr>
+              <a:t>EnsembleStat</a:t>
+            </a:r>
+          </a:p>
+        </p:txBody>
+      </p:sp>
+      <p:sp>
+        <p:nvSpPr>
+          <p:cNvPr id="25" name="TextBox 24"/>
+          <p:cNvSpPr txBox="1"/>
+          <p:nvPr/>
+        </p:nvSpPr>
+        <p:spPr>
+          <a:xfrm>
+            <a:off x="10149840" y="3291840"/>
+            <a:ext cx="1828800" cy="274320"/>
+          </a:xfrm>
+          <a:prstGeom prst="rect">
+            <a:avLst/>
+          </a:prstGeom>
+          <a:noFill/>
+        </p:spPr>
+        <p:txBody>
+          <a:bodyPr wrap="square">
+            <a:spAutoFit/>
+          </a:bodyPr>
+          <a:lstStyle/>
+          <a:p>
+            <a:pPr algn="l"/>
+            <a:r>
+              <a:rPr sz="850" b="0">
+                <a:solidFill>
+                  <a:srgbClr val="1C1C28"/>
+                </a:solidFill>
+              </a:rPr>
+              <a:t>Ensemble (ECNT)</a:t>
             </a:r>
           </a:p>
         </p:txBody>
@@ -6071,89 +6050,14 @@
       <p:grpSpPr/>
       <p:sp>
         <p:nvSpPr>
-          <p:cNvPr id="2" name="Picture Placeholder 1"/>
-          <p:cNvSpPr>
-            <a:spLocks noGrp="1"/>
-          </p:cNvSpPr>
-          <p:nvPr>
-            <p:ph type="pic" idx="11" sz="quarter"/>
-          </p:nvPr>
-        </p:nvSpPr>
-        <p:spPr/>
-      </p:sp>
-      <p:sp>
-        <p:nvSpPr>
-          <p:cNvPr id="3" name="Picture Placeholder 2"/>
-          <p:cNvSpPr>
-            <a:spLocks noGrp="1"/>
-          </p:cNvSpPr>
-          <p:nvPr>
-            <p:ph type="pic" idx="12" sz="quarter"/>
-          </p:nvPr>
-        </p:nvSpPr>
-        <p:spPr/>
-      </p:sp>
-      <p:sp>
-        <p:nvSpPr>
-          <p:cNvPr id="4" name="Text Placeholder 3"/>
-          <p:cNvSpPr>
-            <a:spLocks noGrp="1"/>
-          </p:cNvSpPr>
-          <p:nvPr>
-            <p:ph type="body" idx="10" sz="quarter"/>
-          </p:nvPr>
-        </p:nvSpPr>
-        <p:spPr/>
-        <p:txBody>
-          <a:bodyPr/>
-          <a:lstStyle/>
-          <a:p/>
-        </p:txBody>
-      </p:sp>
-      <p:sp>
-        <p:nvSpPr>
-          <p:cNvPr id="5" name="Text Placeholder 4"/>
-          <p:cNvSpPr>
-            <a:spLocks noGrp="1"/>
-          </p:cNvSpPr>
-          <p:nvPr>
-            <p:ph type="body" idx="13" sz="quarter"/>
-          </p:nvPr>
-        </p:nvSpPr>
-        <p:spPr/>
-        <p:txBody>
-          <a:bodyPr/>
-          <a:lstStyle/>
-          <a:p/>
-        </p:txBody>
-      </p:sp>
-      <p:sp>
-        <p:nvSpPr>
-          <p:cNvPr id="6" name="Title 5"/>
-          <p:cNvSpPr>
-            <a:spLocks noGrp="1"/>
-          </p:cNvSpPr>
-          <p:nvPr>
-            <p:ph type="title"/>
-          </p:nvPr>
-        </p:nvSpPr>
-        <p:spPr/>
-        <p:txBody>
-          <a:bodyPr/>
-          <a:lstStyle/>
-          <a:p/>
-        </p:txBody>
-      </p:sp>
-      <p:sp>
-        <p:nvSpPr>
-          <p:cNvPr id="7" name="TextBox 6"/>
+          <p:cNvPr id="2" name="TextBox 1"/>
           <p:cNvSpPr txBox="1"/>
           <p:nvPr/>
         </p:nvSpPr>
         <p:spPr>
           <a:xfrm>
-            <a:off x="512064" y="429768"/>
-            <a:ext cx="11430000" cy="502920"/>
+            <a:off x="411480" y="182880"/>
+            <a:ext cx="11338560" cy="475488"/>
           </a:xfrm>
           <a:prstGeom prst="rect">
             <a:avLst/>
@@ -6167,37 +6071,35 @@
           <a:lstStyle/>
           <a:p>
             <a:r>
-              <a:rPr b="1" sz="2400">
+              <a:rPr b="1" sz="2200">
                 <a:solidFill>
                   <a:srgbClr val="2461E5"/>
                 </a:solidFill>
               </a:rPr>
-              <a:t>What We Do: Conversion Pipeline</a:t>
-            </a:r>
-          </a:p>
-        </p:txBody>
-      </p:sp>
-      <p:sp>
-        <p:nvSpPr>
-          <p:cNvPr id="8" name="Rectangle 7"/>
+              <a:t>Why Parquet?</a:t>
+            </a:r>
+          </a:p>
+        </p:txBody>
+      </p:sp>
+      <p:sp>
+        <p:nvSpPr>
+          <p:cNvPr id="3" name="Rectangle 2"/>
           <p:cNvSpPr/>
           <p:nvPr/>
         </p:nvSpPr>
         <p:spPr>
           <a:xfrm>
-            <a:off x="411480" y="2286000"/>
-            <a:ext cx="2011680" cy="594360"/>
+            <a:off x="411480" y="694944"/>
+            <a:ext cx="11338560" cy="20116"/>
           </a:xfrm>
           <a:prstGeom prst="rect">
             <a:avLst/>
           </a:prstGeom>
           <a:solidFill>
-            <a:srgbClr val="EBF3FF"/>
+            <a:srgbClr val="2461E5"/>
           </a:solidFill>
-          <a:ln w="12700">
-            <a:solidFill>
-              <a:srgbClr val="2461E5"/>
-            </a:solidFill>
+          <a:ln>
+            <a:noFill/>
           </a:ln>
         </p:spPr>
         <p:style>
@@ -6215,77 +6117,66 @@
           </a:fontRef>
         </p:style>
         <p:txBody>
-          <a:bodyPr rtlCol="0" anchor="ctr" wrap="square" lIns="54864" rIns="54864" tIns="36576" bIns="36576"/>
+          <a:bodyPr rtlCol="0" anchor="ctr"/>
           <a:lstStyle/>
           <a:p>
             <a:pPr algn="ctr"/>
-            <a:r>
-              <a:rPr sz="1100" b="1">
-                <a:solidFill>
-                  <a:srgbClr val="2D2D2D"/>
-                </a:solidFill>
-              </a:rPr>
-              <a:t>Input Folders</a:t>
-            </a:r>
-          </a:p>
-        </p:txBody>
-      </p:sp>
-      <p:cxnSp>
-        <p:nvCxnSpPr>
-          <p:cNvPr id="9" name="Connector 8"/>
-          <p:cNvCxnSpPr/>
-          <p:nvPr/>
-        </p:nvCxnSpPr>
-        <p:spPr>
-          <a:xfrm>
-            <a:off x="2423160" y="2583180"/>
-            <a:ext cx="274320" cy="0"/>
-          </a:xfrm>
-          <a:prstGeom prst="line">
-            <a:avLst/>
-          </a:prstGeom>
-          <a:ln w="19050">
-            <a:solidFill>
-              <a:srgbClr val="2461E5"/>
-            </a:solidFill>
-          </a:ln>
-        </p:spPr>
-        <p:style>
-          <a:lnRef idx="2">
-            <a:schemeClr val="accent1"/>
-          </a:lnRef>
-          <a:fillRef idx="0">
-            <a:schemeClr val="accent1"/>
-          </a:fillRef>
-          <a:effectRef idx="1">
-            <a:schemeClr val="accent1"/>
-          </a:effectRef>
-          <a:fontRef idx="minor">
-            <a:schemeClr val="tx1"/>
-          </a:fontRef>
-        </p:style>
-      </p:cxnSp>
-      <p:sp>
-        <p:nvSpPr>
-          <p:cNvPr id="10" name="Rectangle 9"/>
+          </a:p>
+        </p:txBody>
+      </p:sp>
+      <p:sp>
+        <p:nvSpPr>
+          <p:cNvPr id="4" name="TextBox 3"/>
+          <p:cNvSpPr txBox="1"/>
+          <p:nvPr/>
+        </p:nvSpPr>
+        <p:spPr>
+          <a:xfrm>
+            <a:off x="411480" y="850392"/>
+            <a:ext cx="11338560" cy="347472"/>
+          </a:xfrm>
+          <a:prstGeom prst="rect">
+            <a:avLst/>
+          </a:prstGeom>
+          <a:noFill/>
+        </p:spPr>
+        <p:txBody>
+          <a:bodyPr wrap="square">
+            <a:spAutoFit/>
+          </a:bodyPr>
+          <a:lstStyle/>
+          <a:p>
+            <a:pPr algn="l"/>
+            <a:r>
+              <a:rPr sz="1100" b="0">
+                <a:solidFill>
+                  <a:srgbClr val="6E6E78"/>
+                </a:solidFill>
+              </a:rPr>
+              <a:t>Moving from hundreds of daily .stat files to a single, portable, queryable dataset per model.</a:t>
+            </a:r>
+          </a:p>
+        </p:txBody>
+      </p:sp>
+      <p:sp>
+        <p:nvSpPr>
+          <p:cNvPr id="5" name="Rounded Rectangle 4"/>
           <p:cNvSpPr/>
           <p:nvPr/>
         </p:nvSpPr>
         <p:spPr>
           <a:xfrm>
-            <a:off x="2697480" y="2286000"/>
-            <a:ext cx="2011680" cy="594360"/>
-          </a:xfrm>
-          <a:prstGeom prst="rect">
+            <a:off x="502920" y="1353312"/>
+            <a:ext cx="2560320" cy="960120"/>
+          </a:xfrm>
+          <a:prstGeom prst="roundRect">
             <a:avLst/>
           </a:prstGeom>
           <a:solidFill>
-            <a:srgbClr val="EBF3FF"/>
+            <a:srgbClr val="2461E5"/>
           </a:solidFill>
-          <a:ln w="12700">
-            <a:solidFill>
-              <a:srgbClr val="2461E5"/>
-            </a:solidFill>
+          <a:ln>
+            <a:noFill/>
           </a:ln>
         </p:spPr>
         <p:style>
@@ -6303,77 +6194,75 @@
           </a:fontRef>
         </p:style>
         <p:txBody>
-          <a:bodyPr rtlCol="0" anchor="ctr" wrap="square" lIns="54864" rIns="54864" tIns="36576" bIns="36576"/>
+          <a:bodyPr rtlCol="0" anchor="ctr" wrap="square" lIns="73152" rIns="73152" tIns="36576" bIns="36576"/>
           <a:lstStyle/>
           <a:p>
             <a:pPr algn="ctr"/>
             <a:r>
-              <a:rPr sz="1100" b="1">
-                <a:solidFill>
-                  <a:srgbClr val="2D2D2D"/>
-                </a:solidFill>
-              </a:rPr>
-              <a:t>Read &amp; Parse</a:t>
-            </a:r>
-          </a:p>
-        </p:txBody>
-      </p:sp>
-      <p:cxnSp>
-        <p:nvCxnSpPr>
-          <p:cNvPr id="11" name="Connector 10"/>
-          <p:cNvCxnSpPr/>
-          <p:nvPr/>
-        </p:nvCxnSpPr>
-        <p:spPr>
-          <a:xfrm>
-            <a:off x="4709160" y="2583180"/>
-            <a:ext cx="274320" cy="0"/>
-          </a:xfrm>
-          <a:prstGeom prst="line">
-            <a:avLst/>
-          </a:prstGeom>
-          <a:ln w="19050">
-            <a:solidFill>
-              <a:srgbClr val="2461E5"/>
-            </a:solidFill>
-          </a:ln>
-        </p:spPr>
-        <p:style>
-          <a:lnRef idx="2">
-            <a:schemeClr val="accent1"/>
-          </a:lnRef>
-          <a:fillRef idx="0">
-            <a:schemeClr val="accent1"/>
-          </a:fillRef>
-          <a:effectRef idx="1">
-            <a:schemeClr val="accent1"/>
-          </a:effectRef>
-          <a:fontRef idx="minor">
-            <a:schemeClr val="tx1"/>
-          </a:fontRef>
-        </p:style>
-      </p:cxnSp>
-      <p:sp>
-        <p:nvSpPr>
-          <p:cNvPr id="12" name="Rectangle 11"/>
+              <a:rPr sz="1200" b="1">
+                <a:solidFill>
+                  <a:srgbClr val="FFFFFF"/>
+                </a:solidFill>
+              </a:rPr>
+              <a:t>Columnar
+Storage</a:t>
+            </a:r>
+          </a:p>
+        </p:txBody>
+      </p:sp>
+      <p:sp>
+        <p:nvSpPr>
+          <p:cNvPr id="6" name="TextBox 5"/>
+          <p:cNvSpPr txBox="1"/>
+          <p:nvPr/>
+        </p:nvSpPr>
+        <p:spPr>
+          <a:xfrm>
+            <a:off x="502920" y="2423160"/>
+            <a:ext cx="2560320" cy="1417320"/>
+          </a:xfrm>
+          <a:prstGeom prst="rect">
+            <a:avLst/>
+          </a:prstGeom>
+          <a:noFill/>
+        </p:spPr>
+        <p:txBody>
+          <a:bodyPr wrap="square">
+            <a:spAutoFit/>
+          </a:bodyPr>
+          <a:lstStyle/>
+          <a:p>
+            <a:pPr algn="l"/>
+            <a:r>
+              <a:rPr sz="1000" b="0">
+                <a:solidFill>
+                  <a:srgbClr val="1C1C28"/>
+                </a:solidFill>
+              </a:rPr>
+              <a:t>Reads only the columns you request. Skip irrelevant fields entirely - no scanning of full rows.</a:t>
+            </a:r>
+          </a:p>
+        </p:txBody>
+      </p:sp>
+      <p:sp>
+        <p:nvSpPr>
+          <p:cNvPr id="7" name="Rounded Rectangle 6"/>
           <p:cNvSpPr/>
           <p:nvPr/>
         </p:nvSpPr>
         <p:spPr>
           <a:xfrm>
-            <a:off x="4983480" y="2286000"/>
-            <a:ext cx="2011680" cy="594360"/>
-          </a:xfrm>
-          <a:prstGeom prst="rect">
+            <a:off x="3264408" y="1353312"/>
+            <a:ext cx="2560320" cy="960120"/>
+          </a:xfrm>
+          <a:prstGeom prst="roundRect">
             <a:avLst/>
           </a:prstGeom>
           <a:solidFill>
-            <a:srgbClr val="EBF3FF"/>
+            <a:srgbClr val="00788C"/>
           </a:solidFill>
-          <a:ln w="12700">
-            <a:solidFill>
-              <a:srgbClr val="2461E5"/>
-            </a:solidFill>
+          <a:ln>
+            <a:noFill/>
           </a:ln>
         </p:spPr>
         <p:style>
@@ -6391,77 +6280,75 @@
           </a:fontRef>
         </p:style>
         <p:txBody>
-          <a:bodyPr rtlCol="0" anchor="ctr" wrap="square" lIns="54864" rIns="54864" tIns="36576" bIns="36576"/>
+          <a:bodyPr rtlCol="0" anchor="ctr" wrap="square" lIns="73152" rIns="73152" tIns="36576" bIns="36576"/>
           <a:lstStyle/>
           <a:p>
             <a:pPr algn="ctr"/>
             <a:r>
-              <a:rPr sz="1100" b="1">
-                <a:solidFill>
-                  <a:srgbClr val="2D2D2D"/>
-                </a:solidFill>
-              </a:rPr>
-              <a:t>Merge &amp; Clean</a:t>
-            </a:r>
-          </a:p>
-        </p:txBody>
-      </p:sp>
-      <p:cxnSp>
-        <p:nvCxnSpPr>
-          <p:cNvPr id="13" name="Connector 12"/>
-          <p:cNvCxnSpPr/>
-          <p:nvPr/>
-        </p:nvCxnSpPr>
-        <p:spPr>
-          <a:xfrm>
-            <a:off x="6995160" y="2583180"/>
-            <a:ext cx="274320" cy="0"/>
-          </a:xfrm>
-          <a:prstGeom prst="line">
-            <a:avLst/>
-          </a:prstGeom>
-          <a:ln w="19050">
-            <a:solidFill>
-              <a:srgbClr val="2461E5"/>
-            </a:solidFill>
-          </a:ln>
-        </p:spPr>
-        <p:style>
-          <a:lnRef idx="2">
-            <a:schemeClr val="accent1"/>
-          </a:lnRef>
-          <a:fillRef idx="0">
-            <a:schemeClr val="accent1"/>
-          </a:fillRef>
-          <a:effectRef idx="1">
-            <a:schemeClr val="accent1"/>
-          </a:effectRef>
-          <a:fontRef idx="minor">
-            <a:schemeClr val="tx1"/>
-          </a:fontRef>
-        </p:style>
-      </p:cxnSp>
-      <p:sp>
-        <p:nvSpPr>
-          <p:cNvPr id="14" name="Rectangle 13"/>
+              <a:rPr sz="1200" b="1">
+                <a:solidFill>
+                  <a:srgbClr val="FFFFFF"/>
+                </a:solidFill>
+              </a:rPr>
+              <a:t>Compressed
+by Default</a:t>
+            </a:r>
+          </a:p>
+        </p:txBody>
+      </p:sp>
+      <p:sp>
+        <p:nvSpPr>
+          <p:cNvPr id="8" name="TextBox 7"/>
+          <p:cNvSpPr txBox="1"/>
+          <p:nvPr/>
+        </p:nvSpPr>
+        <p:spPr>
+          <a:xfrm>
+            <a:off x="3264408" y="2423160"/>
+            <a:ext cx="2560320" cy="1417320"/>
+          </a:xfrm>
+          <a:prstGeom prst="rect">
+            <a:avLst/>
+          </a:prstGeom>
+          <a:noFill/>
+        </p:spPr>
+        <p:txBody>
+          <a:bodyPr wrap="square">
+            <a:spAutoFit/>
+          </a:bodyPr>
+          <a:lstStyle/>
+          <a:p>
+            <a:pPr algn="l"/>
+            <a:r>
+              <a:rPr sz="1000" b="0">
+                <a:solidFill>
+                  <a:srgbClr val="1C1C28"/>
+                </a:solidFill>
+              </a:rPr>
+              <a:t>5-10x smaller than CSV. Snappy compression is applied automatically. Fits on a USB drive.</a:t>
+            </a:r>
+          </a:p>
+        </p:txBody>
+      </p:sp>
+      <p:sp>
+        <p:nvSpPr>
+          <p:cNvPr id="9" name="Rounded Rectangle 8"/>
           <p:cNvSpPr/>
           <p:nvPr/>
         </p:nvSpPr>
         <p:spPr>
           <a:xfrm>
-            <a:off x="7269480" y="2286000"/>
-            <a:ext cx="2011680" cy="594360"/>
-          </a:xfrm>
-          <a:prstGeom prst="rect">
+            <a:off x="6025896" y="1353312"/>
+            <a:ext cx="2560320" cy="960120"/>
+          </a:xfrm>
+          <a:prstGeom prst="roundRect">
             <a:avLst/>
           </a:prstGeom>
           <a:solidFill>
-            <a:srgbClr val="EBF3FF"/>
+            <a:srgbClr val="107C10"/>
           </a:solidFill>
-          <a:ln w="12700">
-            <a:solidFill>
-              <a:srgbClr val="2461E5"/>
-            </a:solidFill>
+          <a:ln>
+            <a:noFill/>
           </a:ln>
         </p:spPr>
         <p:style>
@@ -6479,78 +6366,75 @@
           </a:fontRef>
         </p:style>
         <p:txBody>
-          <a:bodyPr rtlCol="0" anchor="ctr" wrap="square" lIns="54864" rIns="54864" tIns="36576" bIns="36576"/>
+          <a:bodyPr rtlCol="0" anchor="ctr" wrap="square" lIns="73152" rIns="73152" tIns="36576" bIns="36576"/>
           <a:lstStyle/>
           <a:p>
             <a:pPr algn="ctr"/>
             <a:r>
-              <a:rPr sz="1100" b="1">
-                <a:solidFill>
-                  <a:srgbClr val="2D2D2D"/>
-                </a:solidFill>
-              </a:rPr>
-              <a:t>Group by
-Model / Obs</a:t>
-            </a:r>
-          </a:p>
-        </p:txBody>
-      </p:sp>
-      <p:cxnSp>
-        <p:nvCxnSpPr>
-          <p:cNvPr id="15" name="Connector 14"/>
-          <p:cNvCxnSpPr/>
-          <p:nvPr/>
-        </p:nvCxnSpPr>
-        <p:spPr>
-          <a:xfrm>
-            <a:off x="9281160" y="2583180"/>
-            <a:ext cx="274320" cy="0"/>
-          </a:xfrm>
-          <a:prstGeom prst="line">
-            <a:avLst/>
-          </a:prstGeom>
-          <a:ln w="19050">
-            <a:solidFill>
-              <a:srgbClr val="2461E5"/>
-            </a:solidFill>
-          </a:ln>
-        </p:spPr>
-        <p:style>
-          <a:lnRef idx="2">
-            <a:schemeClr val="accent1"/>
-          </a:lnRef>
-          <a:fillRef idx="0">
-            <a:schemeClr val="accent1"/>
-          </a:fillRef>
-          <a:effectRef idx="1">
-            <a:schemeClr val="accent1"/>
-          </a:effectRef>
-          <a:fontRef idx="minor">
-            <a:schemeClr val="tx1"/>
-          </a:fontRef>
-        </p:style>
-      </p:cxnSp>
-      <p:sp>
-        <p:nvSpPr>
-          <p:cNvPr id="16" name="Rectangle 15"/>
+              <a:rPr sz="1200" b="1">
+                <a:solidFill>
+                  <a:srgbClr val="FFFFFF"/>
+                </a:solidFill>
+              </a:rPr>
+              <a:t>Self-
+Describing</a:t>
+            </a:r>
+          </a:p>
+        </p:txBody>
+      </p:sp>
+      <p:sp>
+        <p:nvSpPr>
+          <p:cNvPr id="10" name="TextBox 9"/>
+          <p:cNvSpPr txBox="1"/>
+          <p:nvPr/>
+        </p:nvSpPr>
+        <p:spPr>
+          <a:xfrm>
+            <a:off x="6025896" y="2423160"/>
+            <a:ext cx="2560320" cy="1417320"/>
+          </a:xfrm>
+          <a:prstGeom prst="rect">
+            <a:avLst/>
+          </a:prstGeom>
+          <a:noFill/>
+        </p:spPr>
+        <p:txBody>
+          <a:bodyPr wrap="square">
+            <a:spAutoFit/>
+          </a:bodyPr>
+          <a:lstStyle/>
+          <a:p>
+            <a:pPr algn="l"/>
+            <a:r>
+              <a:rPr sz="1000" b="0">
+                <a:solidFill>
+                  <a:srgbClr val="1C1C28"/>
+                </a:solidFill>
+              </a:rPr>
+              <a:t>Schema, data types, and metadata all embedded in one file. No separate DDL or config needed.</a:t>
+            </a:r>
+          </a:p>
+        </p:txBody>
+      </p:sp>
+      <p:sp>
+        <p:nvSpPr>
+          <p:cNvPr id="11" name="Rounded Rectangle 10"/>
           <p:cNvSpPr/>
           <p:nvPr/>
         </p:nvSpPr>
         <p:spPr>
           <a:xfrm>
-            <a:off x="9555480" y="2286000"/>
-            <a:ext cx="2011680" cy="594360"/>
-          </a:xfrm>
-          <a:prstGeom prst="rect">
+            <a:off x="8787384" y="1353312"/>
+            <a:ext cx="2560320" cy="960120"/>
+          </a:xfrm>
+          <a:prstGeom prst="roundRect">
             <a:avLst/>
           </a:prstGeom>
           <a:solidFill>
-            <a:srgbClr val="E8F5E9"/>
+            <a:srgbClr val="153ABF"/>
           </a:solidFill>
-          <a:ln w="12700">
-            <a:solidFill>
-              <a:srgbClr val="107C10"/>
-            </a:solidFill>
+          <a:ln>
+            <a:noFill/>
           </a:ln>
         </p:spPr>
         <p:style>
@@ -6568,31 +6452,32 @@
           </a:fontRef>
         </p:style>
         <p:txBody>
-          <a:bodyPr rtlCol="0" anchor="ctr" wrap="square" lIns="54864" rIns="54864" tIns="36576" bIns="36576"/>
+          <a:bodyPr rtlCol="0" anchor="ctr" wrap="square" lIns="73152" rIns="73152" tIns="36576" bIns="36576"/>
           <a:lstStyle/>
           <a:p>
             <a:pPr algn="ctr"/>
             <a:r>
-              <a:rPr sz="1100" b="1">
-                <a:solidFill>
-                  <a:srgbClr val="107C10"/>
-                </a:solidFill>
-              </a:rPr>
-              <a:t>Parquet Files</a:t>
-            </a:r>
-          </a:p>
-        </p:txBody>
-      </p:sp>
-      <p:sp>
-        <p:nvSpPr>
-          <p:cNvPr id="17" name="TextBox 16"/>
+              <a:rPr sz="1200" b="1">
+                <a:solidFill>
+                  <a:srgbClr val="FFFFFF"/>
+                </a:solidFill>
+              </a:rPr>
+              <a:t>Python
+Native</a:t>
+            </a:r>
+          </a:p>
+        </p:txBody>
+      </p:sp>
+      <p:sp>
+        <p:nvSpPr>
+          <p:cNvPr id="12" name="TextBox 11"/>
           <p:cNvSpPr txBox="1"/>
           <p:nvPr/>
         </p:nvSpPr>
         <p:spPr>
           <a:xfrm>
-            <a:off x="411480" y="2990088"/>
-            <a:ext cx="2011680" cy="1371600"/>
+            <a:off x="8787384" y="2423160"/>
+            <a:ext cx="2560320" cy="1417320"/>
           </a:xfrm>
           <a:prstGeom prst="rect">
             <a:avLst/>
@@ -6605,340 +6490,37 @@
           </a:bodyPr>
           <a:lstStyle/>
           <a:p>
-            <a:pPr algn="ctr"/>
-            <a:r>
-              <a:rPr sz="900" b="0">
-                <a:solidFill>
-                  <a:srgbClr val="2D2D2D"/>
-                </a:solidFill>
-              </a:rPr>
-              <a:t>Config folders:</a:t>
-            </a:r>
-          </a:p>
-          <a:p>
-            <a:pPr algn="ctr"/>
-            <a:r>
-              <a:rPr sz="900" b="0">
-                <a:solidFill>
-                  <a:srgbClr val="2D2D2D"/>
-                </a:solidFill>
-              </a:rPr>
-              <a:t>&lt;Model&gt;_&lt;Obs&gt;_&lt;Param&gt;_&lt;TS&gt;</a:t>
-            </a:r>
-          </a:p>
-          <a:p>
-            <a:pPr algn="ctr"/>
-            <a:r>
-              <a:rPr sz="900" b="0">
-                <a:solidFill>
-                  <a:srgbClr val="2D2D2D"/>
-                </a:solidFill>
-              </a:rPr>
-              <a:t>GridStat/ or EnsembleStat/</a:t>
-            </a:r>
-          </a:p>
-          <a:p>
-            <a:pPr algn="ctr"/>
-            <a:r>
-              <a:rPr sz="900" b="0">
-                <a:solidFill>
-                  <a:srgbClr val="2D2D2D"/>
-                </a:solidFill>
-              </a:rPr>
-              <a:t>YYYYMMDDHH subdirectories</a:t>
-            </a:r>
-          </a:p>
-        </p:txBody>
-      </p:sp>
-      <p:sp>
-        <p:nvSpPr>
-          <p:cNvPr id="18" name="TextBox 17"/>
-          <p:cNvSpPr txBox="1"/>
-          <p:nvPr/>
-        </p:nvSpPr>
-        <p:spPr>
-          <a:xfrm>
-            <a:off x="2697480" y="2990088"/>
-            <a:ext cx="2011680" cy="1371600"/>
-          </a:xfrm>
-          <a:prstGeom prst="rect">
-            <a:avLst/>
-          </a:prstGeom>
-          <a:noFill/>
-        </p:spPr>
-        <p:txBody>
-          <a:bodyPr wrap="square">
-            <a:spAutoFit/>
-          </a:bodyPr>
-          <a:lstStyle/>
-          <a:p>
-            <a:pPr algn="ctr"/>
-            <a:r>
-              <a:rPr sz="900" b="0">
-                <a:solidFill>
-                  <a:srgbClr val="2D2D2D"/>
-                </a:solidFill>
-              </a:rPr>
-              <a:t>CNT, SL1L2, SAL1L2</a:t>
-            </a:r>
-          </a:p>
-          <a:p>
-            <a:pPr algn="ctr"/>
-            <a:r>
-              <a:rPr sz="900" b="0">
-                <a:solidFill>
-                  <a:srgbClr val="2D2D2D"/>
-                </a:solidFill>
-              </a:rPr>
-              <a:t>(GridStat)</a:t>
-            </a:r>
-          </a:p>
-          <a:p>
-            <a:pPr algn="ctr"/>
-            <a:r>
-              <a:rPr sz="900" b="0">
-                <a:solidFill>
-                  <a:srgbClr val="2D2D2D"/>
-                </a:solidFill>
-              </a:rPr>
-              <a:t>ECNT</a:t>
-            </a:r>
-          </a:p>
-          <a:p>
-            <a:pPr algn="ctr"/>
-            <a:r>
-              <a:rPr sz="900" b="0">
-                <a:solidFill>
-                  <a:srgbClr val="2D2D2D"/>
-                </a:solidFill>
-              </a:rPr>
-              <a:t>(EnsembleStat)</a:t>
-            </a:r>
-          </a:p>
-        </p:txBody>
-      </p:sp>
-      <p:sp>
-        <p:nvSpPr>
-          <p:cNvPr id="19" name="TextBox 18"/>
-          <p:cNvSpPr txBox="1"/>
-          <p:nvPr/>
-        </p:nvSpPr>
-        <p:spPr>
-          <a:xfrm>
-            <a:off x="4983480" y="2990088"/>
-            <a:ext cx="2011680" cy="1371600"/>
-          </a:xfrm>
-          <a:prstGeom prst="rect">
-            <a:avLst/>
-          </a:prstGeom>
-          <a:noFill/>
-        </p:spPr>
-        <p:txBody>
-          <a:bodyPr wrap="square">
-            <a:spAutoFit/>
-          </a:bodyPr>
-          <a:lstStyle/>
-          <a:p>
-            <a:pPr algn="ctr"/>
-            <a:r>
-              <a:rPr sz="900" b="0">
-                <a:solidFill>
-                  <a:srgbClr val="2D2D2D"/>
-                </a:solidFill>
-              </a:rPr>
-              <a:t>Drop metadata cols</a:t>
-            </a:r>
-          </a:p>
-          <a:p>
-            <a:pPr algn="ctr"/>
-            <a:r>
-              <a:rPr sz="900" b="0">
-                <a:solidFill>
-                  <a:srgbClr val="2D2D2D"/>
-                </a:solidFill>
-              </a:rPr>
-              <a:t>Convert lead → hours</a:t>
-            </a:r>
-          </a:p>
-          <a:p>
-            <a:pPr algn="ctr"/>
-            <a:r>
-              <a:rPr sz="900" b="0">
-                <a:solidFill>
-                  <a:srgbClr val="2D2D2D"/>
-                </a:solidFill>
-              </a:rPr>
-              <a:t>Add PARAMETER column</a:t>
-            </a:r>
-          </a:p>
-          <a:p>
-            <a:pPr algn="ctr"/>
-            <a:r>
-              <a:rPr sz="900" b="0">
-                <a:solidFill>
-                  <a:srgbClr val="2D2D2D"/>
-                </a:solidFill>
-              </a:rPr>
-              <a:t>Numeric type casting</a:t>
-            </a:r>
-          </a:p>
-        </p:txBody>
-      </p:sp>
-      <p:sp>
-        <p:nvSpPr>
-          <p:cNvPr id="20" name="TextBox 19"/>
-          <p:cNvSpPr txBox="1"/>
-          <p:nvPr/>
-        </p:nvSpPr>
-        <p:spPr>
-          <a:xfrm>
-            <a:off x="7269480" y="2990088"/>
-            <a:ext cx="2011680" cy="1371600"/>
-          </a:xfrm>
-          <a:prstGeom prst="rect">
-            <a:avLst/>
-          </a:prstGeom>
-          <a:noFill/>
-        </p:spPr>
-        <p:txBody>
-          <a:bodyPr wrap="square">
-            <a:spAutoFit/>
-          </a:bodyPr>
-          <a:lstStyle/>
-          <a:p>
-            <a:pPr algn="ctr"/>
-            <a:r>
-              <a:rPr sz="900" b="0">
-                <a:solidFill>
-                  <a:srgbClr val="2D2D2D"/>
-                </a:solidFill>
-              </a:rPr>
-              <a:t>One output per</a:t>
-            </a:r>
-          </a:p>
-          <a:p>
-            <a:pPr algn="ctr"/>
-            <a:r>
-              <a:rPr sz="900" b="0">
-                <a:solidFill>
-                  <a:srgbClr val="2D2D2D"/>
-                </a:solidFill>
-              </a:rPr>
-              <a:t>model + obs pair:</a:t>
-            </a:r>
-          </a:p>
-          <a:p>
-            <a:pPr algn="ctr"/>
-            <a:r>
-              <a:rPr sz="900" b="0">
-                <a:solidFill>
-                  <a:srgbClr val="2D2D2D"/>
-                </a:solidFill>
-              </a:rPr>
-              <a:t>AGlobal4_Analysis</a:t>
-            </a:r>
-          </a:p>
-          <a:p>
-            <a:pPr algn="ctr"/>
-            <a:r>
-              <a:rPr sz="900" b="0">
-                <a:solidFill>
-                  <a:srgbClr val="2D2D2D"/>
-                </a:solidFill>
-              </a:rPr>
-              <a:t>AGlobal4E_Analysis</a:t>
-            </a:r>
-          </a:p>
-        </p:txBody>
-      </p:sp>
-      <p:sp>
-        <p:nvSpPr>
-          <p:cNvPr id="21" name="TextBox 20"/>
-          <p:cNvSpPr txBox="1"/>
-          <p:nvPr/>
-        </p:nvSpPr>
-        <p:spPr>
-          <a:xfrm>
-            <a:off x="9555480" y="2990088"/>
-            <a:ext cx="2011680" cy="1371600"/>
-          </a:xfrm>
-          <a:prstGeom prst="rect">
-            <a:avLst/>
-          </a:prstGeom>
-          <a:noFill/>
-        </p:spPr>
-        <p:txBody>
-          <a:bodyPr wrap="square">
-            <a:spAutoFit/>
-          </a:bodyPr>
-          <a:lstStyle/>
-          <a:p>
-            <a:pPr algn="ctr"/>
-            <a:r>
-              <a:rPr sz="900" b="0">
-                <a:solidFill>
-                  <a:srgbClr val="2D2D2D"/>
-                </a:solidFill>
-              </a:rPr>
-              <a:t>One .parquet per</a:t>
-            </a:r>
-          </a:p>
-          <a:p>
-            <a:pPr algn="ctr"/>
-            <a:r>
-              <a:rPr sz="900" b="0">
-                <a:solidFill>
-                  <a:srgbClr val="2D2D2D"/>
-                </a:solidFill>
-              </a:rPr>
-              <a:t>model/obs pair</a:t>
-            </a:r>
-          </a:p>
-          <a:p>
-            <a:pPr algn="ctr"/>
-            <a:r>
-              <a:rPr sz="900" b="0">
-                <a:solidFill>
-                  <a:srgbClr val="2D2D2D"/>
-                </a:solidFill>
-              </a:rPr>
-              <a:t>All parameters</a:t>
-            </a:r>
-          </a:p>
-          <a:p>
-            <a:pPr algn="ctr"/>
-            <a:r>
-              <a:rPr sz="900" b="0">
-                <a:solidFill>
-                  <a:srgbClr val="2D2D2D"/>
-                </a:solidFill>
-              </a:rPr>
-              <a:t>All timesteps</a:t>
-            </a:r>
-          </a:p>
-        </p:txBody>
-      </p:sp>
-      <p:sp>
-        <p:nvSpPr>
-          <p:cNvPr id="22" name="Rectangle 21"/>
+            <a:pPr algn="l"/>
+            <a:r>
+              <a:rPr sz="1000" b="0">
+                <a:solidFill>
+                  <a:srgbClr val="1C1C28"/>
+                </a:solidFill>
+              </a:rPr>
+              <a:t>One line to load with pandas. Filter columns before reading with pyarrow - no SQL needed.</a:t>
+            </a:r>
+          </a:p>
+        </p:txBody>
+      </p:sp>
+      <p:sp>
+        <p:nvSpPr>
+          <p:cNvPr id="13" name="Rectangle 12"/>
           <p:cNvSpPr/>
           <p:nvPr/>
         </p:nvSpPr>
         <p:spPr>
           <a:xfrm>
-            <a:off x="1828800" y="4617720"/>
-            <a:ext cx="8412480" cy="457200"/>
+            <a:off x="411480" y="3840480"/>
+            <a:ext cx="11338560" cy="658368"/>
           </a:xfrm>
           <a:prstGeom prst="rect">
             <a:avLst/>
           </a:prstGeom>
           <a:solidFill>
-            <a:srgbClr val="F2F2F2"/>
+            <a:srgbClr val="F5F5F7"/>
           </a:solidFill>
-          <a:ln w="6350">
-            <a:solidFill>
-              <a:srgbClr val="CCCCCC"/>
-            </a:solidFill>
+          <a:ln>
+            <a:noFill/>
           </a:ln>
         </p:spPr>
         <p:style>
@@ -6956,17 +6538,51 @@
           </a:fontRef>
         </p:style>
         <p:txBody>
-          <a:bodyPr rtlCol="0" anchor="ctr" wrap="square" lIns="54864" rIns="54864" tIns="36576" bIns="36576"/>
+          <a:bodyPr rtlCol="0" anchor="ctr" wrap="square" lIns="73152" rIns="73152" tIns="36576" bIns="36576"/>
           <a:lstStyle/>
           <a:p>
-            <a:pPr algn="ctr"/>
-            <a:r>
-              <a:rPr sz="950" b="0">
-                <a:solidFill>
-                  <a:srgbClr val="606060"/>
-                </a:solidFill>
-              </a:rPr>
-              <a:t>Re-running is safe — already-loaded init dates are skipped per PARAMETER and STAT_TYPE</a:t>
+            <a:pPr algn="l"/>
+            <a:r>
+              <a:rPr sz="1000" b="0">
+                <a:solidFill>
+                  <a:srgbClr val="6E6E78"/>
+                </a:solidFill>
+              </a:rPr>
+              <a:t>vs a SQL database:  no server to install, no connection strings, no schema migrations, no DBA required.  Share your verification data as a single .parquet file - it opens in one line of Python on any machine.</a:t>
+            </a:r>
+          </a:p>
+        </p:txBody>
+      </p:sp>
+      <p:sp>
+        <p:nvSpPr>
+          <p:cNvPr id="14" name="TextBox 13"/>
+          <p:cNvSpPr txBox="1"/>
+          <p:nvPr/>
+        </p:nvSpPr>
+        <p:spPr>
+          <a:xfrm>
+            <a:off x="502920" y="4626864"/>
+            <a:ext cx="10972800" cy="320040"/>
+          </a:xfrm>
+          <a:prstGeom prst="rect">
+            <a:avLst/>
+          </a:prstGeom>
+          <a:noFill/>
+        </p:spPr>
+        <p:txBody>
+          <a:bodyPr wrap="square">
+            <a:spAutoFit/>
+          </a:bodyPr>
+          <a:lstStyle/>
+          <a:p>
+            <a:pPr algn="l"/>
+            <a:r>
+              <a:rPr sz="1000" b="0">
+                <a:solidFill>
+                  <a:srgbClr val="2461E5"/>
+                </a:solidFill>
+              </a:rPr>
+              <a:t>  df = pq.read_table("AGlobal4_Analysis.parquet", filters=[("PARAMETER","=","MSLP")]).to_pandas()</a:t>
             </a:r>
           </a:p>
         </p:txBody>
@@ -6991,89 +6607,14 @@
       <p:grpSpPr/>
       <p:sp>
         <p:nvSpPr>
-          <p:cNvPr id="2" name="Picture Placeholder 1"/>
-          <p:cNvSpPr>
-            <a:spLocks noGrp="1"/>
-          </p:cNvSpPr>
-          <p:nvPr>
-            <p:ph type="pic" idx="11" sz="quarter"/>
-          </p:nvPr>
-        </p:nvSpPr>
-        <p:spPr/>
-      </p:sp>
-      <p:sp>
-        <p:nvSpPr>
-          <p:cNvPr id="3" name="Picture Placeholder 2"/>
-          <p:cNvSpPr>
-            <a:spLocks noGrp="1"/>
-          </p:cNvSpPr>
-          <p:nvPr>
-            <p:ph type="pic" idx="12" sz="quarter"/>
-          </p:nvPr>
-        </p:nvSpPr>
-        <p:spPr/>
-      </p:sp>
-      <p:sp>
-        <p:nvSpPr>
-          <p:cNvPr id="4" name="Text Placeholder 3"/>
-          <p:cNvSpPr>
-            <a:spLocks noGrp="1"/>
-          </p:cNvSpPr>
-          <p:nvPr>
-            <p:ph type="body" idx="10" sz="quarter"/>
-          </p:nvPr>
-        </p:nvSpPr>
-        <p:spPr/>
-        <p:txBody>
-          <a:bodyPr/>
-          <a:lstStyle/>
-          <a:p/>
-        </p:txBody>
-      </p:sp>
-      <p:sp>
-        <p:nvSpPr>
-          <p:cNvPr id="5" name="Text Placeholder 4"/>
-          <p:cNvSpPr>
-            <a:spLocks noGrp="1"/>
-          </p:cNvSpPr>
-          <p:nvPr>
-            <p:ph type="body" idx="13" sz="quarter"/>
-          </p:nvPr>
-        </p:nvSpPr>
-        <p:spPr/>
-        <p:txBody>
-          <a:bodyPr/>
-          <a:lstStyle/>
-          <a:p/>
-        </p:txBody>
-      </p:sp>
-      <p:sp>
-        <p:nvSpPr>
-          <p:cNvPr id="6" name="Title 5"/>
-          <p:cNvSpPr>
-            <a:spLocks noGrp="1"/>
-          </p:cNvSpPr>
-          <p:nvPr>
-            <p:ph type="title"/>
-          </p:nvPr>
-        </p:nvSpPr>
-        <p:spPr/>
-        <p:txBody>
-          <a:bodyPr/>
-          <a:lstStyle/>
-          <a:p/>
-        </p:txBody>
-      </p:sp>
-      <p:sp>
-        <p:nvSpPr>
-          <p:cNvPr id="7" name="TextBox 6"/>
+          <p:cNvPr id="2" name="TextBox 1"/>
           <p:cNvSpPr txBox="1"/>
           <p:nvPr/>
         </p:nvSpPr>
         <p:spPr>
           <a:xfrm>
-            <a:off x="512064" y="429768"/>
-            <a:ext cx="11430000" cy="502920"/>
+            <a:off x="411480" y="182880"/>
+            <a:ext cx="11338560" cy="475488"/>
           </a:xfrm>
           <a:prstGeom prst="rect">
             <a:avLst/>
@@ -7087,60 +6628,26 @@
           <a:lstStyle/>
           <a:p>
             <a:r>
-              <a:rPr b="1" sz="2400">
+              <a:rPr b="1" sz="2200">
                 <a:solidFill>
                   <a:srgbClr val="2461E5"/>
                 </a:solidFill>
               </a:rPr>
-              <a:t>What the Outputs Look Like: Parquet Schema</a:t>
-            </a:r>
-          </a:p>
-        </p:txBody>
-      </p:sp>
-      <p:sp>
-        <p:nvSpPr>
-          <p:cNvPr id="8" name="TextBox 7"/>
-          <p:cNvSpPr txBox="1"/>
-          <p:nvPr/>
-        </p:nvSpPr>
-        <p:spPr>
-          <a:xfrm>
-            <a:off x="457200" y="1005840"/>
-            <a:ext cx="11430000" cy="365760"/>
-          </a:xfrm>
-          <a:prstGeom prst="rect">
-            <a:avLst/>
-          </a:prstGeom>
-          <a:noFill/>
-        </p:spPr>
-        <p:txBody>
-          <a:bodyPr wrap="square">
-            <a:spAutoFit/>
-          </a:bodyPr>
-          <a:lstStyle/>
-          <a:p>
-            <a:pPr algn="l"/>
-            <a:r>
-              <a:rPr sz="1050" b="0">
-                <a:solidFill>
-                  <a:srgbClr val="2D2D2D"/>
-                </a:solidFill>
-              </a:rPr>
-              <a:t>Each row = one unique combination of init date, lead time, pressure level, domain, parameter, and stat type.</a:t>
-            </a:r>
-          </a:p>
-        </p:txBody>
-      </p:sp>
-      <p:sp>
-        <p:nvSpPr>
-          <p:cNvPr id="9" name="Rectangle 8"/>
+              <a:t>What We Do: Conversion Pipeline</a:t>
+            </a:r>
+          </a:p>
+        </p:txBody>
+      </p:sp>
+      <p:sp>
+        <p:nvSpPr>
+          <p:cNvPr id="3" name="Rectangle 2"/>
           <p:cNvSpPr/>
           <p:nvPr/>
         </p:nvSpPr>
         <p:spPr>
           <a:xfrm>
-            <a:off x="411480" y="1463040"/>
-            <a:ext cx="1508760" cy="292608"/>
+            <a:off x="411480" y="694944"/>
+            <a:ext cx="11338560" cy="20116"/>
           </a:xfrm>
           <a:prstGeom prst="rect">
             <a:avLst/>
@@ -7149,9 +6656,7 @@
             <a:srgbClr val="2461E5"/>
           </a:solidFill>
           <a:ln>
-            <a:solidFill>
-              <a:srgbClr val="2461E5"/>
-            </a:solidFill>
+            <a:noFill/>
           </a:ln>
         </p:spPr>
         <p:style>
@@ -7169,42 +6674,32 @@
           </a:fontRef>
         </p:style>
         <p:txBody>
-          <a:bodyPr rtlCol="0" anchor="ctr" wrap="square" lIns="54864" rIns="54864" tIns="36576" bIns="36576"/>
+          <a:bodyPr rtlCol="0" anchor="ctr"/>
           <a:lstStyle/>
           <a:p>
             <a:pPr algn="ctr"/>
-            <a:r>
-              <a:rPr sz="850" b="1">
-                <a:solidFill>
-                  <a:srgbClr val="FFFFFF"/>
-                </a:solidFill>
-              </a:rPr>
-              <a:t>PARAMETER</a:t>
-            </a:r>
-          </a:p>
-        </p:txBody>
-      </p:sp>
-      <p:sp>
-        <p:nvSpPr>
-          <p:cNvPr id="10" name="Rectangle 9"/>
+          </a:p>
+        </p:txBody>
+      </p:sp>
+      <p:sp>
+        <p:nvSpPr>
+          <p:cNvPr id="4" name="Rounded Rectangle 3"/>
           <p:cNvSpPr/>
           <p:nvPr/>
         </p:nvSpPr>
         <p:spPr>
           <a:xfrm>
-            <a:off x="1965960" y="1463040"/>
-            <a:ext cx="1417320" cy="292608"/>
-          </a:xfrm>
-          <a:prstGeom prst="rect">
+            <a:off x="502920" y="2011680"/>
+            <a:ext cx="1993392" cy="658368"/>
+          </a:xfrm>
+          <a:prstGeom prst="roundRect">
             <a:avLst/>
           </a:prstGeom>
           <a:solidFill>
             <a:srgbClr val="2461E5"/>
           </a:solidFill>
           <a:ln>
-            <a:solidFill>
-              <a:srgbClr val="2461E5"/>
-            </a:solidFill>
+            <a:noFill/>
           </a:ln>
         </p:spPr>
         <p:style>
@@ -7222,42 +6717,77 @@
           </a:fontRef>
         </p:style>
         <p:txBody>
-          <a:bodyPr rtlCol="0" anchor="ctr" wrap="square" lIns="54864" rIns="54864" tIns="36576" bIns="36576"/>
+          <a:bodyPr rtlCol="0" anchor="ctr" wrap="square" lIns="73152" rIns="73152" tIns="36576" bIns="36576"/>
           <a:lstStyle/>
           <a:p>
             <a:pPr algn="ctr"/>
             <a:r>
-              <a:rPr sz="850" b="1">
+              <a:rPr sz="1100" b="1">
                 <a:solidFill>
                   <a:srgbClr val="FFFFFF"/>
                 </a:solidFill>
               </a:rPr>
-              <a:t>STAT_TYPE</a:t>
-            </a:r>
-          </a:p>
-        </p:txBody>
-      </p:sp>
-      <p:sp>
-        <p:nvSpPr>
-          <p:cNvPr id="11" name="Rectangle 10"/>
+              <a:t>Input
+Folders</a:t>
+            </a:r>
+          </a:p>
+        </p:txBody>
+      </p:sp>
+      <p:cxnSp>
+        <p:nvCxnSpPr>
+          <p:cNvPr id="5" name="Connector 4"/>
+          <p:cNvCxnSpPr/>
+          <p:nvPr/>
+        </p:nvCxnSpPr>
+        <p:spPr>
+          <a:xfrm>
+            <a:off x="2496312" y="2340864"/>
+            <a:ext cx="182880" cy="0"/>
+          </a:xfrm>
+          <a:prstGeom prst="line">
+            <a:avLst/>
+          </a:prstGeom>
+          <a:ln w="19050">
+            <a:solidFill>
+              <a:srgbClr val="B8B8C4"/>
+            </a:solidFill>
+            <a:tailEnd type="arrow" w="med" len="med"/>
+          </a:ln>
+        </p:spPr>
+        <p:style>
+          <a:lnRef idx="2">
+            <a:schemeClr val="accent1"/>
+          </a:lnRef>
+          <a:fillRef idx="0">
+            <a:schemeClr val="accent1"/>
+          </a:fillRef>
+          <a:effectRef idx="1">
+            <a:schemeClr val="accent1"/>
+          </a:effectRef>
+          <a:fontRef idx="minor">
+            <a:schemeClr val="tx1"/>
+          </a:fontRef>
+        </p:style>
+      </p:cxnSp>
+      <p:sp>
+        <p:nvSpPr>
+          <p:cNvPr id="6" name="Rounded Rectangle 5"/>
           <p:cNvSpPr/>
           <p:nvPr/>
         </p:nvSpPr>
         <p:spPr>
           <a:xfrm>
-            <a:off x="3429000" y="1463040"/>
-            <a:ext cx="1417320" cy="292608"/>
-          </a:xfrm>
-          <a:prstGeom prst="rect">
+            <a:off x="2679192" y="2011680"/>
+            <a:ext cx="1993392" cy="658368"/>
+          </a:xfrm>
+          <a:prstGeom prst="roundRect">
             <a:avLst/>
           </a:prstGeom>
           <a:solidFill>
             <a:srgbClr val="2461E5"/>
           </a:solidFill>
           <a:ln>
-            <a:solidFill>
-              <a:srgbClr val="2461E5"/>
-            </a:solidFill>
+            <a:noFill/>
           </a:ln>
         </p:spPr>
         <p:style>
@@ -7275,42 +6805,77 @@
           </a:fontRef>
         </p:style>
         <p:txBody>
-          <a:bodyPr rtlCol="0" anchor="ctr" wrap="square" lIns="54864" rIns="54864" tIns="36576" bIns="36576"/>
+          <a:bodyPr rtlCol="0" anchor="ctr" wrap="square" lIns="73152" rIns="73152" tIns="36576" bIns="36576"/>
           <a:lstStyle/>
           <a:p>
             <a:pPr algn="ctr"/>
             <a:r>
-              <a:rPr sz="850" b="1">
+              <a:rPr sz="1100" b="1">
                 <a:solidFill>
                   <a:srgbClr val="FFFFFF"/>
                 </a:solidFill>
               </a:rPr>
-              <a:t>INIT_DATE</a:t>
-            </a:r>
-          </a:p>
-        </p:txBody>
-      </p:sp>
-      <p:sp>
-        <p:nvSpPr>
-          <p:cNvPr id="12" name="Rectangle 11"/>
+              <a:t>Read &amp;
+Parse</a:t>
+            </a:r>
+          </a:p>
+        </p:txBody>
+      </p:sp>
+      <p:cxnSp>
+        <p:nvCxnSpPr>
+          <p:cNvPr id="7" name="Connector 6"/>
+          <p:cNvCxnSpPr/>
+          <p:nvPr/>
+        </p:nvCxnSpPr>
+        <p:spPr>
+          <a:xfrm>
+            <a:off x="4672584" y="2340864"/>
+            <a:ext cx="182880" cy="0"/>
+          </a:xfrm>
+          <a:prstGeom prst="line">
+            <a:avLst/>
+          </a:prstGeom>
+          <a:ln w="19050">
+            <a:solidFill>
+              <a:srgbClr val="B8B8C4"/>
+            </a:solidFill>
+            <a:tailEnd type="arrow" w="med" len="med"/>
+          </a:ln>
+        </p:spPr>
+        <p:style>
+          <a:lnRef idx="2">
+            <a:schemeClr val="accent1"/>
+          </a:lnRef>
+          <a:fillRef idx="0">
+            <a:schemeClr val="accent1"/>
+          </a:fillRef>
+          <a:effectRef idx="1">
+            <a:schemeClr val="accent1"/>
+          </a:effectRef>
+          <a:fontRef idx="minor">
+            <a:schemeClr val="tx1"/>
+          </a:fontRef>
+        </p:style>
+      </p:cxnSp>
+      <p:sp>
+        <p:nvSpPr>
+          <p:cNvPr id="8" name="Rounded Rectangle 7"/>
           <p:cNvSpPr/>
           <p:nvPr/>
         </p:nvSpPr>
         <p:spPr>
           <a:xfrm>
-            <a:off x="4892040" y="1463040"/>
-            <a:ext cx="1280160" cy="292608"/>
-          </a:xfrm>
-          <a:prstGeom prst="rect">
+            <a:off x="4855464" y="2011680"/>
+            <a:ext cx="1993392" cy="658368"/>
+          </a:xfrm>
+          <a:prstGeom prst="roundRect">
             <a:avLst/>
           </a:prstGeom>
           <a:solidFill>
             <a:srgbClr val="2461E5"/>
           </a:solidFill>
           <a:ln>
-            <a:solidFill>
-              <a:srgbClr val="2461E5"/>
-            </a:solidFill>
+            <a:noFill/>
           </a:ln>
         </p:spPr>
         <p:style>
@@ -7328,42 +6893,77 @@
           </a:fontRef>
         </p:style>
         <p:txBody>
-          <a:bodyPr rtlCol="0" anchor="ctr" wrap="square" lIns="54864" rIns="54864" tIns="36576" bIns="36576"/>
+          <a:bodyPr rtlCol="0" anchor="ctr" wrap="square" lIns="73152" rIns="73152" tIns="36576" bIns="36576"/>
           <a:lstStyle/>
           <a:p>
             <a:pPr algn="ctr"/>
             <a:r>
-              <a:rPr sz="850" b="1">
+              <a:rPr sz="1100" b="1">
                 <a:solidFill>
                   <a:srgbClr val="FFFFFF"/>
                 </a:solidFill>
               </a:rPr>
-              <a:t>FCST_LEAD_H</a:t>
-            </a:r>
-          </a:p>
-        </p:txBody>
-      </p:sp>
-      <p:sp>
-        <p:nvSpPr>
-          <p:cNvPr id="13" name="Rectangle 12"/>
+              <a:t>Merge &amp;
+Clean</a:t>
+            </a:r>
+          </a:p>
+        </p:txBody>
+      </p:sp>
+      <p:cxnSp>
+        <p:nvCxnSpPr>
+          <p:cNvPr id="9" name="Connector 8"/>
+          <p:cNvCxnSpPr/>
+          <p:nvPr/>
+        </p:nvCxnSpPr>
+        <p:spPr>
+          <a:xfrm>
+            <a:off x="6848856" y="2340864"/>
+            <a:ext cx="182880" cy="0"/>
+          </a:xfrm>
+          <a:prstGeom prst="line">
+            <a:avLst/>
+          </a:prstGeom>
+          <a:ln w="19050">
+            <a:solidFill>
+              <a:srgbClr val="B8B8C4"/>
+            </a:solidFill>
+            <a:tailEnd type="arrow" w="med" len="med"/>
+          </a:ln>
+        </p:spPr>
+        <p:style>
+          <a:lnRef idx="2">
+            <a:schemeClr val="accent1"/>
+          </a:lnRef>
+          <a:fillRef idx="0">
+            <a:schemeClr val="accent1"/>
+          </a:fillRef>
+          <a:effectRef idx="1">
+            <a:schemeClr val="accent1"/>
+          </a:effectRef>
+          <a:fontRef idx="minor">
+            <a:schemeClr val="tx1"/>
+          </a:fontRef>
+        </p:style>
+      </p:cxnSp>
+      <p:sp>
+        <p:nvSpPr>
+          <p:cNvPr id="10" name="Rounded Rectangle 9"/>
           <p:cNvSpPr/>
           <p:nvPr/>
         </p:nvSpPr>
         <p:spPr>
           <a:xfrm>
-            <a:off x="6217920" y="1463040"/>
-            <a:ext cx="1234440" cy="292608"/>
-          </a:xfrm>
-          <a:prstGeom prst="rect">
+            <a:off x="7031736" y="2011680"/>
+            <a:ext cx="1993392" cy="658368"/>
+          </a:xfrm>
+          <a:prstGeom prst="roundRect">
             <a:avLst/>
           </a:prstGeom>
           <a:solidFill>
             <a:srgbClr val="2461E5"/>
           </a:solidFill>
           <a:ln>
-            <a:solidFill>
-              <a:srgbClr val="2461E5"/>
-            </a:solidFill>
+            <a:noFill/>
           </a:ln>
         </p:spPr>
         <p:style>
@@ -7381,42 +6981,77 @@
           </a:fontRef>
         </p:style>
         <p:txBody>
-          <a:bodyPr rtlCol="0" anchor="ctr" wrap="square" lIns="54864" rIns="54864" tIns="36576" bIns="36576"/>
+          <a:bodyPr rtlCol="0" anchor="ctr" wrap="square" lIns="73152" rIns="73152" tIns="36576" bIns="36576"/>
           <a:lstStyle/>
           <a:p>
             <a:pPr algn="ctr"/>
             <a:r>
-              <a:rPr sz="850" b="1">
+              <a:rPr sz="1100" b="1">
                 <a:solidFill>
                   <a:srgbClr val="FFFFFF"/>
                 </a:solidFill>
               </a:rPr>
-              <a:t>FCST_LEV</a:t>
-            </a:r>
-          </a:p>
-        </p:txBody>
-      </p:sp>
-      <p:sp>
-        <p:nvSpPr>
-          <p:cNvPr id="14" name="Rectangle 13"/>
+              <a:t>Group by
+Model/Obs</a:t>
+            </a:r>
+          </a:p>
+        </p:txBody>
+      </p:sp>
+      <p:cxnSp>
+        <p:nvCxnSpPr>
+          <p:cNvPr id="11" name="Connector 10"/>
+          <p:cNvCxnSpPr/>
+          <p:nvPr/>
+        </p:nvCxnSpPr>
+        <p:spPr>
+          <a:xfrm>
+            <a:off x="9025128" y="2340864"/>
+            <a:ext cx="182880" cy="0"/>
+          </a:xfrm>
+          <a:prstGeom prst="line">
+            <a:avLst/>
+          </a:prstGeom>
+          <a:ln w="19050">
+            <a:solidFill>
+              <a:srgbClr val="B8B8C4"/>
+            </a:solidFill>
+            <a:tailEnd type="arrow" w="med" len="med"/>
+          </a:ln>
+        </p:spPr>
+        <p:style>
+          <a:lnRef idx="2">
+            <a:schemeClr val="accent1"/>
+          </a:lnRef>
+          <a:fillRef idx="0">
+            <a:schemeClr val="accent1"/>
+          </a:fillRef>
+          <a:effectRef idx="1">
+            <a:schemeClr val="accent1"/>
+          </a:effectRef>
+          <a:fontRef idx="minor">
+            <a:schemeClr val="tx1"/>
+          </a:fontRef>
+        </p:style>
+      </p:cxnSp>
+      <p:sp>
+        <p:nvSpPr>
+          <p:cNvPr id="12" name="Rounded Rectangle 11"/>
           <p:cNvSpPr/>
           <p:nvPr/>
         </p:nvSpPr>
         <p:spPr>
           <a:xfrm>
-            <a:off x="7498079" y="1463040"/>
-            <a:ext cx="1234440" cy="292608"/>
-          </a:xfrm>
-          <a:prstGeom prst="rect">
+            <a:off x="9208008" y="2011680"/>
+            <a:ext cx="1993392" cy="658368"/>
+          </a:xfrm>
+          <a:prstGeom prst="roundRect">
             <a:avLst/>
           </a:prstGeom>
           <a:solidFill>
-            <a:srgbClr val="2461E5"/>
+            <a:srgbClr val="107C10"/>
           </a:solidFill>
           <a:ln>
-            <a:solidFill>
-              <a:srgbClr val="2461E5"/>
-            </a:solidFill>
+            <a:noFill/>
           </a:ln>
         </p:spPr>
         <p:style>
@@ -7434,42 +7069,354 @@
           </a:fontRef>
         </p:style>
         <p:txBody>
-          <a:bodyPr rtlCol="0" anchor="ctr" wrap="square" lIns="54864" rIns="54864" tIns="36576" bIns="36576"/>
+          <a:bodyPr rtlCol="0" anchor="ctr" wrap="square" lIns="73152" rIns="73152" tIns="36576" bIns="36576"/>
           <a:lstStyle/>
           <a:p>
             <a:pPr algn="ctr"/>
             <a:r>
-              <a:rPr sz="850" b="1">
+              <a:rPr sz="1100" b="1">
                 <a:solidFill>
                   <a:srgbClr val="FFFFFF"/>
                 </a:solidFill>
               </a:rPr>
-              <a:t>VX_MASK</a:t>
-            </a:r>
-          </a:p>
-        </p:txBody>
-      </p:sp>
-      <p:sp>
-        <p:nvSpPr>
-          <p:cNvPr id="15" name="Rectangle 14"/>
+              <a:t>Parquet
+Files</a:t>
+            </a:r>
+          </a:p>
+        </p:txBody>
+      </p:sp>
+      <p:sp>
+        <p:nvSpPr>
+          <p:cNvPr id="13" name="TextBox 12"/>
+          <p:cNvSpPr txBox="1"/>
+          <p:nvPr/>
+        </p:nvSpPr>
+        <p:spPr>
+          <a:xfrm>
+            <a:off x="502920" y="2798064"/>
+            <a:ext cx="1993392" cy="1463040"/>
+          </a:xfrm>
+          <a:prstGeom prst="rect">
+            <a:avLst/>
+          </a:prstGeom>
+          <a:noFill/>
+        </p:spPr>
+        <p:txBody>
+          <a:bodyPr wrap="square">
+            <a:spAutoFit/>
+          </a:bodyPr>
+          <a:lstStyle/>
+          <a:p>
+            <a:pPr algn="ctr"/>
+            <a:r>
+              <a:rPr sz="950" b="0">
+                <a:solidFill>
+                  <a:srgbClr val="6E6E78"/>
+                </a:solidFill>
+              </a:rPr>
+              <a:t>&lt;Model&gt;_&lt;Obs&gt;_&lt;Param&gt;_&lt;TS&gt;</a:t>
+            </a:r>
+          </a:p>
+          <a:p>
+            <a:pPr algn="ctr"/>
+            <a:r>
+              <a:rPr sz="950" b="0">
+                <a:solidFill>
+                  <a:srgbClr val="6E6E78"/>
+                </a:solidFill>
+              </a:rPr>
+              <a:t>GridStat/ or EnsembleStat/</a:t>
+            </a:r>
+          </a:p>
+          <a:p>
+            <a:pPr algn="ctr"/>
+            <a:r>
+              <a:rPr sz="950" b="0">
+                <a:solidFill>
+                  <a:srgbClr val="6E6E78"/>
+                </a:solidFill>
+              </a:rPr>
+              <a:t>YYYYMMDDHH subdirectories</a:t>
+            </a:r>
+          </a:p>
+        </p:txBody>
+      </p:sp>
+      <p:sp>
+        <p:nvSpPr>
+          <p:cNvPr id="14" name="TextBox 13"/>
+          <p:cNvSpPr txBox="1"/>
+          <p:nvPr/>
+        </p:nvSpPr>
+        <p:spPr>
+          <a:xfrm>
+            <a:off x="2679192" y="2798064"/>
+            <a:ext cx="1993392" cy="1463040"/>
+          </a:xfrm>
+          <a:prstGeom prst="rect">
+            <a:avLst/>
+          </a:prstGeom>
+          <a:noFill/>
+        </p:spPr>
+        <p:txBody>
+          <a:bodyPr wrap="square">
+            <a:spAutoFit/>
+          </a:bodyPr>
+          <a:lstStyle/>
+          <a:p>
+            <a:pPr algn="ctr"/>
+            <a:r>
+              <a:rPr sz="950" b="0">
+                <a:solidFill>
+                  <a:srgbClr val="6E6E78"/>
+                </a:solidFill>
+              </a:rPr>
+              <a:t>CNT, SL1L2, SAL1L2</a:t>
+            </a:r>
+          </a:p>
+          <a:p>
+            <a:pPr algn="ctr"/>
+            <a:r>
+              <a:rPr sz="950" b="0">
+                <a:solidFill>
+                  <a:srgbClr val="6E6E78"/>
+                </a:solidFill>
+              </a:rPr>
+              <a:t>(GridStat)</a:t>
+            </a:r>
+          </a:p>
+          <a:p>
+            <a:pPr algn="ctr"/>
+            <a:r>
+              <a:rPr sz="950" b="0">
+                <a:solidFill>
+                  <a:srgbClr val="6E6E78"/>
+                </a:solidFill>
+              </a:rPr>
+              <a:t>ECNT  (EnsembleStat)</a:t>
+            </a:r>
+          </a:p>
+        </p:txBody>
+      </p:sp>
+      <p:sp>
+        <p:nvSpPr>
+          <p:cNvPr id="15" name="TextBox 14"/>
+          <p:cNvSpPr txBox="1"/>
+          <p:nvPr/>
+        </p:nvSpPr>
+        <p:spPr>
+          <a:xfrm>
+            <a:off x="4855464" y="2798064"/>
+            <a:ext cx="1993392" cy="1463040"/>
+          </a:xfrm>
+          <a:prstGeom prst="rect">
+            <a:avLst/>
+          </a:prstGeom>
+          <a:noFill/>
+        </p:spPr>
+        <p:txBody>
+          <a:bodyPr wrap="square">
+            <a:spAutoFit/>
+          </a:bodyPr>
+          <a:lstStyle/>
+          <a:p>
+            <a:pPr algn="ctr"/>
+            <a:r>
+              <a:rPr sz="950" b="0">
+                <a:solidFill>
+                  <a:srgbClr val="6E6E78"/>
+                </a:solidFill>
+              </a:rPr>
+              <a:t>Drop metadata cols</a:t>
+            </a:r>
+          </a:p>
+          <a:p>
+            <a:pPr algn="ctr"/>
+            <a:r>
+              <a:rPr sz="950" b="0">
+                <a:solidFill>
+                  <a:srgbClr val="6E6E78"/>
+                </a:solidFill>
+              </a:rPr>
+              <a:t>Convert lead to hours</a:t>
+            </a:r>
+          </a:p>
+          <a:p>
+            <a:pPr algn="ctr"/>
+            <a:r>
+              <a:rPr sz="950" b="0">
+                <a:solidFill>
+                  <a:srgbClr val="6E6E78"/>
+                </a:solidFill>
+              </a:rPr>
+              <a:t>Add PARAMETER column</a:t>
+            </a:r>
+          </a:p>
+          <a:p>
+            <a:pPr algn="ctr"/>
+            <a:r>
+              <a:rPr sz="950" b="0">
+                <a:solidFill>
+                  <a:srgbClr val="6E6E78"/>
+                </a:solidFill>
+              </a:rPr>
+              <a:t>Numeric type casting</a:t>
+            </a:r>
+          </a:p>
+        </p:txBody>
+      </p:sp>
+      <p:sp>
+        <p:nvSpPr>
+          <p:cNvPr id="16" name="TextBox 15"/>
+          <p:cNvSpPr txBox="1"/>
+          <p:nvPr/>
+        </p:nvSpPr>
+        <p:spPr>
+          <a:xfrm>
+            <a:off x="7031736" y="2798064"/>
+            <a:ext cx="1993392" cy="1463040"/>
+          </a:xfrm>
+          <a:prstGeom prst="rect">
+            <a:avLst/>
+          </a:prstGeom>
+          <a:noFill/>
+        </p:spPr>
+        <p:txBody>
+          <a:bodyPr wrap="square">
+            <a:spAutoFit/>
+          </a:bodyPr>
+          <a:lstStyle/>
+          <a:p>
+            <a:pPr algn="ctr"/>
+            <a:r>
+              <a:rPr sz="950" b="0">
+                <a:solidFill>
+                  <a:srgbClr val="6E6E78"/>
+                </a:solidFill>
+              </a:rPr>
+              <a:t>One output per</a:t>
+            </a:r>
+          </a:p>
+          <a:p>
+            <a:pPr algn="ctr"/>
+            <a:r>
+              <a:rPr sz="950" b="0">
+                <a:solidFill>
+                  <a:srgbClr val="6E6E78"/>
+                </a:solidFill>
+              </a:rPr>
+              <a:t>model + obs pair:</a:t>
+            </a:r>
+          </a:p>
+          <a:p>
+            <a:pPr algn="ctr"/>
+            <a:r>
+              <a:rPr sz="950" b="0">
+                <a:solidFill>
+                  <a:srgbClr val="6E6E78"/>
+                </a:solidFill>
+              </a:rPr>
+              <a:t>AGlobal4_Analysis</a:t>
+            </a:r>
+          </a:p>
+          <a:p>
+            <a:pPr algn="ctr"/>
+            <a:r>
+              <a:rPr sz="950" b="0">
+                <a:solidFill>
+                  <a:srgbClr val="6E6E78"/>
+                </a:solidFill>
+              </a:rPr>
+              <a:t>AGlobal4E_Analysis</a:t>
+            </a:r>
+          </a:p>
+        </p:txBody>
+      </p:sp>
+      <p:sp>
+        <p:nvSpPr>
+          <p:cNvPr id="17" name="TextBox 16"/>
+          <p:cNvSpPr txBox="1"/>
+          <p:nvPr/>
+        </p:nvSpPr>
+        <p:spPr>
+          <a:xfrm>
+            <a:off x="9208008" y="2798064"/>
+            <a:ext cx="1993392" cy="1463040"/>
+          </a:xfrm>
+          <a:prstGeom prst="rect">
+            <a:avLst/>
+          </a:prstGeom>
+          <a:noFill/>
+        </p:spPr>
+        <p:txBody>
+          <a:bodyPr wrap="square">
+            <a:spAutoFit/>
+          </a:bodyPr>
+          <a:lstStyle/>
+          <a:p>
+            <a:pPr algn="ctr"/>
+            <a:r>
+              <a:rPr sz="950" b="0">
+                <a:solidFill>
+                  <a:srgbClr val="6E6E78"/>
+                </a:solidFill>
+              </a:rPr>
+              <a:t>One .parquet per</a:t>
+            </a:r>
+          </a:p>
+          <a:p>
+            <a:pPr algn="ctr"/>
+            <a:r>
+              <a:rPr sz="950" b="0">
+                <a:solidFill>
+                  <a:srgbClr val="6E6E78"/>
+                </a:solidFill>
+              </a:rPr>
+              <a:t>model/obs pair</a:t>
+            </a:r>
+          </a:p>
+          <a:p>
+            <a:pPr algn="ctr"/>
+            <a:r>
+              <a:rPr sz="950" b="0">
+                <a:solidFill>
+                  <a:srgbClr val="6E6E78"/>
+                </a:solidFill>
+              </a:rPr>
+              <a:t>All parameters</a:t>
+            </a:r>
+          </a:p>
+          <a:p>
+            <a:pPr algn="ctr"/>
+            <a:r>
+              <a:rPr sz="950" b="0">
+                <a:solidFill>
+                  <a:srgbClr val="6E6E78"/>
+                </a:solidFill>
+              </a:rPr>
+              <a:t>All timesteps</a:t>
+            </a:r>
+          </a:p>
+        </p:txBody>
+      </p:sp>
+      <p:sp>
+        <p:nvSpPr>
+          <p:cNvPr id="18" name="Rectangle 17"/>
           <p:cNvSpPr/>
           <p:nvPr/>
         </p:nvSpPr>
         <p:spPr>
           <a:xfrm>
-            <a:off x="8778240" y="1463040"/>
-            <a:ext cx="1600200" cy="292608"/>
+            <a:off x="1645920" y="4645152"/>
+            <a:ext cx="8869680" cy="475488"/>
           </a:xfrm>
           <a:prstGeom prst="rect">
             <a:avLst/>
           </a:prstGeom>
           <a:solidFill>
-            <a:srgbClr val="107C10"/>
+            <a:srgbClr val="F5F5F7"/>
           </a:solidFill>
           <a:ln>
-            <a:solidFill>
-              <a:srgbClr val="107C10"/>
-            </a:solidFill>
+            <a:noFill/>
           </a:ln>
         </p:spPr>
         <p:style>
@@ -7487,1959 +7434,17 @@
           </a:fontRef>
         </p:style>
         <p:txBody>
-          <a:bodyPr rtlCol="0" anchor="ctr" wrap="square" lIns="54864" rIns="54864" tIns="36576" bIns="36576"/>
+          <a:bodyPr rtlCol="0" anchor="ctr" wrap="square" lIns="73152" rIns="73152" tIns="36576" bIns="36576"/>
           <a:lstStyle/>
           <a:p>
             <a:pPr algn="ctr"/>
             <a:r>
-              <a:rPr sz="850" b="1">
-                <a:solidFill>
-                  <a:srgbClr val="FFFFFF"/>
-                </a:solidFill>
-              </a:rPr>
-              <a:t>ME / RMSE / MAE</a:t>
-            </a:r>
-          </a:p>
-        </p:txBody>
-      </p:sp>
-      <p:sp>
-        <p:nvSpPr>
-          <p:cNvPr id="16" name="Rectangle 15"/>
-          <p:cNvSpPr/>
-          <p:nvPr/>
-        </p:nvSpPr>
-        <p:spPr>
-          <a:xfrm>
-            <a:off x="10424160" y="1463040"/>
-            <a:ext cx="1645920" cy="292608"/>
-          </a:xfrm>
-          <a:prstGeom prst="rect">
-            <a:avLst/>
-          </a:prstGeom>
-          <a:solidFill>
-            <a:srgbClr val="CC5000"/>
-          </a:solidFill>
-          <a:ln>
-            <a:solidFill>
-              <a:srgbClr val="CC5000"/>
-            </a:solidFill>
-          </a:ln>
-        </p:spPr>
-        <p:style>
-          <a:lnRef idx="1">
-            <a:schemeClr val="accent1"/>
-          </a:lnRef>
-          <a:fillRef idx="3">
-            <a:schemeClr val="accent1"/>
-          </a:fillRef>
-          <a:effectRef idx="2">
-            <a:schemeClr val="accent1"/>
-          </a:effectRef>
-          <a:fontRef idx="minor">
-            <a:schemeClr val="lt1"/>
-          </a:fontRef>
-        </p:style>
-        <p:txBody>
-          <a:bodyPr rtlCol="0" anchor="ctr" wrap="square" lIns="54864" rIns="54864" tIns="36576" bIns="36576"/>
-          <a:lstStyle/>
-          <a:p>
-            <a:pPr algn="ctr"/>
-            <a:r>
-              <a:rPr sz="850" b="1">
-                <a:solidFill>
-                  <a:srgbClr val="FFFFFF"/>
-                </a:solidFill>
-              </a:rPr>
-              <a:t>CRPS / SPREAD</a:t>
-            </a:r>
-          </a:p>
-        </p:txBody>
-      </p:sp>
-      <p:sp>
-        <p:nvSpPr>
-          <p:cNvPr id="17" name="Rectangle 16"/>
-          <p:cNvSpPr/>
-          <p:nvPr/>
-        </p:nvSpPr>
-        <p:spPr>
-          <a:xfrm>
-            <a:off x="411480" y="1755648"/>
-            <a:ext cx="1508760" cy="292608"/>
-          </a:xfrm>
-          <a:prstGeom prst="rect">
-            <a:avLst/>
-          </a:prstGeom>
-          <a:solidFill>
-            <a:srgbClr val="FFFFFF"/>
-          </a:solidFill>
-          <a:ln w="3810">
-            <a:solidFill>
-              <a:srgbClr val="DDDDDD"/>
-            </a:solidFill>
-          </a:ln>
-        </p:spPr>
-        <p:style>
-          <a:lnRef idx="1">
-            <a:schemeClr val="accent1"/>
-          </a:lnRef>
-          <a:fillRef idx="3">
-            <a:schemeClr val="accent1"/>
-          </a:fillRef>
-          <a:effectRef idx="2">
-            <a:schemeClr val="accent1"/>
-          </a:effectRef>
-          <a:fontRef idx="minor">
-            <a:schemeClr val="lt1"/>
-          </a:fontRef>
-        </p:style>
-        <p:txBody>
-          <a:bodyPr rtlCol="0" anchor="ctr" wrap="square" lIns="54864" rIns="54864" tIns="36576" bIns="36576"/>
-          <a:lstStyle/>
-          <a:p>
-            <a:pPr algn="ctr"/>
-            <a:r>
-              <a:rPr sz="850" b="0">
-                <a:solidFill>
-                  <a:srgbClr val="2D2D2D"/>
-                </a:solidFill>
-              </a:rPr>
-              <a:t>T_AllLevels</a:t>
-            </a:r>
-          </a:p>
-        </p:txBody>
-      </p:sp>
-      <p:sp>
-        <p:nvSpPr>
-          <p:cNvPr id="18" name="Rectangle 17"/>
-          <p:cNvSpPr/>
-          <p:nvPr/>
-        </p:nvSpPr>
-        <p:spPr>
-          <a:xfrm>
-            <a:off x="1965960" y="1755648"/>
-            <a:ext cx="1417320" cy="292608"/>
-          </a:xfrm>
-          <a:prstGeom prst="rect">
-            <a:avLst/>
-          </a:prstGeom>
-          <a:solidFill>
-            <a:srgbClr val="E8F5E9"/>
-          </a:solidFill>
-          <a:ln w="3810">
-            <a:solidFill>
-              <a:srgbClr val="DDDDDD"/>
-            </a:solidFill>
-          </a:ln>
-        </p:spPr>
-        <p:style>
-          <a:lnRef idx="1">
-            <a:schemeClr val="accent1"/>
-          </a:lnRef>
-          <a:fillRef idx="3">
-            <a:schemeClr val="accent1"/>
-          </a:fillRef>
-          <a:effectRef idx="2">
-            <a:schemeClr val="accent1"/>
-          </a:effectRef>
-          <a:fontRef idx="minor">
-            <a:schemeClr val="lt1"/>
-          </a:fontRef>
-        </p:style>
-        <p:txBody>
-          <a:bodyPr rtlCol="0" anchor="ctr" wrap="square" lIns="54864" rIns="54864" tIns="36576" bIns="36576"/>
-          <a:lstStyle/>
-          <a:p>
-            <a:pPr algn="ctr"/>
-            <a:r>
-              <a:rPr sz="850" b="0">
-                <a:solidFill>
-                  <a:srgbClr val="107C10"/>
-                </a:solidFill>
-              </a:rPr>
-              <a:t>GridStat</a:t>
-            </a:r>
-          </a:p>
-        </p:txBody>
-      </p:sp>
-      <p:sp>
-        <p:nvSpPr>
-          <p:cNvPr id="19" name="Rectangle 18"/>
-          <p:cNvSpPr/>
-          <p:nvPr/>
-        </p:nvSpPr>
-        <p:spPr>
-          <a:xfrm>
-            <a:off x="3429000" y="1755648"/>
-            <a:ext cx="1417320" cy="292608"/>
-          </a:xfrm>
-          <a:prstGeom prst="rect">
-            <a:avLst/>
-          </a:prstGeom>
-          <a:solidFill>
-            <a:srgbClr val="FFFFFF"/>
-          </a:solidFill>
-          <a:ln w="3810">
-            <a:solidFill>
-              <a:srgbClr val="DDDDDD"/>
-            </a:solidFill>
-          </a:ln>
-        </p:spPr>
-        <p:style>
-          <a:lnRef idx="1">
-            <a:schemeClr val="accent1"/>
-          </a:lnRef>
-          <a:fillRef idx="3">
-            <a:schemeClr val="accent1"/>
-          </a:fillRef>
-          <a:effectRef idx="2">
-            <a:schemeClr val="accent1"/>
-          </a:effectRef>
-          <a:fontRef idx="minor">
-            <a:schemeClr val="lt1"/>
-          </a:fontRef>
-        </p:style>
-        <p:txBody>
-          <a:bodyPr rtlCol="0" anchor="ctr" wrap="square" lIns="54864" rIns="54864" tIns="36576" bIns="36576"/>
-          <a:lstStyle/>
-          <a:p>
-            <a:pPr algn="ctr"/>
-            <a:r>
-              <a:rPr sz="850" b="0">
-                <a:solidFill>
-                  <a:srgbClr val="2D2D2D"/>
-                </a:solidFill>
-              </a:rPr>
-              <a:t>2026-04-10</a:t>
-            </a:r>
-          </a:p>
-        </p:txBody>
-      </p:sp>
-      <p:sp>
-        <p:nvSpPr>
-          <p:cNvPr id="20" name="Rectangle 19"/>
-          <p:cNvSpPr/>
-          <p:nvPr/>
-        </p:nvSpPr>
-        <p:spPr>
-          <a:xfrm>
-            <a:off x="4892040" y="1755648"/>
-            <a:ext cx="1280160" cy="292608"/>
-          </a:xfrm>
-          <a:prstGeom prst="rect">
-            <a:avLst/>
-          </a:prstGeom>
-          <a:solidFill>
-            <a:srgbClr val="FFFFFF"/>
-          </a:solidFill>
-          <a:ln w="3810">
-            <a:solidFill>
-              <a:srgbClr val="DDDDDD"/>
-            </a:solidFill>
-          </a:ln>
-        </p:spPr>
-        <p:style>
-          <a:lnRef idx="1">
-            <a:schemeClr val="accent1"/>
-          </a:lnRef>
-          <a:fillRef idx="3">
-            <a:schemeClr val="accent1"/>
-          </a:fillRef>
-          <a:effectRef idx="2">
-            <a:schemeClr val="accent1"/>
-          </a:effectRef>
-          <a:fontRef idx="minor">
-            <a:schemeClr val="lt1"/>
-          </a:fontRef>
-        </p:style>
-        <p:txBody>
-          <a:bodyPr rtlCol="0" anchor="ctr" wrap="square" lIns="54864" rIns="54864" tIns="36576" bIns="36576"/>
-          <a:lstStyle/>
-          <a:p>
-            <a:pPr algn="ctr"/>
-            <a:r>
-              <a:rPr sz="850" b="0">
-                <a:solidFill>
-                  <a:srgbClr val="2D2D2D"/>
-                </a:solidFill>
-              </a:rPr>
-              <a:t>24</a:t>
-            </a:r>
-          </a:p>
-        </p:txBody>
-      </p:sp>
-      <p:sp>
-        <p:nvSpPr>
-          <p:cNvPr id="21" name="Rectangle 20"/>
-          <p:cNvSpPr/>
-          <p:nvPr/>
-        </p:nvSpPr>
-        <p:spPr>
-          <a:xfrm>
-            <a:off x="6217920" y="1755648"/>
-            <a:ext cx="1234440" cy="292608"/>
-          </a:xfrm>
-          <a:prstGeom prst="rect">
-            <a:avLst/>
-          </a:prstGeom>
-          <a:solidFill>
-            <a:srgbClr val="FFFFFF"/>
-          </a:solidFill>
-          <a:ln w="3810">
-            <a:solidFill>
-              <a:srgbClr val="DDDDDD"/>
-            </a:solidFill>
-          </a:ln>
-        </p:spPr>
-        <p:style>
-          <a:lnRef idx="1">
-            <a:schemeClr val="accent1"/>
-          </a:lnRef>
-          <a:fillRef idx="3">
-            <a:schemeClr val="accent1"/>
-          </a:fillRef>
-          <a:effectRef idx="2">
-            <a:schemeClr val="accent1"/>
-          </a:effectRef>
-          <a:fontRef idx="minor">
-            <a:schemeClr val="lt1"/>
-          </a:fontRef>
-        </p:style>
-        <p:txBody>
-          <a:bodyPr rtlCol="0" anchor="ctr" wrap="square" lIns="54864" rIns="54864" tIns="36576" bIns="36576"/>
-          <a:lstStyle/>
-          <a:p>
-            <a:pPr algn="ctr"/>
-            <a:r>
-              <a:rPr sz="850" b="0">
-                <a:solidFill>
-                  <a:srgbClr val="2D2D2D"/>
-                </a:solidFill>
-              </a:rPr>
-              <a:t>P850</a:t>
-            </a:r>
-          </a:p>
-        </p:txBody>
-      </p:sp>
-      <p:sp>
-        <p:nvSpPr>
-          <p:cNvPr id="22" name="Rectangle 21"/>
-          <p:cNvSpPr/>
-          <p:nvPr/>
-        </p:nvSpPr>
-        <p:spPr>
-          <a:xfrm>
-            <a:off x="7498079" y="1755648"/>
-            <a:ext cx="1234440" cy="292608"/>
-          </a:xfrm>
-          <a:prstGeom prst="rect">
-            <a:avLst/>
-          </a:prstGeom>
-          <a:solidFill>
-            <a:srgbClr val="FFFFFF"/>
-          </a:solidFill>
-          <a:ln w="3810">
-            <a:solidFill>
-              <a:srgbClr val="DDDDDD"/>
-            </a:solidFill>
-          </a:ln>
-        </p:spPr>
-        <p:style>
-          <a:lnRef idx="1">
-            <a:schemeClr val="accent1"/>
-          </a:lnRef>
-          <a:fillRef idx="3">
-            <a:schemeClr val="accent1"/>
-          </a:fillRef>
-          <a:effectRef idx="2">
-            <a:schemeClr val="accent1"/>
-          </a:effectRef>
-          <a:fontRef idx="minor">
-            <a:schemeClr val="lt1"/>
-          </a:fontRef>
-        </p:style>
-        <p:txBody>
-          <a:bodyPr rtlCol="0" anchor="ctr" wrap="square" lIns="54864" rIns="54864" tIns="36576" bIns="36576"/>
-          <a:lstStyle/>
-          <a:p>
-            <a:pPr algn="ctr"/>
-            <a:r>
-              <a:rPr sz="850" b="0">
-                <a:solidFill>
-                  <a:srgbClr val="2D2D2D"/>
-                </a:solidFill>
-              </a:rPr>
-              <a:t>Australia</a:t>
-            </a:r>
-          </a:p>
-        </p:txBody>
-      </p:sp>
-      <p:sp>
-        <p:nvSpPr>
-          <p:cNvPr id="23" name="Rectangle 22"/>
-          <p:cNvSpPr/>
-          <p:nvPr/>
-        </p:nvSpPr>
-        <p:spPr>
-          <a:xfrm>
-            <a:off x="8778240" y="1755648"/>
-            <a:ext cx="1600200" cy="292608"/>
-          </a:xfrm>
-          <a:prstGeom prst="rect">
-            <a:avLst/>
-          </a:prstGeom>
-          <a:solidFill>
-            <a:srgbClr val="FFFFFF"/>
-          </a:solidFill>
-          <a:ln w="3810">
-            <a:solidFill>
-              <a:srgbClr val="DDDDDD"/>
-            </a:solidFill>
-          </a:ln>
-        </p:spPr>
-        <p:style>
-          <a:lnRef idx="1">
-            <a:schemeClr val="accent1"/>
-          </a:lnRef>
-          <a:fillRef idx="3">
-            <a:schemeClr val="accent1"/>
-          </a:fillRef>
-          <a:effectRef idx="2">
-            <a:schemeClr val="accent1"/>
-          </a:effectRef>
-          <a:fontRef idx="minor">
-            <a:schemeClr val="lt1"/>
-          </a:fontRef>
-        </p:style>
-        <p:txBody>
-          <a:bodyPr rtlCol="0" anchor="ctr" wrap="square" lIns="54864" rIns="54864" tIns="36576" bIns="36576"/>
-          <a:lstStyle/>
-          <a:p>
-            <a:pPr algn="ctr"/>
-            <a:r>
-              <a:rPr sz="850" b="0">
-                <a:solidFill>
-                  <a:srgbClr val="2D2D2D"/>
-                </a:solidFill>
-              </a:rPr>
-              <a:t>−0.5 / 1.87 / 1.43</a:t>
-            </a:r>
-          </a:p>
-        </p:txBody>
-      </p:sp>
-      <p:sp>
-        <p:nvSpPr>
-          <p:cNvPr id="24" name="Rectangle 23"/>
-          <p:cNvSpPr/>
-          <p:nvPr/>
-        </p:nvSpPr>
-        <p:spPr>
-          <a:xfrm>
-            <a:off x="10424160" y="1755648"/>
-            <a:ext cx="1645920" cy="292608"/>
-          </a:xfrm>
-          <a:prstGeom prst="rect">
-            <a:avLst/>
-          </a:prstGeom>
-          <a:solidFill>
-            <a:srgbClr val="FFFFFF"/>
-          </a:solidFill>
-          <a:ln w="3810">
-            <a:solidFill>
-              <a:srgbClr val="DDDDDD"/>
-            </a:solidFill>
-          </a:ln>
-        </p:spPr>
-        <p:style>
-          <a:lnRef idx="1">
-            <a:schemeClr val="accent1"/>
-          </a:lnRef>
-          <a:fillRef idx="3">
-            <a:schemeClr val="accent1"/>
-          </a:fillRef>
-          <a:effectRef idx="2">
-            <a:schemeClr val="accent1"/>
-          </a:effectRef>
-          <a:fontRef idx="minor">
-            <a:schemeClr val="lt1"/>
-          </a:fontRef>
-        </p:style>
-        <p:txBody>
-          <a:bodyPr rtlCol="0" anchor="ctr" wrap="square" lIns="54864" rIns="54864" tIns="36576" bIns="36576"/>
-          <a:lstStyle/>
-          <a:p>
-            <a:pPr algn="ctr"/>
-            <a:r>
-              <a:rPr sz="850" b="0">
-                <a:solidFill>
-                  <a:srgbClr val="2D2D2D"/>
-                </a:solidFill>
-              </a:rPr>
-              <a:t>—</a:t>
-            </a:r>
-          </a:p>
-        </p:txBody>
-      </p:sp>
-      <p:sp>
-        <p:nvSpPr>
-          <p:cNvPr id="25" name="Rectangle 24"/>
-          <p:cNvSpPr/>
-          <p:nvPr/>
-        </p:nvSpPr>
-        <p:spPr>
-          <a:xfrm>
-            <a:off x="411480" y="2048256"/>
-            <a:ext cx="1508760" cy="292608"/>
-          </a:xfrm>
-          <a:prstGeom prst="rect">
-            <a:avLst/>
-          </a:prstGeom>
-          <a:solidFill>
-            <a:srgbClr val="F2F2F2"/>
-          </a:solidFill>
-          <a:ln w="3810">
-            <a:solidFill>
-              <a:srgbClr val="DDDDDD"/>
-            </a:solidFill>
-          </a:ln>
-        </p:spPr>
-        <p:style>
-          <a:lnRef idx="1">
-            <a:schemeClr val="accent1"/>
-          </a:lnRef>
-          <a:fillRef idx="3">
-            <a:schemeClr val="accent1"/>
-          </a:fillRef>
-          <a:effectRef idx="2">
-            <a:schemeClr val="accent1"/>
-          </a:effectRef>
-          <a:fontRef idx="minor">
-            <a:schemeClr val="lt1"/>
-          </a:fontRef>
-        </p:style>
-        <p:txBody>
-          <a:bodyPr rtlCol="0" anchor="ctr" wrap="square" lIns="54864" rIns="54864" tIns="36576" bIns="36576"/>
-          <a:lstStyle/>
-          <a:p>
-            <a:pPr algn="ctr"/>
-            <a:r>
-              <a:rPr sz="850" b="0">
-                <a:solidFill>
-                  <a:srgbClr val="2D2D2D"/>
-                </a:solidFill>
-              </a:rPr>
-              <a:t>MSLP</a:t>
-            </a:r>
-          </a:p>
-        </p:txBody>
-      </p:sp>
-      <p:sp>
-        <p:nvSpPr>
-          <p:cNvPr id="26" name="Rectangle 25"/>
-          <p:cNvSpPr/>
-          <p:nvPr/>
-        </p:nvSpPr>
-        <p:spPr>
-          <a:xfrm>
-            <a:off x="1965960" y="2048256"/>
-            <a:ext cx="1417320" cy="292608"/>
-          </a:xfrm>
-          <a:prstGeom prst="rect">
-            <a:avLst/>
-          </a:prstGeom>
-          <a:solidFill>
-            <a:srgbClr val="E8F5E9"/>
-          </a:solidFill>
-          <a:ln w="3810">
-            <a:solidFill>
-              <a:srgbClr val="DDDDDD"/>
-            </a:solidFill>
-          </a:ln>
-        </p:spPr>
-        <p:style>
-          <a:lnRef idx="1">
-            <a:schemeClr val="accent1"/>
-          </a:lnRef>
-          <a:fillRef idx="3">
-            <a:schemeClr val="accent1"/>
-          </a:fillRef>
-          <a:effectRef idx="2">
-            <a:schemeClr val="accent1"/>
-          </a:effectRef>
-          <a:fontRef idx="minor">
-            <a:schemeClr val="lt1"/>
-          </a:fontRef>
-        </p:style>
-        <p:txBody>
-          <a:bodyPr rtlCol="0" anchor="ctr" wrap="square" lIns="54864" rIns="54864" tIns="36576" bIns="36576"/>
-          <a:lstStyle/>
-          <a:p>
-            <a:pPr algn="ctr"/>
-            <a:r>
-              <a:rPr sz="850" b="0">
-                <a:solidFill>
-                  <a:srgbClr val="107C10"/>
-                </a:solidFill>
-              </a:rPr>
-              <a:t>GridStat</a:t>
-            </a:r>
-          </a:p>
-        </p:txBody>
-      </p:sp>
-      <p:sp>
-        <p:nvSpPr>
-          <p:cNvPr id="27" name="Rectangle 26"/>
-          <p:cNvSpPr/>
-          <p:nvPr/>
-        </p:nvSpPr>
-        <p:spPr>
-          <a:xfrm>
-            <a:off x="3429000" y="2048256"/>
-            <a:ext cx="1417320" cy="292608"/>
-          </a:xfrm>
-          <a:prstGeom prst="rect">
-            <a:avLst/>
-          </a:prstGeom>
-          <a:solidFill>
-            <a:srgbClr val="F2F2F2"/>
-          </a:solidFill>
-          <a:ln w="3810">
-            <a:solidFill>
-              <a:srgbClr val="DDDDDD"/>
-            </a:solidFill>
-          </a:ln>
-        </p:spPr>
-        <p:style>
-          <a:lnRef idx="1">
-            <a:schemeClr val="accent1"/>
-          </a:lnRef>
-          <a:fillRef idx="3">
-            <a:schemeClr val="accent1"/>
-          </a:fillRef>
-          <a:effectRef idx="2">
-            <a:schemeClr val="accent1"/>
-          </a:effectRef>
-          <a:fontRef idx="minor">
-            <a:schemeClr val="lt1"/>
-          </a:fontRef>
-        </p:style>
-        <p:txBody>
-          <a:bodyPr rtlCol="0" anchor="ctr" wrap="square" lIns="54864" rIns="54864" tIns="36576" bIns="36576"/>
-          <a:lstStyle/>
-          <a:p>
-            <a:pPr algn="ctr"/>
-            <a:r>
-              <a:rPr sz="850" b="0">
-                <a:solidFill>
-                  <a:srgbClr val="2D2D2D"/>
-                </a:solidFill>
-              </a:rPr>
-              <a:t>2026-04-10</a:t>
-            </a:r>
-          </a:p>
-        </p:txBody>
-      </p:sp>
-      <p:sp>
-        <p:nvSpPr>
-          <p:cNvPr id="28" name="Rectangle 27"/>
-          <p:cNvSpPr/>
-          <p:nvPr/>
-        </p:nvSpPr>
-        <p:spPr>
-          <a:xfrm>
-            <a:off x="4892040" y="2048256"/>
-            <a:ext cx="1280160" cy="292608"/>
-          </a:xfrm>
-          <a:prstGeom prst="rect">
-            <a:avLst/>
-          </a:prstGeom>
-          <a:solidFill>
-            <a:srgbClr val="F2F2F2"/>
-          </a:solidFill>
-          <a:ln w="3810">
-            <a:solidFill>
-              <a:srgbClr val="DDDDDD"/>
-            </a:solidFill>
-          </a:ln>
-        </p:spPr>
-        <p:style>
-          <a:lnRef idx="1">
-            <a:schemeClr val="accent1"/>
-          </a:lnRef>
-          <a:fillRef idx="3">
-            <a:schemeClr val="accent1"/>
-          </a:fillRef>
-          <a:effectRef idx="2">
-            <a:schemeClr val="accent1"/>
-          </a:effectRef>
-          <a:fontRef idx="minor">
-            <a:schemeClr val="lt1"/>
-          </a:fontRef>
-        </p:style>
-        <p:txBody>
-          <a:bodyPr rtlCol="0" anchor="ctr" wrap="square" lIns="54864" rIns="54864" tIns="36576" bIns="36576"/>
-          <a:lstStyle/>
-          <a:p>
-            <a:pPr algn="ctr"/>
-            <a:r>
-              <a:rPr sz="850" b="0">
-                <a:solidFill>
-                  <a:srgbClr val="2D2D2D"/>
-                </a:solidFill>
-              </a:rPr>
-              <a:t>48</a:t>
-            </a:r>
-          </a:p>
-        </p:txBody>
-      </p:sp>
-      <p:sp>
-        <p:nvSpPr>
-          <p:cNvPr id="29" name="Rectangle 28"/>
-          <p:cNvSpPr/>
-          <p:nvPr/>
-        </p:nvSpPr>
-        <p:spPr>
-          <a:xfrm>
-            <a:off x="6217920" y="2048256"/>
-            <a:ext cx="1234440" cy="292608"/>
-          </a:xfrm>
-          <a:prstGeom prst="rect">
-            <a:avLst/>
-          </a:prstGeom>
-          <a:solidFill>
-            <a:srgbClr val="F2F2F2"/>
-          </a:solidFill>
-          <a:ln w="3810">
-            <a:solidFill>
-              <a:srgbClr val="DDDDDD"/>
-            </a:solidFill>
-          </a:ln>
-        </p:spPr>
-        <p:style>
-          <a:lnRef idx="1">
-            <a:schemeClr val="accent1"/>
-          </a:lnRef>
-          <a:fillRef idx="3">
-            <a:schemeClr val="accent1"/>
-          </a:fillRef>
-          <a:effectRef idx="2">
-            <a:schemeClr val="accent1"/>
-          </a:effectRef>
-          <a:fontRef idx="minor">
-            <a:schemeClr val="lt1"/>
-          </a:fontRef>
-        </p:style>
-        <p:txBody>
-          <a:bodyPr rtlCol="0" anchor="ctr" wrap="square" lIns="54864" rIns="54864" tIns="36576" bIns="36576"/>
-          <a:lstStyle/>
-          <a:p>
-            <a:pPr algn="ctr"/>
-            <a:r>
-              <a:rPr sz="850" b="0">
-                <a:solidFill>
-                  <a:srgbClr val="2D2D2D"/>
-                </a:solidFill>
-              </a:rPr>
-              <a:t>L0</a:t>
-            </a:r>
-          </a:p>
-        </p:txBody>
-      </p:sp>
-      <p:sp>
-        <p:nvSpPr>
-          <p:cNvPr id="30" name="Rectangle 29"/>
-          <p:cNvSpPr/>
-          <p:nvPr/>
-        </p:nvSpPr>
-        <p:spPr>
-          <a:xfrm>
-            <a:off x="7498079" y="2048256"/>
-            <a:ext cx="1234440" cy="292608"/>
-          </a:xfrm>
-          <a:prstGeom prst="rect">
-            <a:avLst/>
-          </a:prstGeom>
-          <a:solidFill>
-            <a:srgbClr val="F2F2F2"/>
-          </a:solidFill>
-          <a:ln w="3810">
-            <a:solidFill>
-              <a:srgbClr val="DDDDDD"/>
-            </a:solidFill>
-          </a:ln>
-        </p:spPr>
-        <p:style>
-          <a:lnRef idx="1">
-            <a:schemeClr val="accent1"/>
-          </a:lnRef>
-          <a:fillRef idx="3">
-            <a:schemeClr val="accent1"/>
-          </a:fillRef>
-          <a:effectRef idx="2">
-            <a:schemeClr val="accent1"/>
-          </a:effectRef>
-          <a:fontRef idx="minor">
-            <a:schemeClr val="lt1"/>
-          </a:fontRef>
-        </p:style>
-        <p:txBody>
-          <a:bodyPr rtlCol="0" anchor="ctr" wrap="square" lIns="54864" rIns="54864" tIns="36576" bIns="36576"/>
-          <a:lstStyle/>
-          <a:p>
-            <a:pPr algn="ctr"/>
-            <a:r>
-              <a:rPr sz="850" b="0">
-                <a:solidFill>
-                  <a:srgbClr val="2D2D2D"/>
-                </a:solidFill>
-              </a:rPr>
-              <a:t>NH</a:t>
-            </a:r>
-          </a:p>
-        </p:txBody>
-      </p:sp>
-      <p:sp>
-        <p:nvSpPr>
-          <p:cNvPr id="31" name="Rectangle 30"/>
-          <p:cNvSpPr/>
-          <p:nvPr/>
-        </p:nvSpPr>
-        <p:spPr>
-          <a:xfrm>
-            <a:off x="8778240" y="2048256"/>
-            <a:ext cx="1600200" cy="292608"/>
-          </a:xfrm>
-          <a:prstGeom prst="rect">
-            <a:avLst/>
-          </a:prstGeom>
-          <a:solidFill>
-            <a:srgbClr val="F2F2F2"/>
-          </a:solidFill>
-          <a:ln w="3810">
-            <a:solidFill>
-              <a:srgbClr val="DDDDDD"/>
-            </a:solidFill>
-          </a:ln>
-        </p:spPr>
-        <p:style>
-          <a:lnRef idx="1">
-            <a:schemeClr val="accent1"/>
-          </a:lnRef>
-          <a:fillRef idx="3">
-            <a:schemeClr val="accent1"/>
-          </a:fillRef>
-          <a:effectRef idx="2">
-            <a:schemeClr val="accent1"/>
-          </a:effectRef>
-          <a:fontRef idx="minor">
-            <a:schemeClr val="lt1"/>
-          </a:fontRef>
-        </p:style>
-        <p:txBody>
-          <a:bodyPr rtlCol="0" anchor="ctr" wrap="square" lIns="54864" rIns="54864" tIns="36576" bIns="36576"/>
-          <a:lstStyle/>
-          <a:p>
-            <a:pPr algn="ctr"/>
-            <a:r>
-              <a:rPr sz="850" b="0">
-                <a:solidFill>
-                  <a:srgbClr val="2D2D2D"/>
-                </a:solidFill>
-              </a:rPr>
-              <a:t>0.3 / 2.1 / 1.8</a:t>
-            </a:r>
-          </a:p>
-        </p:txBody>
-      </p:sp>
-      <p:sp>
-        <p:nvSpPr>
-          <p:cNvPr id="32" name="Rectangle 31"/>
-          <p:cNvSpPr/>
-          <p:nvPr/>
-        </p:nvSpPr>
-        <p:spPr>
-          <a:xfrm>
-            <a:off x="10424160" y="2048256"/>
-            <a:ext cx="1645920" cy="292608"/>
-          </a:xfrm>
-          <a:prstGeom prst="rect">
-            <a:avLst/>
-          </a:prstGeom>
-          <a:solidFill>
-            <a:srgbClr val="F2F2F2"/>
-          </a:solidFill>
-          <a:ln w="3810">
-            <a:solidFill>
-              <a:srgbClr val="DDDDDD"/>
-            </a:solidFill>
-          </a:ln>
-        </p:spPr>
-        <p:style>
-          <a:lnRef idx="1">
-            <a:schemeClr val="accent1"/>
-          </a:lnRef>
-          <a:fillRef idx="3">
-            <a:schemeClr val="accent1"/>
-          </a:fillRef>
-          <a:effectRef idx="2">
-            <a:schemeClr val="accent1"/>
-          </a:effectRef>
-          <a:fontRef idx="minor">
-            <a:schemeClr val="lt1"/>
-          </a:fontRef>
-        </p:style>
-        <p:txBody>
-          <a:bodyPr rtlCol="0" anchor="ctr" wrap="square" lIns="54864" rIns="54864" tIns="36576" bIns="36576"/>
-          <a:lstStyle/>
-          <a:p>
-            <a:pPr algn="ctr"/>
-            <a:r>
-              <a:rPr sz="850" b="0">
-                <a:solidFill>
-                  <a:srgbClr val="2D2D2D"/>
-                </a:solidFill>
-              </a:rPr>
-              <a:t>—</a:t>
-            </a:r>
-          </a:p>
-        </p:txBody>
-      </p:sp>
-      <p:sp>
-        <p:nvSpPr>
-          <p:cNvPr id="33" name="Rectangle 32"/>
-          <p:cNvSpPr/>
-          <p:nvPr/>
-        </p:nvSpPr>
-        <p:spPr>
-          <a:xfrm>
-            <a:off x="411480" y="2340864"/>
-            <a:ext cx="1508760" cy="292608"/>
-          </a:xfrm>
-          <a:prstGeom prst="rect">
-            <a:avLst/>
-          </a:prstGeom>
-          <a:solidFill>
-            <a:srgbClr val="FFFFFF"/>
-          </a:solidFill>
-          <a:ln w="3810">
-            <a:solidFill>
-              <a:srgbClr val="DDDDDD"/>
-            </a:solidFill>
-          </a:ln>
-        </p:spPr>
-        <p:style>
-          <a:lnRef idx="1">
-            <a:schemeClr val="accent1"/>
-          </a:lnRef>
-          <a:fillRef idx="3">
-            <a:schemeClr val="accent1"/>
-          </a:fillRef>
-          <a:effectRef idx="2">
-            <a:schemeClr val="accent1"/>
-          </a:effectRef>
-          <a:fontRef idx="minor">
-            <a:schemeClr val="lt1"/>
-          </a:fontRef>
-        </p:style>
-        <p:txBody>
-          <a:bodyPr rtlCol="0" anchor="ctr" wrap="square" lIns="54864" rIns="54864" tIns="36576" bIns="36576"/>
-          <a:lstStyle/>
-          <a:p>
-            <a:pPr algn="ctr"/>
-            <a:r>
-              <a:rPr sz="850" b="0">
-                <a:solidFill>
-                  <a:srgbClr val="2D2D2D"/>
-                </a:solidFill>
-              </a:rPr>
-              <a:t>T850</a:t>
-            </a:r>
-          </a:p>
-        </p:txBody>
-      </p:sp>
-      <p:sp>
-        <p:nvSpPr>
-          <p:cNvPr id="34" name="Rectangle 33"/>
-          <p:cNvSpPr/>
-          <p:nvPr/>
-        </p:nvSpPr>
-        <p:spPr>
-          <a:xfrm>
-            <a:off x="1965960" y="2340864"/>
-            <a:ext cx="1417320" cy="292608"/>
-          </a:xfrm>
-          <a:prstGeom prst="rect">
-            <a:avLst/>
-          </a:prstGeom>
-          <a:solidFill>
-            <a:srgbClr val="FEF0E7"/>
-          </a:solidFill>
-          <a:ln w="3810">
-            <a:solidFill>
-              <a:srgbClr val="DDDDDD"/>
-            </a:solidFill>
-          </a:ln>
-        </p:spPr>
-        <p:style>
-          <a:lnRef idx="1">
-            <a:schemeClr val="accent1"/>
-          </a:lnRef>
-          <a:fillRef idx="3">
-            <a:schemeClr val="accent1"/>
-          </a:fillRef>
-          <a:effectRef idx="2">
-            <a:schemeClr val="accent1"/>
-          </a:effectRef>
-          <a:fontRef idx="minor">
-            <a:schemeClr val="lt1"/>
-          </a:fontRef>
-        </p:style>
-        <p:txBody>
-          <a:bodyPr rtlCol="0" anchor="ctr" wrap="square" lIns="54864" rIns="54864" tIns="36576" bIns="36576"/>
-          <a:lstStyle/>
-          <a:p>
-            <a:pPr algn="ctr"/>
-            <a:r>
-              <a:rPr sz="850" b="0">
-                <a:solidFill>
-                  <a:srgbClr val="CC5000"/>
-                </a:solidFill>
-              </a:rPr>
-              <a:t>EnsembleStat</a:t>
-            </a:r>
-          </a:p>
-        </p:txBody>
-      </p:sp>
-      <p:sp>
-        <p:nvSpPr>
-          <p:cNvPr id="35" name="Rectangle 34"/>
-          <p:cNvSpPr/>
-          <p:nvPr/>
-        </p:nvSpPr>
-        <p:spPr>
-          <a:xfrm>
-            <a:off x="3429000" y="2340864"/>
-            <a:ext cx="1417320" cy="292608"/>
-          </a:xfrm>
-          <a:prstGeom prst="rect">
-            <a:avLst/>
-          </a:prstGeom>
-          <a:solidFill>
-            <a:srgbClr val="FFFFFF"/>
-          </a:solidFill>
-          <a:ln w="3810">
-            <a:solidFill>
-              <a:srgbClr val="DDDDDD"/>
-            </a:solidFill>
-          </a:ln>
-        </p:spPr>
-        <p:style>
-          <a:lnRef idx="1">
-            <a:schemeClr val="accent1"/>
-          </a:lnRef>
-          <a:fillRef idx="3">
-            <a:schemeClr val="accent1"/>
-          </a:fillRef>
-          <a:effectRef idx="2">
-            <a:schemeClr val="accent1"/>
-          </a:effectRef>
-          <a:fontRef idx="minor">
-            <a:schemeClr val="lt1"/>
-          </a:fontRef>
-        </p:style>
-        <p:txBody>
-          <a:bodyPr rtlCol="0" anchor="ctr" wrap="square" lIns="54864" rIns="54864" tIns="36576" bIns="36576"/>
-          <a:lstStyle/>
-          <a:p>
-            <a:pPr algn="ctr"/>
-            <a:r>
-              <a:rPr sz="850" b="0">
-                <a:solidFill>
-                  <a:srgbClr val="2D2D2D"/>
-                </a:solidFill>
-              </a:rPr>
-              <a:t>2026-04-15</a:t>
-            </a:r>
-          </a:p>
-        </p:txBody>
-      </p:sp>
-      <p:sp>
-        <p:nvSpPr>
-          <p:cNvPr id="36" name="Rectangle 35"/>
-          <p:cNvSpPr/>
-          <p:nvPr/>
-        </p:nvSpPr>
-        <p:spPr>
-          <a:xfrm>
-            <a:off x="4892040" y="2340864"/>
-            <a:ext cx="1280160" cy="292608"/>
-          </a:xfrm>
-          <a:prstGeom prst="rect">
-            <a:avLst/>
-          </a:prstGeom>
-          <a:solidFill>
-            <a:srgbClr val="FFFFFF"/>
-          </a:solidFill>
-          <a:ln w="3810">
-            <a:solidFill>
-              <a:srgbClr val="DDDDDD"/>
-            </a:solidFill>
-          </a:ln>
-        </p:spPr>
-        <p:style>
-          <a:lnRef idx="1">
-            <a:schemeClr val="accent1"/>
-          </a:lnRef>
-          <a:fillRef idx="3">
-            <a:schemeClr val="accent1"/>
-          </a:fillRef>
-          <a:effectRef idx="2">
-            <a:schemeClr val="accent1"/>
-          </a:effectRef>
-          <a:fontRef idx="minor">
-            <a:schemeClr val="lt1"/>
-          </a:fontRef>
-        </p:style>
-        <p:txBody>
-          <a:bodyPr rtlCol="0" anchor="ctr" wrap="square" lIns="54864" rIns="54864" tIns="36576" bIns="36576"/>
-          <a:lstStyle/>
-          <a:p>
-            <a:pPr algn="ctr"/>
-            <a:r>
-              <a:rPr sz="850" b="0">
-                <a:solidFill>
-                  <a:srgbClr val="2D2D2D"/>
-                </a:solidFill>
-              </a:rPr>
-              <a:t>24</a:t>
-            </a:r>
-          </a:p>
-        </p:txBody>
-      </p:sp>
-      <p:sp>
-        <p:nvSpPr>
-          <p:cNvPr id="37" name="Rectangle 36"/>
-          <p:cNvSpPr/>
-          <p:nvPr/>
-        </p:nvSpPr>
-        <p:spPr>
-          <a:xfrm>
-            <a:off x="6217920" y="2340864"/>
-            <a:ext cx="1234440" cy="292608"/>
-          </a:xfrm>
-          <a:prstGeom prst="rect">
-            <a:avLst/>
-          </a:prstGeom>
-          <a:solidFill>
-            <a:srgbClr val="FFFFFF"/>
-          </a:solidFill>
-          <a:ln w="3810">
-            <a:solidFill>
-              <a:srgbClr val="DDDDDD"/>
-            </a:solidFill>
-          </a:ln>
-        </p:spPr>
-        <p:style>
-          <a:lnRef idx="1">
-            <a:schemeClr val="accent1"/>
-          </a:lnRef>
-          <a:fillRef idx="3">
-            <a:schemeClr val="accent1"/>
-          </a:fillRef>
-          <a:effectRef idx="2">
-            <a:schemeClr val="accent1"/>
-          </a:effectRef>
-          <a:fontRef idx="minor">
-            <a:schemeClr val="lt1"/>
-          </a:fontRef>
-        </p:style>
-        <p:txBody>
-          <a:bodyPr rtlCol="0" anchor="ctr" wrap="square" lIns="54864" rIns="54864" tIns="36576" bIns="36576"/>
-          <a:lstStyle/>
-          <a:p>
-            <a:pPr algn="ctr"/>
-            <a:r>
-              <a:rPr sz="850" b="0">
-                <a:solidFill>
-                  <a:srgbClr val="2D2D2D"/>
-                </a:solidFill>
-              </a:rPr>
-              <a:t>P850</a:t>
-            </a:r>
-          </a:p>
-        </p:txBody>
-      </p:sp>
-      <p:sp>
-        <p:nvSpPr>
-          <p:cNvPr id="38" name="Rectangle 37"/>
-          <p:cNvSpPr/>
-          <p:nvPr/>
-        </p:nvSpPr>
-        <p:spPr>
-          <a:xfrm>
-            <a:off x="7498079" y="2340864"/>
-            <a:ext cx="1234440" cy="292608"/>
-          </a:xfrm>
-          <a:prstGeom prst="rect">
-            <a:avLst/>
-          </a:prstGeom>
-          <a:solidFill>
-            <a:srgbClr val="FFFFFF"/>
-          </a:solidFill>
-          <a:ln w="3810">
-            <a:solidFill>
-              <a:srgbClr val="DDDDDD"/>
-            </a:solidFill>
-          </a:ln>
-        </p:spPr>
-        <p:style>
-          <a:lnRef idx="1">
-            <a:schemeClr val="accent1"/>
-          </a:lnRef>
-          <a:fillRef idx="3">
-            <a:schemeClr val="accent1"/>
-          </a:fillRef>
-          <a:effectRef idx="2">
-            <a:schemeClr val="accent1"/>
-          </a:effectRef>
-          <a:fontRef idx="minor">
-            <a:schemeClr val="lt1"/>
-          </a:fontRef>
-        </p:style>
-        <p:txBody>
-          <a:bodyPr rtlCol="0" anchor="ctr" wrap="square" lIns="54864" rIns="54864" tIns="36576" bIns="36576"/>
-          <a:lstStyle/>
-          <a:p>
-            <a:pPr algn="ctr"/>
-            <a:r>
-              <a:rPr sz="850" b="0">
-                <a:solidFill>
-                  <a:srgbClr val="2D2D2D"/>
-                </a:solidFill>
-              </a:rPr>
-              <a:t>NH</a:t>
-            </a:r>
-          </a:p>
-        </p:txBody>
-      </p:sp>
-      <p:sp>
-        <p:nvSpPr>
-          <p:cNvPr id="39" name="Rectangle 38"/>
-          <p:cNvSpPr/>
-          <p:nvPr/>
-        </p:nvSpPr>
-        <p:spPr>
-          <a:xfrm>
-            <a:off x="8778240" y="2340864"/>
-            <a:ext cx="1600200" cy="292608"/>
-          </a:xfrm>
-          <a:prstGeom prst="rect">
-            <a:avLst/>
-          </a:prstGeom>
-          <a:solidFill>
-            <a:srgbClr val="FFFFFF"/>
-          </a:solidFill>
-          <a:ln w="3810">
-            <a:solidFill>
-              <a:srgbClr val="DDDDDD"/>
-            </a:solidFill>
-          </a:ln>
-        </p:spPr>
-        <p:style>
-          <a:lnRef idx="1">
-            <a:schemeClr val="accent1"/>
-          </a:lnRef>
-          <a:fillRef idx="3">
-            <a:schemeClr val="accent1"/>
-          </a:fillRef>
-          <a:effectRef idx="2">
-            <a:schemeClr val="accent1"/>
-          </a:effectRef>
-          <a:fontRef idx="minor">
-            <a:schemeClr val="lt1"/>
-          </a:fontRef>
-        </p:style>
-        <p:txBody>
-          <a:bodyPr rtlCol="0" anchor="ctr" wrap="square" lIns="54864" rIns="54864" tIns="36576" bIns="36576"/>
-          <a:lstStyle/>
-          <a:p>
-            <a:pPr algn="ctr"/>
-            <a:r>
-              <a:rPr sz="850" b="0">
-                <a:solidFill>
-                  <a:srgbClr val="2D2D2D"/>
-                </a:solidFill>
-              </a:rPr>
-              <a:t>0.28 / 3.26 / 2.26</a:t>
-            </a:r>
-          </a:p>
-        </p:txBody>
-      </p:sp>
-      <p:sp>
-        <p:nvSpPr>
-          <p:cNvPr id="40" name="Rectangle 39"/>
-          <p:cNvSpPr/>
-          <p:nvPr/>
-        </p:nvSpPr>
-        <p:spPr>
-          <a:xfrm>
-            <a:off x="10424160" y="2340864"/>
-            <a:ext cx="1645920" cy="292608"/>
-          </a:xfrm>
-          <a:prstGeom prst="rect">
-            <a:avLst/>
-          </a:prstGeom>
-          <a:solidFill>
-            <a:srgbClr val="FFFFFF"/>
-          </a:solidFill>
-          <a:ln w="3810">
-            <a:solidFill>
-              <a:srgbClr val="DDDDDD"/>
-            </a:solidFill>
-          </a:ln>
-        </p:spPr>
-        <p:style>
-          <a:lnRef idx="1">
-            <a:schemeClr val="accent1"/>
-          </a:lnRef>
-          <a:fillRef idx="3">
-            <a:schemeClr val="accent1"/>
-          </a:fillRef>
-          <a:effectRef idx="2">
-            <a:schemeClr val="accent1"/>
-          </a:effectRef>
-          <a:fontRef idx="minor">
-            <a:schemeClr val="lt1"/>
-          </a:fontRef>
-        </p:style>
-        <p:txBody>
-          <a:bodyPr rtlCol="0" anchor="ctr" wrap="square" lIns="54864" rIns="54864" tIns="36576" bIns="36576"/>
-          <a:lstStyle/>
-          <a:p>
-            <a:pPr algn="ctr"/>
-            <a:r>
-              <a:rPr sz="850" b="0">
-                <a:solidFill>
-                  <a:srgbClr val="2D2D2D"/>
-                </a:solidFill>
-              </a:rPr>
-              <a:t>1.62 / 2.73</a:t>
-            </a:r>
-          </a:p>
-        </p:txBody>
-      </p:sp>
-      <p:sp>
-        <p:nvSpPr>
-          <p:cNvPr id="41" name="Rectangle 40"/>
-          <p:cNvSpPr/>
-          <p:nvPr/>
-        </p:nvSpPr>
-        <p:spPr>
-          <a:xfrm>
-            <a:off x="411480" y="2633472"/>
-            <a:ext cx="1508760" cy="292608"/>
-          </a:xfrm>
-          <a:prstGeom prst="rect">
-            <a:avLst/>
-          </a:prstGeom>
-          <a:solidFill>
-            <a:srgbClr val="F2F2F2"/>
-          </a:solidFill>
-          <a:ln w="3810">
-            <a:solidFill>
-              <a:srgbClr val="DDDDDD"/>
-            </a:solidFill>
-          </a:ln>
-        </p:spPr>
-        <p:style>
-          <a:lnRef idx="1">
-            <a:schemeClr val="accent1"/>
-          </a:lnRef>
-          <a:fillRef idx="3">
-            <a:schemeClr val="accent1"/>
-          </a:fillRef>
-          <a:effectRef idx="2">
-            <a:schemeClr val="accent1"/>
-          </a:effectRef>
-          <a:fontRef idx="minor">
-            <a:schemeClr val="lt1"/>
-          </a:fontRef>
-        </p:style>
-        <p:txBody>
-          <a:bodyPr rtlCol="0" anchor="ctr" wrap="square" lIns="54864" rIns="54864" tIns="36576" bIns="36576"/>
-          <a:lstStyle/>
-          <a:p>
-            <a:pPr algn="ctr"/>
-            <a:r>
-              <a:rPr sz="850" b="0">
-                <a:solidFill>
-                  <a:srgbClr val="2D2D2D"/>
-                </a:solidFill>
-              </a:rPr>
-              <a:t>Wind_AllLevels</a:t>
-            </a:r>
-          </a:p>
-        </p:txBody>
-      </p:sp>
-      <p:sp>
-        <p:nvSpPr>
-          <p:cNvPr id="42" name="Rectangle 41"/>
-          <p:cNvSpPr/>
-          <p:nvPr/>
-        </p:nvSpPr>
-        <p:spPr>
-          <a:xfrm>
-            <a:off x="1965960" y="2633472"/>
-            <a:ext cx="1417320" cy="292608"/>
-          </a:xfrm>
-          <a:prstGeom prst="rect">
-            <a:avLst/>
-          </a:prstGeom>
-          <a:solidFill>
-            <a:srgbClr val="E8F5E9"/>
-          </a:solidFill>
-          <a:ln w="3810">
-            <a:solidFill>
-              <a:srgbClr val="DDDDDD"/>
-            </a:solidFill>
-          </a:ln>
-        </p:spPr>
-        <p:style>
-          <a:lnRef idx="1">
-            <a:schemeClr val="accent1"/>
-          </a:lnRef>
-          <a:fillRef idx="3">
-            <a:schemeClr val="accent1"/>
-          </a:fillRef>
-          <a:effectRef idx="2">
-            <a:schemeClr val="accent1"/>
-          </a:effectRef>
-          <a:fontRef idx="minor">
-            <a:schemeClr val="lt1"/>
-          </a:fontRef>
-        </p:style>
-        <p:txBody>
-          <a:bodyPr rtlCol="0" anchor="ctr" wrap="square" lIns="54864" rIns="54864" tIns="36576" bIns="36576"/>
-          <a:lstStyle/>
-          <a:p>
-            <a:pPr algn="ctr"/>
-            <a:r>
-              <a:rPr sz="850" b="0">
-                <a:solidFill>
-                  <a:srgbClr val="107C10"/>
-                </a:solidFill>
-              </a:rPr>
-              <a:t>GridStat</a:t>
-            </a:r>
-          </a:p>
-        </p:txBody>
-      </p:sp>
-      <p:sp>
-        <p:nvSpPr>
-          <p:cNvPr id="43" name="Rectangle 42"/>
-          <p:cNvSpPr/>
-          <p:nvPr/>
-        </p:nvSpPr>
-        <p:spPr>
-          <a:xfrm>
-            <a:off x="3429000" y="2633472"/>
-            <a:ext cx="1417320" cy="292608"/>
-          </a:xfrm>
-          <a:prstGeom prst="rect">
-            <a:avLst/>
-          </a:prstGeom>
-          <a:solidFill>
-            <a:srgbClr val="F2F2F2"/>
-          </a:solidFill>
-          <a:ln w="3810">
-            <a:solidFill>
-              <a:srgbClr val="DDDDDD"/>
-            </a:solidFill>
-          </a:ln>
-        </p:spPr>
-        <p:style>
-          <a:lnRef idx="1">
-            <a:schemeClr val="accent1"/>
-          </a:lnRef>
-          <a:fillRef idx="3">
-            <a:schemeClr val="accent1"/>
-          </a:fillRef>
-          <a:effectRef idx="2">
-            <a:schemeClr val="accent1"/>
-          </a:effectRef>
-          <a:fontRef idx="minor">
-            <a:schemeClr val="lt1"/>
-          </a:fontRef>
-        </p:style>
-        <p:txBody>
-          <a:bodyPr rtlCol="0" anchor="ctr" wrap="square" lIns="54864" rIns="54864" tIns="36576" bIns="36576"/>
-          <a:lstStyle/>
-          <a:p>
-            <a:pPr algn="ctr"/>
-            <a:r>
-              <a:rPr sz="850" b="0">
-                <a:solidFill>
-                  <a:srgbClr val="2D2D2D"/>
-                </a:solidFill>
-              </a:rPr>
-              <a:t>2026-04-15</a:t>
-            </a:r>
-          </a:p>
-        </p:txBody>
-      </p:sp>
-      <p:sp>
-        <p:nvSpPr>
-          <p:cNvPr id="44" name="Rectangle 43"/>
-          <p:cNvSpPr/>
-          <p:nvPr/>
-        </p:nvSpPr>
-        <p:spPr>
-          <a:xfrm>
-            <a:off x="4892040" y="2633472"/>
-            <a:ext cx="1280160" cy="292608"/>
-          </a:xfrm>
-          <a:prstGeom prst="rect">
-            <a:avLst/>
-          </a:prstGeom>
-          <a:solidFill>
-            <a:srgbClr val="F2F2F2"/>
-          </a:solidFill>
-          <a:ln w="3810">
-            <a:solidFill>
-              <a:srgbClr val="DDDDDD"/>
-            </a:solidFill>
-          </a:ln>
-        </p:spPr>
-        <p:style>
-          <a:lnRef idx="1">
-            <a:schemeClr val="accent1"/>
-          </a:lnRef>
-          <a:fillRef idx="3">
-            <a:schemeClr val="accent1"/>
-          </a:fillRef>
-          <a:effectRef idx="2">
-            <a:schemeClr val="accent1"/>
-          </a:effectRef>
-          <a:fontRef idx="minor">
-            <a:schemeClr val="lt1"/>
-          </a:fontRef>
-        </p:style>
-        <p:txBody>
-          <a:bodyPr rtlCol="0" anchor="ctr" wrap="square" lIns="54864" rIns="54864" tIns="36576" bIns="36576"/>
-          <a:lstStyle/>
-          <a:p>
-            <a:pPr algn="ctr"/>
-            <a:r>
-              <a:rPr sz="850" b="0">
-                <a:solidFill>
-                  <a:srgbClr val="2D2D2D"/>
-                </a:solidFill>
-              </a:rPr>
-              <a:t>72</a:t>
-            </a:r>
-          </a:p>
-        </p:txBody>
-      </p:sp>
-      <p:sp>
-        <p:nvSpPr>
-          <p:cNvPr id="45" name="Rectangle 44"/>
-          <p:cNvSpPr/>
-          <p:nvPr/>
-        </p:nvSpPr>
-        <p:spPr>
-          <a:xfrm>
-            <a:off x="6217920" y="2633472"/>
-            <a:ext cx="1234440" cy="292608"/>
-          </a:xfrm>
-          <a:prstGeom prst="rect">
-            <a:avLst/>
-          </a:prstGeom>
-          <a:solidFill>
-            <a:srgbClr val="F2F2F2"/>
-          </a:solidFill>
-          <a:ln w="3810">
-            <a:solidFill>
-              <a:srgbClr val="DDDDDD"/>
-            </a:solidFill>
-          </a:ln>
-        </p:spPr>
-        <p:style>
-          <a:lnRef idx="1">
-            <a:schemeClr val="accent1"/>
-          </a:lnRef>
-          <a:fillRef idx="3">
-            <a:schemeClr val="accent1"/>
-          </a:fillRef>
-          <a:effectRef idx="2">
-            <a:schemeClr val="accent1"/>
-          </a:effectRef>
-          <a:fontRef idx="minor">
-            <a:schemeClr val="lt1"/>
-          </a:fontRef>
-        </p:style>
-        <p:txBody>
-          <a:bodyPr rtlCol="0" anchor="ctr" wrap="square" lIns="54864" rIns="54864" tIns="36576" bIns="36576"/>
-          <a:lstStyle/>
-          <a:p>
-            <a:pPr algn="ctr"/>
-            <a:r>
-              <a:rPr sz="850" b="0">
-                <a:solidFill>
-                  <a:srgbClr val="2D2D2D"/>
-                </a:solidFill>
-              </a:rPr>
-              <a:t>P250</a:t>
-            </a:r>
-          </a:p>
-        </p:txBody>
-      </p:sp>
-      <p:sp>
-        <p:nvSpPr>
-          <p:cNvPr id="46" name="Rectangle 45"/>
-          <p:cNvSpPr/>
-          <p:nvPr/>
-        </p:nvSpPr>
-        <p:spPr>
-          <a:xfrm>
-            <a:off x="7498079" y="2633472"/>
-            <a:ext cx="1234440" cy="292608"/>
-          </a:xfrm>
-          <a:prstGeom prst="rect">
-            <a:avLst/>
-          </a:prstGeom>
-          <a:solidFill>
-            <a:srgbClr val="F2F2F2"/>
-          </a:solidFill>
-          <a:ln w="3810">
-            <a:solidFill>
-              <a:srgbClr val="DDDDDD"/>
-            </a:solidFill>
-          </a:ln>
-        </p:spPr>
-        <p:style>
-          <a:lnRef idx="1">
-            <a:schemeClr val="accent1"/>
-          </a:lnRef>
-          <a:fillRef idx="3">
-            <a:schemeClr val="accent1"/>
-          </a:fillRef>
-          <a:effectRef idx="2">
-            <a:schemeClr val="accent1"/>
-          </a:effectRef>
-          <a:fontRef idx="minor">
-            <a:schemeClr val="lt1"/>
-          </a:fontRef>
-        </p:style>
-        <p:txBody>
-          <a:bodyPr rtlCol="0" anchor="ctr" wrap="square" lIns="54864" rIns="54864" tIns="36576" bIns="36576"/>
-          <a:lstStyle/>
-          <a:p>
-            <a:pPr algn="ctr"/>
-            <a:r>
-              <a:rPr sz="850" b="0">
-                <a:solidFill>
-                  <a:srgbClr val="2D2D2D"/>
-                </a:solidFill>
-              </a:rPr>
-              <a:t>SH</a:t>
-            </a:r>
-          </a:p>
-        </p:txBody>
-      </p:sp>
-      <p:sp>
-        <p:nvSpPr>
-          <p:cNvPr id="47" name="Rectangle 46"/>
-          <p:cNvSpPr/>
-          <p:nvPr/>
-        </p:nvSpPr>
-        <p:spPr>
-          <a:xfrm>
-            <a:off x="8778240" y="2633472"/>
-            <a:ext cx="1600200" cy="292608"/>
-          </a:xfrm>
-          <a:prstGeom prst="rect">
-            <a:avLst/>
-          </a:prstGeom>
-          <a:solidFill>
-            <a:srgbClr val="F2F2F2"/>
-          </a:solidFill>
-          <a:ln w="3810">
-            <a:solidFill>
-              <a:srgbClr val="DDDDDD"/>
-            </a:solidFill>
-          </a:ln>
-        </p:spPr>
-        <p:style>
-          <a:lnRef idx="1">
-            <a:schemeClr val="accent1"/>
-          </a:lnRef>
-          <a:fillRef idx="3">
-            <a:schemeClr val="accent1"/>
-          </a:fillRef>
-          <a:effectRef idx="2">
-            <a:schemeClr val="accent1"/>
-          </a:effectRef>
-          <a:fontRef idx="minor">
-            <a:schemeClr val="lt1"/>
-          </a:fontRef>
-        </p:style>
-        <p:txBody>
-          <a:bodyPr rtlCol="0" anchor="ctr" wrap="square" lIns="54864" rIns="54864" tIns="36576" bIns="36576"/>
-          <a:lstStyle/>
-          <a:p>
-            <a:pPr algn="ctr"/>
-            <a:r>
-              <a:rPr sz="850" b="0">
-                <a:solidFill>
-                  <a:srgbClr val="2D2D2D"/>
-                </a:solidFill>
-              </a:rPr>
-              <a:t>0.1 / 2.4 / 1.9</a:t>
-            </a:r>
-          </a:p>
-        </p:txBody>
-      </p:sp>
-      <p:sp>
-        <p:nvSpPr>
-          <p:cNvPr id="48" name="Rectangle 47"/>
-          <p:cNvSpPr/>
-          <p:nvPr/>
-        </p:nvSpPr>
-        <p:spPr>
-          <a:xfrm>
-            <a:off x="10424160" y="2633472"/>
-            <a:ext cx="1645920" cy="292608"/>
-          </a:xfrm>
-          <a:prstGeom prst="rect">
-            <a:avLst/>
-          </a:prstGeom>
-          <a:solidFill>
-            <a:srgbClr val="F2F2F2"/>
-          </a:solidFill>
-          <a:ln w="3810">
-            <a:solidFill>
-              <a:srgbClr val="DDDDDD"/>
-            </a:solidFill>
-          </a:ln>
-        </p:spPr>
-        <p:style>
-          <a:lnRef idx="1">
-            <a:schemeClr val="accent1"/>
-          </a:lnRef>
-          <a:fillRef idx="3">
-            <a:schemeClr val="accent1"/>
-          </a:fillRef>
-          <a:effectRef idx="2">
-            <a:schemeClr val="accent1"/>
-          </a:effectRef>
-          <a:fontRef idx="minor">
-            <a:schemeClr val="lt1"/>
-          </a:fontRef>
-        </p:style>
-        <p:txBody>
-          <a:bodyPr rtlCol="0" anchor="ctr" wrap="square" lIns="54864" rIns="54864" tIns="36576" bIns="36576"/>
-          <a:lstStyle/>
-          <a:p>
-            <a:pPr algn="ctr"/>
-            <a:r>
-              <a:rPr sz="850" b="0">
-                <a:solidFill>
-                  <a:srgbClr val="2D2D2D"/>
-                </a:solidFill>
-              </a:rPr>
-              <a:t>—</a:t>
-            </a:r>
-          </a:p>
-        </p:txBody>
-      </p:sp>
-      <p:sp>
-        <p:nvSpPr>
-          <p:cNvPr id="49" name="Rectangle 48"/>
-          <p:cNvSpPr/>
-          <p:nvPr/>
-        </p:nvSpPr>
-        <p:spPr>
-          <a:xfrm>
-            <a:off x="411480" y="3090672"/>
-            <a:ext cx="1280160" cy="256032"/>
-          </a:xfrm>
-          <a:prstGeom prst="rect">
-            <a:avLst/>
-          </a:prstGeom>
-          <a:solidFill>
-            <a:srgbClr val="2461E5"/>
-          </a:solidFill>
-          <a:ln>
-            <a:solidFill>
-              <a:srgbClr val="2461E5"/>
-            </a:solidFill>
-          </a:ln>
-        </p:spPr>
-        <p:style>
-          <a:lnRef idx="1">
-            <a:schemeClr val="accent1"/>
-          </a:lnRef>
-          <a:fillRef idx="3">
-            <a:schemeClr val="accent1"/>
-          </a:fillRef>
-          <a:effectRef idx="2">
-            <a:schemeClr val="accent1"/>
-          </a:effectRef>
-          <a:fontRef idx="minor">
-            <a:schemeClr val="lt1"/>
-          </a:fontRef>
-        </p:style>
-        <p:txBody>
-          <a:bodyPr rtlCol="0" anchor="ctr" wrap="square" lIns="54864" rIns="54864" tIns="36576" bIns="36576"/>
-          <a:lstStyle/>
-          <a:p>
-            <a:pPr algn="ctr"/>
-            <a:r>
-              <a:rPr sz="800" b="0">
-                <a:solidFill>
-                  <a:srgbClr val="FFFFFF"/>
-                </a:solidFill>
-              </a:rPr>
-              <a:t>Index columns</a:t>
-            </a:r>
-          </a:p>
-        </p:txBody>
-      </p:sp>
-      <p:sp>
-        <p:nvSpPr>
-          <p:cNvPr id="50" name="Rectangle 49"/>
-          <p:cNvSpPr/>
-          <p:nvPr/>
-        </p:nvSpPr>
-        <p:spPr>
-          <a:xfrm>
-            <a:off x="1783080" y="3090672"/>
-            <a:ext cx="1280160" cy="256032"/>
-          </a:xfrm>
-          <a:prstGeom prst="rect">
-            <a:avLst/>
-          </a:prstGeom>
-          <a:solidFill>
-            <a:srgbClr val="107C10"/>
-          </a:solidFill>
-          <a:ln>
-            <a:solidFill>
-              <a:srgbClr val="107C10"/>
-            </a:solidFill>
-          </a:ln>
-        </p:spPr>
-        <p:style>
-          <a:lnRef idx="1">
-            <a:schemeClr val="accent1"/>
-          </a:lnRef>
-          <a:fillRef idx="3">
-            <a:schemeClr val="accent1"/>
-          </a:fillRef>
-          <a:effectRef idx="2">
-            <a:schemeClr val="accent1"/>
-          </a:effectRef>
-          <a:fontRef idx="minor">
-            <a:schemeClr val="lt1"/>
-          </a:fontRef>
-        </p:style>
-        <p:txBody>
-          <a:bodyPr rtlCol="0" anchor="ctr" wrap="square" lIns="54864" rIns="54864" tIns="36576" bIns="36576"/>
-          <a:lstStyle/>
-          <a:p>
-            <a:pPr algn="ctr"/>
-            <a:r>
-              <a:rPr sz="800" b="0">
-                <a:solidFill>
-                  <a:srgbClr val="FFFFFF"/>
-                </a:solidFill>
-              </a:rPr>
-              <a:t>GridStat stats</a:t>
-            </a:r>
-          </a:p>
-        </p:txBody>
-      </p:sp>
-      <p:sp>
-        <p:nvSpPr>
-          <p:cNvPr id="51" name="Rectangle 50"/>
-          <p:cNvSpPr/>
-          <p:nvPr/>
-        </p:nvSpPr>
-        <p:spPr>
-          <a:xfrm>
-            <a:off x="3154680" y="3090672"/>
-            <a:ext cx="1463040" cy="256032"/>
-          </a:xfrm>
-          <a:prstGeom prst="rect">
-            <a:avLst/>
-          </a:prstGeom>
-          <a:solidFill>
-            <a:srgbClr val="CC5000"/>
-          </a:solidFill>
-          <a:ln>
-            <a:solidFill>
-              <a:srgbClr val="CC5000"/>
-            </a:solidFill>
-          </a:ln>
-        </p:spPr>
-        <p:style>
-          <a:lnRef idx="1">
-            <a:schemeClr val="accent1"/>
-          </a:lnRef>
-          <a:fillRef idx="3">
-            <a:schemeClr val="accent1"/>
-          </a:fillRef>
-          <a:effectRef idx="2">
-            <a:schemeClr val="accent1"/>
-          </a:effectRef>
-          <a:fontRef idx="minor">
-            <a:schemeClr val="lt1"/>
-          </a:fontRef>
-        </p:style>
-        <p:txBody>
-          <a:bodyPr rtlCol="0" anchor="ctr" wrap="square" lIns="54864" rIns="54864" tIns="36576" bIns="36576"/>
-          <a:lstStyle/>
-          <a:p>
-            <a:pPr algn="ctr"/>
-            <a:r>
-              <a:rPr sz="800" b="0">
-                <a:solidFill>
-                  <a:srgbClr val="FFFFFF"/>
-                </a:solidFill>
-              </a:rPr>
-              <a:t>EnsembleStat stats</a:t>
-            </a:r>
-          </a:p>
-        </p:txBody>
-      </p:sp>
-      <p:sp>
-        <p:nvSpPr>
-          <p:cNvPr id="52" name="TextBox 51"/>
-          <p:cNvSpPr txBox="1"/>
-          <p:nvPr/>
-        </p:nvSpPr>
-        <p:spPr>
-          <a:xfrm>
-            <a:off x="411480" y="3438144"/>
-            <a:ext cx="11430000" cy="365760"/>
-          </a:xfrm>
-          <a:prstGeom prst="rect">
-            <a:avLst/>
-          </a:prstGeom>
-          <a:noFill/>
-        </p:spPr>
-        <p:txBody>
-          <a:bodyPr wrap="square">
-            <a:spAutoFit/>
-          </a:bodyPr>
-          <a:lstStyle/>
-          <a:p>
-            <a:pPr algn="l"/>
-            <a:r>
-              <a:rPr sz="900" b="0">
-                <a:solidFill>
-                  <a:srgbClr val="606060"/>
-                </a:solidFill>
-              </a:rPr>
-              <a:t>Constant columns (model, variable, units, obs type) are stripped from rows and embedded as file-level Parquet metadata.</a:t>
+              <a:rPr sz="950" b="0">
+                <a:solidFill>
+                  <a:srgbClr val="6E6E78"/>
+                </a:solidFill>
+              </a:rPr>
+              <a:t>Re-running is safe - already-loaded init dates are skipped per PARAMETER and STAT_TYPE</a:t>
             </a:r>
           </a:p>
         </p:txBody>
@@ -9464,89 +7469,14 @@
       <p:grpSpPr/>
       <p:sp>
         <p:nvSpPr>
-          <p:cNvPr id="2" name="Picture Placeholder 1"/>
-          <p:cNvSpPr>
-            <a:spLocks noGrp="1"/>
-          </p:cNvSpPr>
-          <p:nvPr>
-            <p:ph type="pic" idx="11" sz="quarter"/>
-          </p:nvPr>
-        </p:nvSpPr>
-        <p:spPr/>
-      </p:sp>
-      <p:sp>
-        <p:nvSpPr>
-          <p:cNvPr id="3" name="Picture Placeholder 2"/>
-          <p:cNvSpPr>
-            <a:spLocks noGrp="1"/>
-          </p:cNvSpPr>
-          <p:nvPr>
-            <p:ph type="pic" idx="12" sz="quarter"/>
-          </p:nvPr>
-        </p:nvSpPr>
-        <p:spPr/>
-      </p:sp>
-      <p:sp>
-        <p:nvSpPr>
-          <p:cNvPr id="4" name="Text Placeholder 3"/>
-          <p:cNvSpPr>
-            <a:spLocks noGrp="1"/>
-          </p:cNvSpPr>
-          <p:nvPr>
-            <p:ph type="body" idx="10" sz="quarter"/>
-          </p:nvPr>
-        </p:nvSpPr>
-        <p:spPr/>
-        <p:txBody>
-          <a:bodyPr/>
-          <a:lstStyle/>
-          <a:p/>
-        </p:txBody>
-      </p:sp>
-      <p:sp>
-        <p:nvSpPr>
-          <p:cNvPr id="5" name="Text Placeholder 4"/>
-          <p:cNvSpPr>
-            <a:spLocks noGrp="1"/>
-          </p:cNvSpPr>
-          <p:nvPr>
-            <p:ph type="body" idx="13" sz="quarter"/>
-          </p:nvPr>
-        </p:nvSpPr>
-        <p:spPr/>
-        <p:txBody>
-          <a:bodyPr/>
-          <a:lstStyle/>
-          <a:p/>
-        </p:txBody>
-      </p:sp>
-      <p:sp>
-        <p:nvSpPr>
-          <p:cNvPr id="6" name="Title 5"/>
-          <p:cNvSpPr>
-            <a:spLocks noGrp="1"/>
-          </p:cNvSpPr>
-          <p:nvPr>
-            <p:ph type="title"/>
-          </p:nvPr>
-        </p:nvSpPr>
-        <p:spPr/>
-        <p:txBody>
-          <a:bodyPr/>
-          <a:lstStyle/>
-          <a:p/>
-        </p:txBody>
-      </p:sp>
-      <p:sp>
-        <p:nvSpPr>
-          <p:cNvPr id="7" name="TextBox 6"/>
+          <p:cNvPr id="2" name="TextBox 1"/>
           <p:cNvSpPr txBox="1"/>
           <p:nvPr/>
         </p:nvSpPr>
         <p:spPr>
           <a:xfrm>
-            <a:off x="512064" y="429768"/>
-            <a:ext cx="11430000" cy="502920"/>
+            <a:off x="411480" y="182880"/>
+            <a:ext cx="11338560" cy="475488"/>
           </a:xfrm>
           <a:prstGeom prst="rect">
             <a:avLst/>
@@ -9560,37 +7490,35 @@
           <a:lstStyle/>
           <a:p>
             <a:r>
-              <a:rPr b="1" sz="2400">
+              <a:rPr b="1" sz="2200">
                 <a:solidFill>
                   <a:srgbClr val="2461E5"/>
                 </a:solidFill>
               </a:rPr>
-              <a:t>How We Can Use the Data</a:t>
-            </a:r>
-          </a:p>
-        </p:txBody>
-      </p:sp>
-      <p:sp>
-        <p:nvSpPr>
-          <p:cNvPr id="8" name="Rectangle 7"/>
+              <a:t>What the Outputs Look Like: Parquet Schema</a:t>
+            </a:r>
+          </a:p>
+        </p:txBody>
+      </p:sp>
+      <p:sp>
+        <p:nvSpPr>
+          <p:cNvPr id="3" name="Rectangle 2"/>
           <p:cNvSpPr/>
           <p:nvPr/>
         </p:nvSpPr>
         <p:spPr>
           <a:xfrm>
-            <a:off x="411480" y="1051560"/>
-            <a:ext cx="2103120" cy="502920"/>
+            <a:off x="411480" y="694944"/>
+            <a:ext cx="11338560" cy="20116"/>
           </a:xfrm>
           <a:prstGeom prst="rect">
             <a:avLst/>
           </a:prstGeom>
           <a:solidFill>
-            <a:srgbClr val="EBF3FF"/>
+            <a:srgbClr val="2461E5"/>
           </a:solidFill>
-          <a:ln w="12700">
-            <a:solidFill>
-              <a:srgbClr val="2461E5"/>
-            </a:solidFill>
+          <a:ln>
+            <a:noFill/>
           </a:ln>
         </p:spPr>
         <p:style>
@@ -9608,32 +7536,23 @@
           </a:fontRef>
         </p:style>
         <p:txBody>
-          <a:bodyPr rtlCol="0" anchor="ctr" wrap="square" lIns="54864" rIns="54864" tIns="36576" bIns="36576"/>
+          <a:bodyPr rtlCol="0" anchor="ctr"/>
           <a:lstStyle/>
           <a:p>
             <a:pPr algn="ctr"/>
-            <a:r>
-              <a:rPr sz="1100" b="1">
-                <a:solidFill>
-                  <a:srgbClr val="2461E5"/>
-                </a:solidFill>
-              </a:rPr>
-              <a:t>Single Model
-Exploration</a:t>
-            </a:r>
-          </a:p>
-        </p:txBody>
-      </p:sp>
-      <p:sp>
-        <p:nvSpPr>
-          <p:cNvPr id="9" name="TextBox 8"/>
+          </a:p>
+        </p:txBody>
+      </p:sp>
+      <p:sp>
+        <p:nvSpPr>
+          <p:cNvPr id="4" name="TextBox 3"/>
           <p:cNvSpPr txBox="1"/>
           <p:nvPr/>
         </p:nvSpPr>
         <p:spPr>
           <a:xfrm>
-            <a:off x="411480" y="1618488"/>
-            <a:ext cx="2286000" cy="1005840"/>
+            <a:off x="411480" y="841248"/>
+            <a:ext cx="11338560" cy="347472"/>
           </a:xfrm>
           <a:prstGeom prst="rect">
             <a:avLst/>
@@ -9648,59 +7567,35 @@
           <a:p>
             <a:pPr algn="l"/>
             <a:r>
-              <a:rPr sz="1000" b="0">
-                <a:solidFill>
-                  <a:srgbClr val="2D2D2D"/>
-                </a:solidFill>
-              </a:rPr>
-              <a:t>Load one model's file, filter to a</a:t>
-            </a:r>
-          </a:p>
-          <a:p>
-            <a:pPr algn="l"/>
-            <a:r>
-              <a:rPr sz="1000" b="0">
-                <a:solidFill>
-                  <a:srgbClr val="2D2D2D"/>
-                </a:solidFill>
-              </a:rPr>
-              <a:t>parameter, level and domain, and</a:t>
-            </a:r>
-          </a:p>
-          <a:p>
-            <a:pPr algn="l"/>
-            <a:r>
-              <a:rPr sz="1000" b="0">
-                <a:solidFill>
-                  <a:srgbClr val="2D2D2D"/>
-                </a:solidFill>
-              </a:rPr>
-              <a:t>plot any metric by lead time.</a:t>
-            </a:r>
-          </a:p>
-        </p:txBody>
-      </p:sp>
-      <p:sp>
-        <p:nvSpPr>
-          <p:cNvPr id="10" name="Rectangle 9"/>
+              <a:rPr sz="1050" b="0">
+                <a:solidFill>
+                  <a:srgbClr val="1C1C28"/>
+                </a:solidFill>
+              </a:rPr>
+              <a:t>Each row = one unique combination of init date, lead time, pressure level, domain, parameter, and stat type.</a:t>
+            </a:r>
+          </a:p>
+        </p:txBody>
+      </p:sp>
+      <p:sp>
+        <p:nvSpPr>
+          <p:cNvPr id="5" name="Rectangle 4"/>
           <p:cNvSpPr/>
           <p:nvPr/>
         </p:nvSpPr>
         <p:spPr>
           <a:xfrm>
-            <a:off x="411480" y="2788920"/>
-            <a:ext cx="2103120" cy="502920"/>
+            <a:off x="411480" y="1417320"/>
+            <a:ext cx="1508760" cy="292608"/>
           </a:xfrm>
           <a:prstGeom prst="rect">
             <a:avLst/>
           </a:prstGeom>
           <a:solidFill>
-            <a:srgbClr val="EBF3FF"/>
+            <a:srgbClr val="2461E5"/>
           </a:solidFill>
-          <a:ln w="12700">
-            <a:solidFill>
-              <a:srgbClr val="2461E5"/>
-            </a:solidFill>
+          <a:ln>
+            <a:noFill/>
           </a:ln>
         </p:spPr>
         <p:style>
@@ -9718,99 +7613,40 @@
           </a:fontRef>
         </p:style>
         <p:txBody>
-          <a:bodyPr rtlCol="0" anchor="ctr" wrap="square" lIns="54864" rIns="54864" tIns="36576" bIns="36576"/>
+          <a:bodyPr rtlCol="0" anchor="ctr" wrap="square" lIns="73152" rIns="73152" tIns="36576" bIns="36576"/>
           <a:lstStyle/>
           <a:p>
             <a:pPr algn="ctr"/>
             <a:r>
-              <a:rPr sz="1100" b="1">
-                <a:solidFill>
-                  <a:srgbClr val="2461E5"/>
-                </a:solidFill>
-              </a:rPr>
-              <a:t>Cross-Model
-Comparison</a:t>
-            </a:r>
-          </a:p>
-        </p:txBody>
-      </p:sp>
-      <p:sp>
-        <p:nvSpPr>
-          <p:cNvPr id="11" name="TextBox 10"/>
-          <p:cNvSpPr txBox="1"/>
-          <p:nvPr/>
-        </p:nvSpPr>
-        <p:spPr>
-          <a:xfrm>
-            <a:off x="411480" y="3355848"/>
-            <a:ext cx="2286000" cy="1005840"/>
-          </a:xfrm>
-          <a:prstGeom prst="rect">
-            <a:avLst/>
-          </a:prstGeom>
-          <a:noFill/>
-        </p:spPr>
-        <p:txBody>
-          <a:bodyPr wrap="square">
-            <a:spAutoFit/>
-          </a:bodyPr>
-          <a:lstStyle/>
-          <a:p>
-            <a:pPr algn="l"/>
-            <a:r>
-              <a:rPr sz="1000" b="0">
-                <a:solidFill>
-                  <a:srgbClr val="2D2D2D"/>
-                </a:solidFill>
-              </a:rPr>
-              <a:t>Load two files side-by-side, filter</a:t>
-            </a:r>
-          </a:p>
-          <a:p>
-            <a:pPr algn="l"/>
-            <a:r>
-              <a:rPr sz="1000" b="0">
-                <a:solidFill>
-                  <a:srgbClr val="2D2D2D"/>
-                </a:solidFill>
-              </a:rPr>
-              <a:t>to the same parameter and domain,</a:t>
-            </a:r>
-          </a:p>
-          <a:p>
-            <a:pPr algn="l"/>
-            <a:r>
-              <a:rPr sz="1000" b="0">
-                <a:solidFill>
-                  <a:srgbClr val="2D2D2D"/>
-                </a:solidFill>
-              </a:rPr>
-              <a:t>and compare RMSE or bias.</a:t>
-            </a:r>
-          </a:p>
-        </p:txBody>
-      </p:sp>
-      <p:sp>
-        <p:nvSpPr>
-          <p:cNvPr id="12" name="Rectangle 11"/>
+              <a:rPr sz="850" b="1">
+                <a:solidFill>
+                  <a:srgbClr val="FFFFFF"/>
+                </a:solidFill>
+              </a:rPr>
+              <a:t>PARAMETER</a:t>
+            </a:r>
+          </a:p>
+        </p:txBody>
+      </p:sp>
+      <p:sp>
+        <p:nvSpPr>
+          <p:cNvPr id="6" name="Rectangle 5"/>
           <p:cNvSpPr/>
           <p:nvPr/>
         </p:nvSpPr>
         <p:spPr>
           <a:xfrm>
-            <a:off x="411480" y="4526279"/>
-            <a:ext cx="2103120" cy="502920"/>
+            <a:off x="1965960" y="1417320"/>
+            <a:ext cx="1417320" cy="292608"/>
           </a:xfrm>
           <a:prstGeom prst="rect">
             <a:avLst/>
           </a:prstGeom>
           <a:solidFill>
-            <a:srgbClr val="FEF0E7"/>
+            <a:srgbClr val="2461E5"/>
           </a:solidFill>
-          <a:ln w="12700">
-            <a:solidFill>
-              <a:srgbClr val="CC5000"/>
-            </a:solidFill>
+          <a:ln>
+            <a:noFill/>
           </a:ln>
         </p:spPr>
         <p:style>
@@ -9828,99 +7664,40 @@
           </a:fontRef>
         </p:style>
         <p:txBody>
-          <a:bodyPr rtlCol="0" anchor="ctr" wrap="square" lIns="54864" rIns="54864" tIns="36576" bIns="36576"/>
+          <a:bodyPr rtlCol="0" anchor="ctr" wrap="square" lIns="73152" rIns="73152" tIns="36576" bIns="36576"/>
           <a:lstStyle/>
           <a:p>
             <a:pPr algn="ctr"/>
             <a:r>
-              <a:rPr sz="1100" b="1">
-                <a:solidFill>
-                  <a:srgbClr val="CC5000"/>
-                </a:solidFill>
-              </a:rPr>
-              <a:t>Ensemble
-Diagnostics</a:t>
-            </a:r>
-          </a:p>
-        </p:txBody>
-      </p:sp>
-      <p:sp>
-        <p:nvSpPr>
-          <p:cNvPr id="13" name="TextBox 12"/>
-          <p:cNvSpPr txBox="1"/>
-          <p:nvPr/>
-        </p:nvSpPr>
-        <p:spPr>
-          <a:xfrm>
-            <a:off x="411480" y="5093207"/>
-            <a:ext cx="2286000" cy="1005840"/>
-          </a:xfrm>
-          <a:prstGeom prst="rect">
-            <a:avLst/>
-          </a:prstGeom>
-          <a:noFill/>
-        </p:spPr>
-        <p:txBody>
-          <a:bodyPr wrap="square">
-            <a:spAutoFit/>
-          </a:bodyPr>
-          <a:lstStyle/>
-          <a:p>
-            <a:pPr algn="l"/>
-            <a:r>
-              <a:rPr sz="1000" b="0">
-                <a:solidFill>
-                  <a:srgbClr val="2D2D2D"/>
-                </a:solidFill>
-              </a:rPr>
-              <a:t>Filter STAT_TYPE = EnsembleStat</a:t>
-            </a:r>
-          </a:p>
-          <a:p>
-            <a:pPr algn="l"/>
-            <a:r>
-              <a:rPr sz="1000" b="0">
-                <a:solidFill>
-                  <a:srgbClr val="2D2D2D"/>
-                </a:solidFill>
-              </a:rPr>
-              <a:t>to access CRPS and Spread.</a:t>
-            </a:r>
-          </a:p>
-          <a:p>
-            <a:pPr algn="l"/>
-            <a:r>
-              <a:rPr sz="1000" b="0">
-                <a:solidFill>
-                  <a:srgbClr val="2D2D2D"/>
-                </a:solidFill>
-              </a:rPr>
-              <a:t>Check Spread ≈ RMSE for calibration.</a:t>
-            </a:r>
-          </a:p>
-        </p:txBody>
-      </p:sp>
-      <p:sp>
-        <p:nvSpPr>
-          <p:cNvPr id="14" name="Rectangle 13"/>
+              <a:rPr sz="850" b="1">
+                <a:solidFill>
+                  <a:srgbClr val="FFFFFF"/>
+                </a:solidFill>
+              </a:rPr>
+              <a:t>STAT_TYPE</a:t>
+            </a:r>
+          </a:p>
+        </p:txBody>
+      </p:sp>
+      <p:sp>
+        <p:nvSpPr>
+          <p:cNvPr id="7" name="Rectangle 6"/>
           <p:cNvSpPr/>
           <p:nvPr/>
         </p:nvSpPr>
         <p:spPr>
           <a:xfrm>
-            <a:off x="2834640" y="1005840"/>
-            <a:ext cx="9235440" cy="5029200"/>
+            <a:off x="3429000" y="1417320"/>
+            <a:ext cx="1417320" cy="292608"/>
           </a:xfrm>
           <a:prstGeom prst="rect">
             <a:avLst/>
           </a:prstGeom>
           <a:solidFill>
-            <a:srgbClr val="1E1E2E"/>
+            <a:srgbClr val="2461E5"/>
           </a:solidFill>
-          <a:ln w="6350">
-            <a:solidFill>
-              <a:srgbClr val="444466"/>
-            </a:solidFill>
+          <a:ln>
+            <a:noFill/>
           </a:ln>
         </p:spPr>
         <p:style>
@@ -9938,197 +7715,2155 @@
           </a:fontRef>
         </p:style>
         <p:txBody>
-          <a:bodyPr rtlCol="0" anchor="ctr" wrap="none" lIns="164592" tIns="109728" bIns="73152"/>
+          <a:bodyPr rtlCol="0" anchor="ctr" wrap="square" lIns="73152" rIns="73152" tIns="36576" bIns="36576"/>
           <a:lstStyle/>
           <a:p>
             <a:pPr algn="ctr"/>
             <a:r>
-              <a:rPr sz="950">
-                <a:solidFill>
-                  <a:srgbClr val="569CD6"/>
-                </a:solidFill>
-              </a:rPr>
-              <a:t>import pyarrow.parquet as pq</a:t>
-            </a:r>
-          </a:p>
-          <a:p>
-            <a:r>
-              <a:rPr sz="950">
-                <a:solidFill>
-                  <a:srgbClr val="CED1D8"/>
-                </a:solidFill>
-              </a:rPr>
-              <a:t/>
-            </a:r>
-          </a:p>
-          <a:p>
-            <a:r>
-              <a:rPr sz="950">
-                <a:solidFill>
-                  <a:srgbClr val="6A9955"/>
-                </a:solidFill>
-              </a:rPr>
-              <a:t># Load a model dataset</a:t>
-            </a:r>
-          </a:p>
-          <a:p>
-            <a:r>
-              <a:rPr sz="950">
-                <a:solidFill>
-                  <a:srgbClr val="CED1D8"/>
-                </a:solidFill>
-              </a:rPr>
-              <a:t>g4 = pq.read_table(</a:t>
-            </a:r>
-          </a:p>
-          <a:p>
-            <a:r>
-              <a:rPr sz="950">
-                <a:solidFill>
-                  <a:srgbClr val="CE9178"/>
-                </a:solidFill>
-              </a:rPr>
-              <a:t>    'AGlobal4_Analysis.parquet'</a:t>
-            </a:r>
-          </a:p>
-          <a:p>
-            <a:r>
-              <a:rPr sz="950">
-                <a:solidFill>
-                  <a:srgbClr val="CED1D8"/>
-                </a:solidFill>
-              </a:rPr>
-              <a:t>).to_pandas()</a:t>
-            </a:r>
-          </a:p>
-          <a:p>
-            <a:r>
-              <a:rPr sz="950">
-                <a:solidFill>
-                  <a:srgbClr val="CED1D8"/>
-                </a:solidFill>
-              </a:rPr>
-              <a:t/>
-            </a:r>
-          </a:p>
-          <a:p>
-            <a:r>
-              <a:rPr sz="950">
-                <a:solidFill>
-                  <a:srgbClr val="6A9955"/>
-                </a:solidFill>
-              </a:rPr>
-              <a:t># Filter to one parameter</a:t>
-            </a:r>
-          </a:p>
-          <a:p>
-            <a:r>
-              <a:rPr sz="950">
-                <a:solidFill>
-                  <a:srgbClr val="CED1D8"/>
-                </a:solidFill>
-              </a:rPr>
-              <a:t>t = g4[g4['PARAMETER'] == 'T_AllLevels']</a:t>
-            </a:r>
-          </a:p>
-          <a:p>
-            <a:r>
-              <a:rPr sz="950">
-                <a:solidFill>
-                  <a:srgbClr val="CED1D8"/>
-                </a:solidFill>
-              </a:rPr>
-              <a:t/>
-            </a:r>
-          </a:p>
-          <a:p>
-            <a:r>
-              <a:rPr sz="950">
-                <a:solidFill>
-                  <a:srgbClr val="6A9955"/>
-                </a:solidFill>
-              </a:rPr>
-              <a:t># Cross-model comparison</a:t>
-            </a:r>
-          </a:p>
-          <a:p>
-            <a:r>
-              <a:rPr sz="950">
-                <a:solidFill>
-                  <a:srgbClr val="CED1D8"/>
-                </a:solidFill>
-              </a:rPr>
-              <a:t>g4e = pq.read_table(</a:t>
-            </a:r>
-          </a:p>
-          <a:p>
-            <a:r>
-              <a:rPr sz="950">
-                <a:solidFill>
-                  <a:srgbClr val="CE9178"/>
-                </a:solidFill>
-              </a:rPr>
-              <a:t>    'AGlobal4E_Analysis.parquet',</a:t>
-            </a:r>
-          </a:p>
-          <a:p>
-            <a:r>
-              <a:rPr sz="950">
-                <a:solidFill>
-                  <a:srgbClr val="CED1D8"/>
-                </a:solidFill>
-              </a:rPr>
-              <a:t>    filters=[('PARAMETER','=','MSLP')]</a:t>
-            </a:r>
-          </a:p>
-          <a:p>
-            <a:r>
-              <a:rPr sz="950">
-                <a:solidFill>
-                  <a:srgbClr val="CED1D8"/>
-                </a:solidFill>
-              </a:rPr>
-              <a:t>).to_pandas()</a:t>
-            </a:r>
-          </a:p>
-          <a:p>
-            <a:r>
-              <a:rPr sz="950">
-                <a:solidFill>
-                  <a:srgbClr val="CED1D8"/>
-                </a:solidFill>
-              </a:rPr>
-              <a:t/>
-            </a:r>
-          </a:p>
-          <a:p>
-            <a:r>
-              <a:rPr sz="950">
-                <a:solidFill>
-                  <a:srgbClr val="6A9955"/>
-                </a:solidFill>
-              </a:rPr>
-              <a:t># Ensemble stats only</a:t>
-            </a:r>
-          </a:p>
-          <a:p>
-            <a:r>
-              <a:rPr sz="950">
-                <a:solidFill>
-                  <a:srgbClr val="CED1D8"/>
-                </a:solidFill>
-              </a:rPr>
-              <a:t>ens = g4e[</a:t>
-            </a:r>
-          </a:p>
-          <a:p>
-            <a:r>
-              <a:rPr sz="950">
-                <a:solidFill>
-                  <a:srgbClr val="CED1D8"/>
-                </a:solidFill>
-              </a:rPr>
-              <a:t>    g4e['STAT_TYPE'] == 'EnsembleStat']</a:t>
+              <a:rPr sz="850" b="1">
+                <a:solidFill>
+                  <a:srgbClr val="FFFFFF"/>
+                </a:solidFill>
+              </a:rPr>
+              <a:t>INIT_DATE</a:t>
+            </a:r>
+          </a:p>
+        </p:txBody>
+      </p:sp>
+      <p:sp>
+        <p:nvSpPr>
+          <p:cNvPr id="8" name="Rectangle 7"/>
+          <p:cNvSpPr/>
+          <p:nvPr/>
+        </p:nvSpPr>
+        <p:spPr>
+          <a:xfrm>
+            <a:off x="4892040" y="1417320"/>
+            <a:ext cx="1280160" cy="292608"/>
+          </a:xfrm>
+          <a:prstGeom prst="rect">
+            <a:avLst/>
+          </a:prstGeom>
+          <a:solidFill>
+            <a:srgbClr val="2461E5"/>
+          </a:solidFill>
+          <a:ln>
+            <a:noFill/>
+          </a:ln>
+        </p:spPr>
+        <p:style>
+          <a:lnRef idx="1">
+            <a:schemeClr val="accent1"/>
+          </a:lnRef>
+          <a:fillRef idx="3">
+            <a:schemeClr val="accent1"/>
+          </a:fillRef>
+          <a:effectRef idx="2">
+            <a:schemeClr val="accent1"/>
+          </a:effectRef>
+          <a:fontRef idx="minor">
+            <a:schemeClr val="lt1"/>
+          </a:fontRef>
+        </p:style>
+        <p:txBody>
+          <a:bodyPr rtlCol="0" anchor="ctr" wrap="square" lIns="73152" rIns="73152" tIns="36576" bIns="36576"/>
+          <a:lstStyle/>
+          <a:p>
+            <a:pPr algn="ctr"/>
+            <a:r>
+              <a:rPr sz="850" b="1">
+                <a:solidFill>
+                  <a:srgbClr val="FFFFFF"/>
+                </a:solidFill>
+              </a:rPr>
+              <a:t>FCST_LEAD_H</a:t>
+            </a:r>
+          </a:p>
+        </p:txBody>
+      </p:sp>
+      <p:sp>
+        <p:nvSpPr>
+          <p:cNvPr id="9" name="Rectangle 8"/>
+          <p:cNvSpPr/>
+          <p:nvPr/>
+        </p:nvSpPr>
+        <p:spPr>
+          <a:xfrm>
+            <a:off x="6217920" y="1417320"/>
+            <a:ext cx="1234440" cy="292608"/>
+          </a:xfrm>
+          <a:prstGeom prst="rect">
+            <a:avLst/>
+          </a:prstGeom>
+          <a:solidFill>
+            <a:srgbClr val="2461E5"/>
+          </a:solidFill>
+          <a:ln>
+            <a:noFill/>
+          </a:ln>
+        </p:spPr>
+        <p:style>
+          <a:lnRef idx="1">
+            <a:schemeClr val="accent1"/>
+          </a:lnRef>
+          <a:fillRef idx="3">
+            <a:schemeClr val="accent1"/>
+          </a:fillRef>
+          <a:effectRef idx="2">
+            <a:schemeClr val="accent1"/>
+          </a:effectRef>
+          <a:fontRef idx="minor">
+            <a:schemeClr val="lt1"/>
+          </a:fontRef>
+        </p:style>
+        <p:txBody>
+          <a:bodyPr rtlCol="0" anchor="ctr" wrap="square" lIns="73152" rIns="73152" tIns="36576" bIns="36576"/>
+          <a:lstStyle/>
+          <a:p>
+            <a:pPr algn="ctr"/>
+            <a:r>
+              <a:rPr sz="850" b="1">
+                <a:solidFill>
+                  <a:srgbClr val="FFFFFF"/>
+                </a:solidFill>
+              </a:rPr>
+              <a:t>FCST_LEV</a:t>
+            </a:r>
+          </a:p>
+        </p:txBody>
+      </p:sp>
+      <p:sp>
+        <p:nvSpPr>
+          <p:cNvPr id="10" name="Rectangle 9"/>
+          <p:cNvSpPr/>
+          <p:nvPr/>
+        </p:nvSpPr>
+        <p:spPr>
+          <a:xfrm>
+            <a:off x="7498079" y="1417320"/>
+            <a:ext cx="1234440" cy="292608"/>
+          </a:xfrm>
+          <a:prstGeom prst="rect">
+            <a:avLst/>
+          </a:prstGeom>
+          <a:solidFill>
+            <a:srgbClr val="2461E5"/>
+          </a:solidFill>
+          <a:ln>
+            <a:noFill/>
+          </a:ln>
+        </p:spPr>
+        <p:style>
+          <a:lnRef idx="1">
+            <a:schemeClr val="accent1"/>
+          </a:lnRef>
+          <a:fillRef idx="3">
+            <a:schemeClr val="accent1"/>
+          </a:fillRef>
+          <a:effectRef idx="2">
+            <a:schemeClr val="accent1"/>
+          </a:effectRef>
+          <a:fontRef idx="minor">
+            <a:schemeClr val="lt1"/>
+          </a:fontRef>
+        </p:style>
+        <p:txBody>
+          <a:bodyPr rtlCol="0" anchor="ctr" wrap="square" lIns="73152" rIns="73152" tIns="36576" bIns="36576"/>
+          <a:lstStyle/>
+          <a:p>
+            <a:pPr algn="ctr"/>
+            <a:r>
+              <a:rPr sz="850" b="1">
+                <a:solidFill>
+                  <a:srgbClr val="FFFFFF"/>
+                </a:solidFill>
+              </a:rPr>
+              <a:t>VX_MASK</a:t>
+            </a:r>
+          </a:p>
+        </p:txBody>
+      </p:sp>
+      <p:sp>
+        <p:nvSpPr>
+          <p:cNvPr id="11" name="Rectangle 10"/>
+          <p:cNvSpPr/>
+          <p:nvPr/>
+        </p:nvSpPr>
+        <p:spPr>
+          <a:xfrm>
+            <a:off x="8778240" y="1417320"/>
+            <a:ext cx="1600200" cy="292608"/>
+          </a:xfrm>
+          <a:prstGeom prst="rect">
+            <a:avLst/>
+          </a:prstGeom>
+          <a:solidFill>
+            <a:srgbClr val="107C10"/>
+          </a:solidFill>
+          <a:ln>
+            <a:noFill/>
+          </a:ln>
+        </p:spPr>
+        <p:style>
+          <a:lnRef idx="1">
+            <a:schemeClr val="accent1"/>
+          </a:lnRef>
+          <a:fillRef idx="3">
+            <a:schemeClr val="accent1"/>
+          </a:fillRef>
+          <a:effectRef idx="2">
+            <a:schemeClr val="accent1"/>
+          </a:effectRef>
+          <a:fontRef idx="minor">
+            <a:schemeClr val="lt1"/>
+          </a:fontRef>
+        </p:style>
+        <p:txBody>
+          <a:bodyPr rtlCol="0" anchor="ctr" wrap="square" lIns="73152" rIns="73152" tIns="36576" bIns="36576"/>
+          <a:lstStyle/>
+          <a:p>
+            <a:pPr algn="ctr"/>
+            <a:r>
+              <a:rPr sz="850" b="1">
+                <a:solidFill>
+                  <a:srgbClr val="FFFFFF"/>
+                </a:solidFill>
+              </a:rPr>
+              <a:t>ME / RMSE / MAE</a:t>
+            </a:r>
+          </a:p>
+        </p:txBody>
+      </p:sp>
+      <p:sp>
+        <p:nvSpPr>
+          <p:cNvPr id="12" name="Rectangle 11"/>
+          <p:cNvSpPr/>
+          <p:nvPr/>
+        </p:nvSpPr>
+        <p:spPr>
+          <a:xfrm>
+            <a:off x="10424160" y="1417320"/>
+            <a:ext cx="1645920" cy="292608"/>
+          </a:xfrm>
+          <a:prstGeom prst="rect">
+            <a:avLst/>
+          </a:prstGeom>
+          <a:solidFill>
+            <a:srgbClr val="C04800"/>
+          </a:solidFill>
+          <a:ln>
+            <a:noFill/>
+          </a:ln>
+        </p:spPr>
+        <p:style>
+          <a:lnRef idx="1">
+            <a:schemeClr val="accent1"/>
+          </a:lnRef>
+          <a:fillRef idx="3">
+            <a:schemeClr val="accent1"/>
+          </a:fillRef>
+          <a:effectRef idx="2">
+            <a:schemeClr val="accent1"/>
+          </a:effectRef>
+          <a:fontRef idx="minor">
+            <a:schemeClr val="lt1"/>
+          </a:fontRef>
+        </p:style>
+        <p:txBody>
+          <a:bodyPr rtlCol="0" anchor="ctr" wrap="square" lIns="73152" rIns="73152" tIns="36576" bIns="36576"/>
+          <a:lstStyle/>
+          <a:p>
+            <a:pPr algn="ctr"/>
+            <a:r>
+              <a:rPr sz="850" b="1">
+                <a:solidFill>
+                  <a:srgbClr val="FFFFFF"/>
+                </a:solidFill>
+              </a:rPr>
+              <a:t>CRPS / SPREAD</a:t>
+            </a:r>
+          </a:p>
+        </p:txBody>
+      </p:sp>
+      <p:sp>
+        <p:nvSpPr>
+          <p:cNvPr id="13" name="Rectangle 12"/>
+          <p:cNvSpPr/>
+          <p:nvPr/>
+        </p:nvSpPr>
+        <p:spPr>
+          <a:xfrm>
+            <a:off x="411480" y="1709928"/>
+            <a:ext cx="1508760" cy="292608"/>
+          </a:xfrm>
+          <a:prstGeom prst="rect">
+            <a:avLst/>
+          </a:prstGeom>
+          <a:solidFill>
+            <a:srgbClr val="FFFFFF"/>
+          </a:solidFill>
+          <a:ln w="3810">
+            <a:solidFill>
+              <a:srgbClr val="DDDDDD"/>
+            </a:solidFill>
+          </a:ln>
+        </p:spPr>
+        <p:style>
+          <a:lnRef idx="1">
+            <a:schemeClr val="accent1"/>
+          </a:lnRef>
+          <a:fillRef idx="3">
+            <a:schemeClr val="accent1"/>
+          </a:fillRef>
+          <a:effectRef idx="2">
+            <a:schemeClr val="accent1"/>
+          </a:effectRef>
+          <a:fontRef idx="minor">
+            <a:schemeClr val="lt1"/>
+          </a:fontRef>
+        </p:style>
+        <p:txBody>
+          <a:bodyPr rtlCol="0" anchor="ctr" wrap="square" lIns="73152" rIns="73152" tIns="36576" bIns="36576"/>
+          <a:lstStyle/>
+          <a:p>
+            <a:pPr algn="ctr"/>
+            <a:r>
+              <a:rPr sz="850" b="0">
+                <a:solidFill>
+                  <a:srgbClr val="1C1C28"/>
+                </a:solidFill>
+              </a:rPr>
+              <a:t>T_AllLevels</a:t>
+            </a:r>
+          </a:p>
+        </p:txBody>
+      </p:sp>
+      <p:sp>
+        <p:nvSpPr>
+          <p:cNvPr id="14" name="Rectangle 13"/>
+          <p:cNvSpPr/>
+          <p:nvPr/>
+        </p:nvSpPr>
+        <p:spPr>
+          <a:xfrm>
+            <a:off x="1965960" y="1709928"/>
+            <a:ext cx="1417320" cy="292608"/>
+          </a:xfrm>
+          <a:prstGeom prst="rect">
+            <a:avLst/>
+          </a:prstGeom>
+          <a:solidFill>
+            <a:srgbClr val="E6F5E6"/>
+          </a:solidFill>
+          <a:ln w="3810">
+            <a:solidFill>
+              <a:srgbClr val="DDDDDD"/>
+            </a:solidFill>
+          </a:ln>
+        </p:spPr>
+        <p:style>
+          <a:lnRef idx="1">
+            <a:schemeClr val="accent1"/>
+          </a:lnRef>
+          <a:fillRef idx="3">
+            <a:schemeClr val="accent1"/>
+          </a:fillRef>
+          <a:effectRef idx="2">
+            <a:schemeClr val="accent1"/>
+          </a:effectRef>
+          <a:fontRef idx="minor">
+            <a:schemeClr val="lt1"/>
+          </a:fontRef>
+        </p:style>
+        <p:txBody>
+          <a:bodyPr rtlCol="0" anchor="ctr" wrap="square" lIns="73152" rIns="73152" tIns="36576" bIns="36576"/>
+          <a:lstStyle/>
+          <a:p>
+            <a:pPr algn="ctr"/>
+            <a:r>
+              <a:rPr sz="850" b="0">
+                <a:solidFill>
+                  <a:srgbClr val="107C10"/>
+                </a:solidFill>
+              </a:rPr>
+              <a:t>GridStat</a:t>
+            </a:r>
+          </a:p>
+        </p:txBody>
+      </p:sp>
+      <p:sp>
+        <p:nvSpPr>
+          <p:cNvPr id="15" name="Rectangle 14"/>
+          <p:cNvSpPr/>
+          <p:nvPr/>
+        </p:nvSpPr>
+        <p:spPr>
+          <a:xfrm>
+            <a:off x="3429000" y="1709928"/>
+            <a:ext cx="1417320" cy="292608"/>
+          </a:xfrm>
+          <a:prstGeom prst="rect">
+            <a:avLst/>
+          </a:prstGeom>
+          <a:solidFill>
+            <a:srgbClr val="FFFFFF"/>
+          </a:solidFill>
+          <a:ln w="3810">
+            <a:solidFill>
+              <a:srgbClr val="DDDDDD"/>
+            </a:solidFill>
+          </a:ln>
+        </p:spPr>
+        <p:style>
+          <a:lnRef idx="1">
+            <a:schemeClr val="accent1"/>
+          </a:lnRef>
+          <a:fillRef idx="3">
+            <a:schemeClr val="accent1"/>
+          </a:fillRef>
+          <a:effectRef idx="2">
+            <a:schemeClr val="accent1"/>
+          </a:effectRef>
+          <a:fontRef idx="minor">
+            <a:schemeClr val="lt1"/>
+          </a:fontRef>
+        </p:style>
+        <p:txBody>
+          <a:bodyPr rtlCol="0" anchor="ctr" wrap="square" lIns="73152" rIns="73152" tIns="36576" bIns="36576"/>
+          <a:lstStyle/>
+          <a:p>
+            <a:pPr algn="ctr"/>
+            <a:r>
+              <a:rPr sz="850" b="0">
+                <a:solidFill>
+                  <a:srgbClr val="1C1C28"/>
+                </a:solidFill>
+              </a:rPr>
+              <a:t>2026-04-10</a:t>
+            </a:r>
+          </a:p>
+        </p:txBody>
+      </p:sp>
+      <p:sp>
+        <p:nvSpPr>
+          <p:cNvPr id="16" name="Rectangle 15"/>
+          <p:cNvSpPr/>
+          <p:nvPr/>
+        </p:nvSpPr>
+        <p:spPr>
+          <a:xfrm>
+            <a:off x="4892040" y="1709928"/>
+            <a:ext cx="1280160" cy="292608"/>
+          </a:xfrm>
+          <a:prstGeom prst="rect">
+            <a:avLst/>
+          </a:prstGeom>
+          <a:solidFill>
+            <a:srgbClr val="FFFFFF"/>
+          </a:solidFill>
+          <a:ln w="3810">
+            <a:solidFill>
+              <a:srgbClr val="DDDDDD"/>
+            </a:solidFill>
+          </a:ln>
+        </p:spPr>
+        <p:style>
+          <a:lnRef idx="1">
+            <a:schemeClr val="accent1"/>
+          </a:lnRef>
+          <a:fillRef idx="3">
+            <a:schemeClr val="accent1"/>
+          </a:fillRef>
+          <a:effectRef idx="2">
+            <a:schemeClr val="accent1"/>
+          </a:effectRef>
+          <a:fontRef idx="minor">
+            <a:schemeClr val="lt1"/>
+          </a:fontRef>
+        </p:style>
+        <p:txBody>
+          <a:bodyPr rtlCol="0" anchor="ctr" wrap="square" lIns="73152" rIns="73152" tIns="36576" bIns="36576"/>
+          <a:lstStyle/>
+          <a:p>
+            <a:pPr algn="ctr"/>
+            <a:r>
+              <a:rPr sz="850" b="0">
+                <a:solidFill>
+                  <a:srgbClr val="1C1C28"/>
+                </a:solidFill>
+              </a:rPr>
+              <a:t>24</a:t>
+            </a:r>
+          </a:p>
+        </p:txBody>
+      </p:sp>
+      <p:sp>
+        <p:nvSpPr>
+          <p:cNvPr id="17" name="Rectangle 16"/>
+          <p:cNvSpPr/>
+          <p:nvPr/>
+        </p:nvSpPr>
+        <p:spPr>
+          <a:xfrm>
+            <a:off x="6217920" y="1709928"/>
+            <a:ext cx="1234440" cy="292608"/>
+          </a:xfrm>
+          <a:prstGeom prst="rect">
+            <a:avLst/>
+          </a:prstGeom>
+          <a:solidFill>
+            <a:srgbClr val="FFFFFF"/>
+          </a:solidFill>
+          <a:ln w="3810">
+            <a:solidFill>
+              <a:srgbClr val="DDDDDD"/>
+            </a:solidFill>
+          </a:ln>
+        </p:spPr>
+        <p:style>
+          <a:lnRef idx="1">
+            <a:schemeClr val="accent1"/>
+          </a:lnRef>
+          <a:fillRef idx="3">
+            <a:schemeClr val="accent1"/>
+          </a:fillRef>
+          <a:effectRef idx="2">
+            <a:schemeClr val="accent1"/>
+          </a:effectRef>
+          <a:fontRef idx="minor">
+            <a:schemeClr val="lt1"/>
+          </a:fontRef>
+        </p:style>
+        <p:txBody>
+          <a:bodyPr rtlCol="0" anchor="ctr" wrap="square" lIns="73152" rIns="73152" tIns="36576" bIns="36576"/>
+          <a:lstStyle/>
+          <a:p>
+            <a:pPr algn="ctr"/>
+            <a:r>
+              <a:rPr sz="850" b="0">
+                <a:solidFill>
+                  <a:srgbClr val="1C1C28"/>
+                </a:solidFill>
+              </a:rPr>
+              <a:t>P850</a:t>
+            </a:r>
+          </a:p>
+        </p:txBody>
+      </p:sp>
+      <p:sp>
+        <p:nvSpPr>
+          <p:cNvPr id="18" name="Rectangle 17"/>
+          <p:cNvSpPr/>
+          <p:nvPr/>
+        </p:nvSpPr>
+        <p:spPr>
+          <a:xfrm>
+            <a:off x="7498079" y="1709928"/>
+            <a:ext cx="1234440" cy="292608"/>
+          </a:xfrm>
+          <a:prstGeom prst="rect">
+            <a:avLst/>
+          </a:prstGeom>
+          <a:solidFill>
+            <a:srgbClr val="FFFFFF"/>
+          </a:solidFill>
+          <a:ln w="3810">
+            <a:solidFill>
+              <a:srgbClr val="DDDDDD"/>
+            </a:solidFill>
+          </a:ln>
+        </p:spPr>
+        <p:style>
+          <a:lnRef idx="1">
+            <a:schemeClr val="accent1"/>
+          </a:lnRef>
+          <a:fillRef idx="3">
+            <a:schemeClr val="accent1"/>
+          </a:fillRef>
+          <a:effectRef idx="2">
+            <a:schemeClr val="accent1"/>
+          </a:effectRef>
+          <a:fontRef idx="minor">
+            <a:schemeClr val="lt1"/>
+          </a:fontRef>
+        </p:style>
+        <p:txBody>
+          <a:bodyPr rtlCol="0" anchor="ctr" wrap="square" lIns="73152" rIns="73152" tIns="36576" bIns="36576"/>
+          <a:lstStyle/>
+          <a:p>
+            <a:pPr algn="ctr"/>
+            <a:r>
+              <a:rPr sz="850" b="0">
+                <a:solidFill>
+                  <a:srgbClr val="1C1C28"/>
+                </a:solidFill>
+              </a:rPr>
+              <a:t>Australia</a:t>
+            </a:r>
+          </a:p>
+        </p:txBody>
+      </p:sp>
+      <p:sp>
+        <p:nvSpPr>
+          <p:cNvPr id="19" name="Rectangle 18"/>
+          <p:cNvSpPr/>
+          <p:nvPr/>
+        </p:nvSpPr>
+        <p:spPr>
+          <a:xfrm>
+            <a:off x="8778240" y="1709928"/>
+            <a:ext cx="1600200" cy="292608"/>
+          </a:xfrm>
+          <a:prstGeom prst="rect">
+            <a:avLst/>
+          </a:prstGeom>
+          <a:solidFill>
+            <a:srgbClr val="FFFFFF"/>
+          </a:solidFill>
+          <a:ln w="3810">
+            <a:solidFill>
+              <a:srgbClr val="DDDDDD"/>
+            </a:solidFill>
+          </a:ln>
+        </p:spPr>
+        <p:style>
+          <a:lnRef idx="1">
+            <a:schemeClr val="accent1"/>
+          </a:lnRef>
+          <a:fillRef idx="3">
+            <a:schemeClr val="accent1"/>
+          </a:fillRef>
+          <a:effectRef idx="2">
+            <a:schemeClr val="accent1"/>
+          </a:effectRef>
+          <a:fontRef idx="minor">
+            <a:schemeClr val="lt1"/>
+          </a:fontRef>
+        </p:style>
+        <p:txBody>
+          <a:bodyPr rtlCol="0" anchor="ctr" wrap="square" lIns="73152" rIns="73152" tIns="36576" bIns="36576"/>
+          <a:lstStyle/>
+          <a:p>
+            <a:pPr algn="ctr"/>
+            <a:r>
+              <a:rPr sz="850" b="0">
+                <a:solidFill>
+                  <a:srgbClr val="1C1C28"/>
+                </a:solidFill>
+              </a:rPr>
+              <a:t>-0.5 / 1.87 / 1.43</a:t>
+            </a:r>
+          </a:p>
+        </p:txBody>
+      </p:sp>
+      <p:sp>
+        <p:nvSpPr>
+          <p:cNvPr id="20" name="Rectangle 19"/>
+          <p:cNvSpPr/>
+          <p:nvPr/>
+        </p:nvSpPr>
+        <p:spPr>
+          <a:xfrm>
+            <a:off x="10424160" y="1709928"/>
+            <a:ext cx="1645920" cy="292608"/>
+          </a:xfrm>
+          <a:prstGeom prst="rect">
+            <a:avLst/>
+          </a:prstGeom>
+          <a:solidFill>
+            <a:srgbClr val="FFFFFF"/>
+          </a:solidFill>
+          <a:ln w="3810">
+            <a:solidFill>
+              <a:srgbClr val="DDDDDD"/>
+            </a:solidFill>
+          </a:ln>
+        </p:spPr>
+        <p:style>
+          <a:lnRef idx="1">
+            <a:schemeClr val="accent1"/>
+          </a:lnRef>
+          <a:fillRef idx="3">
+            <a:schemeClr val="accent1"/>
+          </a:fillRef>
+          <a:effectRef idx="2">
+            <a:schemeClr val="accent1"/>
+          </a:effectRef>
+          <a:fontRef idx="minor">
+            <a:schemeClr val="lt1"/>
+          </a:fontRef>
+        </p:style>
+        <p:txBody>
+          <a:bodyPr rtlCol="0" anchor="ctr" wrap="square" lIns="73152" rIns="73152" tIns="36576" bIns="36576"/>
+          <a:lstStyle/>
+          <a:p>
+            <a:pPr algn="ctr"/>
+            <a:r>
+              <a:rPr sz="850" b="0">
+                <a:solidFill>
+                  <a:srgbClr val="1C1C28"/>
+                </a:solidFill>
+              </a:rPr>
+              <a:t>  -</a:t>
+            </a:r>
+          </a:p>
+        </p:txBody>
+      </p:sp>
+      <p:sp>
+        <p:nvSpPr>
+          <p:cNvPr id="21" name="Rectangle 20"/>
+          <p:cNvSpPr/>
+          <p:nvPr/>
+        </p:nvSpPr>
+        <p:spPr>
+          <a:xfrm>
+            <a:off x="411480" y="2002536"/>
+            <a:ext cx="1508760" cy="292608"/>
+          </a:xfrm>
+          <a:prstGeom prst="rect">
+            <a:avLst/>
+          </a:prstGeom>
+          <a:solidFill>
+            <a:srgbClr val="F5F5F7"/>
+          </a:solidFill>
+          <a:ln w="3810">
+            <a:solidFill>
+              <a:srgbClr val="DDDDDD"/>
+            </a:solidFill>
+          </a:ln>
+        </p:spPr>
+        <p:style>
+          <a:lnRef idx="1">
+            <a:schemeClr val="accent1"/>
+          </a:lnRef>
+          <a:fillRef idx="3">
+            <a:schemeClr val="accent1"/>
+          </a:fillRef>
+          <a:effectRef idx="2">
+            <a:schemeClr val="accent1"/>
+          </a:effectRef>
+          <a:fontRef idx="minor">
+            <a:schemeClr val="lt1"/>
+          </a:fontRef>
+        </p:style>
+        <p:txBody>
+          <a:bodyPr rtlCol="0" anchor="ctr" wrap="square" lIns="73152" rIns="73152" tIns="36576" bIns="36576"/>
+          <a:lstStyle/>
+          <a:p>
+            <a:pPr algn="ctr"/>
+            <a:r>
+              <a:rPr sz="850" b="0">
+                <a:solidFill>
+                  <a:srgbClr val="1C1C28"/>
+                </a:solidFill>
+              </a:rPr>
+              <a:t>MSLP</a:t>
+            </a:r>
+          </a:p>
+        </p:txBody>
+      </p:sp>
+      <p:sp>
+        <p:nvSpPr>
+          <p:cNvPr id="22" name="Rectangle 21"/>
+          <p:cNvSpPr/>
+          <p:nvPr/>
+        </p:nvSpPr>
+        <p:spPr>
+          <a:xfrm>
+            <a:off x="1965960" y="2002536"/>
+            <a:ext cx="1417320" cy="292608"/>
+          </a:xfrm>
+          <a:prstGeom prst="rect">
+            <a:avLst/>
+          </a:prstGeom>
+          <a:solidFill>
+            <a:srgbClr val="E6F5E6"/>
+          </a:solidFill>
+          <a:ln w="3810">
+            <a:solidFill>
+              <a:srgbClr val="DDDDDD"/>
+            </a:solidFill>
+          </a:ln>
+        </p:spPr>
+        <p:style>
+          <a:lnRef idx="1">
+            <a:schemeClr val="accent1"/>
+          </a:lnRef>
+          <a:fillRef idx="3">
+            <a:schemeClr val="accent1"/>
+          </a:fillRef>
+          <a:effectRef idx="2">
+            <a:schemeClr val="accent1"/>
+          </a:effectRef>
+          <a:fontRef idx="minor">
+            <a:schemeClr val="lt1"/>
+          </a:fontRef>
+        </p:style>
+        <p:txBody>
+          <a:bodyPr rtlCol="0" anchor="ctr" wrap="square" lIns="73152" rIns="73152" tIns="36576" bIns="36576"/>
+          <a:lstStyle/>
+          <a:p>
+            <a:pPr algn="ctr"/>
+            <a:r>
+              <a:rPr sz="850" b="0">
+                <a:solidFill>
+                  <a:srgbClr val="107C10"/>
+                </a:solidFill>
+              </a:rPr>
+              <a:t>GridStat</a:t>
+            </a:r>
+          </a:p>
+        </p:txBody>
+      </p:sp>
+      <p:sp>
+        <p:nvSpPr>
+          <p:cNvPr id="23" name="Rectangle 22"/>
+          <p:cNvSpPr/>
+          <p:nvPr/>
+        </p:nvSpPr>
+        <p:spPr>
+          <a:xfrm>
+            <a:off x="3429000" y="2002536"/>
+            <a:ext cx="1417320" cy="292608"/>
+          </a:xfrm>
+          <a:prstGeom prst="rect">
+            <a:avLst/>
+          </a:prstGeom>
+          <a:solidFill>
+            <a:srgbClr val="F5F5F7"/>
+          </a:solidFill>
+          <a:ln w="3810">
+            <a:solidFill>
+              <a:srgbClr val="DDDDDD"/>
+            </a:solidFill>
+          </a:ln>
+        </p:spPr>
+        <p:style>
+          <a:lnRef idx="1">
+            <a:schemeClr val="accent1"/>
+          </a:lnRef>
+          <a:fillRef idx="3">
+            <a:schemeClr val="accent1"/>
+          </a:fillRef>
+          <a:effectRef idx="2">
+            <a:schemeClr val="accent1"/>
+          </a:effectRef>
+          <a:fontRef idx="minor">
+            <a:schemeClr val="lt1"/>
+          </a:fontRef>
+        </p:style>
+        <p:txBody>
+          <a:bodyPr rtlCol="0" anchor="ctr" wrap="square" lIns="73152" rIns="73152" tIns="36576" bIns="36576"/>
+          <a:lstStyle/>
+          <a:p>
+            <a:pPr algn="ctr"/>
+            <a:r>
+              <a:rPr sz="850" b="0">
+                <a:solidFill>
+                  <a:srgbClr val="1C1C28"/>
+                </a:solidFill>
+              </a:rPr>
+              <a:t>2026-04-10</a:t>
+            </a:r>
+          </a:p>
+        </p:txBody>
+      </p:sp>
+      <p:sp>
+        <p:nvSpPr>
+          <p:cNvPr id="24" name="Rectangle 23"/>
+          <p:cNvSpPr/>
+          <p:nvPr/>
+        </p:nvSpPr>
+        <p:spPr>
+          <a:xfrm>
+            <a:off x="4892040" y="2002536"/>
+            <a:ext cx="1280160" cy="292608"/>
+          </a:xfrm>
+          <a:prstGeom prst="rect">
+            <a:avLst/>
+          </a:prstGeom>
+          <a:solidFill>
+            <a:srgbClr val="F5F5F7"/>
+          </a:solidFill>
+          <a:ln w="3810">
+            <a:solidFill>
+              <a:srgbClr val="DDDDDD"/>
+            </a:solidFill>
+          </a:ln>
+        </p:spPr>
+        <p:style>
+          <a:lnRef idx="1">
+            <a:schemeClr val="accent1"/>
+          </a:lnRef>
+          <a:fillRef idx="3">
+            <a:schemeClr val="accent1"/>
+          </a:fillRef>
+          <a:effectRef idx="2">
+            <a:schemeClr val="accent1"/>
+          </a:effectRef>
+          <a:fontRef idx="minor">
+            <a:schemeClr val="lt1"/>
+          </a:fontRef>
+        </p:style>
+        <p:txBody>
+          <a:bodyPr rtlCol="0" anchor="ctr" wrap="square" lIns="73152" rIns="73152" tIns="36576" bIns="36576"/>
+          <a:lstStyle/>
+          <a:p>
+            <a:pPr algn="ctr"/>
+            <a:r>
+              <a:rPr sz="850" b="0">
+                <a:solidFill>
+                  <a:srgbClr val="1C1C28"/>
+                </a:solidFill>
+              </a:rPr>
+              <a:t>48</a:t>
+            </a:r>
+          </a:p>
+        </p:txBody>
+      </p:sp>
+      <p:sp>
+        <p:nvSpPr>
+          <p:cNvPr id="25" name="Rectangle 24"/>
+          <p:cNvSpPr/>
+          <p:nvPr/>
+        </p:nvSpPr>
+        <p:spPr>
+          <a:xfrm>
+            <a:off x="6217920" y="2002536"/>
+            <a:ext cx="1234440" cy="292608"/>
+          </a:xfrm>
+          <a:prstGeom prst="rect">
+            <a:avLst/>
+          </a:prstGeom>
+          <a:solidFill>
+            <a:srgbClr val="F5F5F7"/>
+          </a:solidFill>
+          <a:ln w="3810">
+            <a:solidFill>
+              <a:srgbClr val="DDDDDD"/>
+            </a:solidFill>
+          </a:ln>
+        </p:spPr>
+        <p:style>
+          <a:lnRef idx="1">
+            <a:schemeClr val="accent1"/>
+          </a:lnRef>
+          <a:fillRef idx="3">
+            <a:schemeClr val="accent1"/>
+          </a:fillRef>
+          <a:effectRef idx="2">
+            <a:schemeClr val="accent1"/>
+          </a:effectRef>
+          <a:fontRef idx="minor">
+            <a:schemeClr val="lt1"/>
+          </a:fontRef>
+        </p:style>
+        <p:txBody>
+          <a:bodyPr rtlCol="0" anchor="ctr" wrap="square" lIns="73152" rIns="73152" tIns="36576" bIns="36576"/>
+          <a:lstStyle/>
+          <a:p>
+            <a:pPr algn="ctr"/>
+            <a:r>
+              <a:rPr sz="850" b="0">
+                <a:solidFill>
+                  <a:srgbClr val="1C1C28"/>
+                </a:solidFill>
+              </a:rPr>
+              <a:t>L0</a:t>
+            </a:r>
+          </a:p>
+        </p:txBody>
+      </p:sp>
+      <p:sp>
+        <p:nvSpPr>
+          <p:cNvPr id="26" name="Rectangle 25"/>
+          <p:cNvSpPr/>
+          <p:nvPr/>
+        </p:nvSpPr>
+        <p:spPr>
+          <a:xfrm>
+            <a:off x="7498079" y="2002536"/>
+            <a:ext cx="1234440" cy="292608"/>
+          </a:xfrm>
+          <a:prstGeom prst="rect">
+            <a:avLst/>
+          </a:prstGeom>
+          <a:solidFill>
+            <a:srgbClr val="F5F5F7"/>
+          </a:solidFill>
+          <a:ln w="3810">
+            <a:solidFill>
+              <a:srgbClr val="DDDDDD"/>
+            </a:solidFill>
+          </a:ln>
+        </p:spPr>
+        <p:style>
+          <a:lnRef idx="1">
+            <a:schemeClr val="accent1"/>
+          </a:lnRef>
+          <a:fillRef idx="3">
+            <a:schemeClr val="accent1"/>
+          </a:fillRef>
+          <a:effectRef idx="2">
+            <a:schemeClr val="accent1"/>
+          </a:effectRef>
+          <a:fontRef idx="minor">
+            <a:schemeClr val="lt1"/>
+          </a:fontRef>
+        </p:style>
+        <p:txBody>
+          <a:bodyPr rtlCol="0" anchor="ctr" wrap="square" lIns="73152" rIns="73152" tIns="36576" bIns="36576"/>
+          <a:lstStyle/>
+          <a:p>
+            <a:pPr algn="ctr"/>
+            <a:r>
+              <a:rPr sz="850" b="0">
+                <a:solidFill>
+                  <a:srgbClr val="1C1C28"/>
+                </a:solidFill>
+              </a:rPr>
+              <a:t>NH</a:t>
+            </a:r>
+          </a:p>
+        </p:txBody>
+      </p:sp>
+      <p:sp>
+        <p:nvSpPr>
+          <p:cNvPr id="27" name="Rectangle 26"/>
+          <p:cNvSpPr/>
+          <p:nvPr/>
+        </p:nvSpPr>
+        <p:spPr>
+          <a:xfrm>
+            <a:off x="8778240" y="2002536"/>
+            <a:ext cx="1600200" cy="292608"/>
+          </a:xfrm>
+          <a:prstGeom prst="rect">
+            <a:avLst/>
+          </a:prstGeom>
+          <a:solidFill>
+            <a:srgbClr val="F5F5F7"/>
+          </a:solidFill>
+          <a:ln w="3810">
+            <a:solidFill>
+              <a:srgbClr val="DDDDDD"/>
+            </a:solidFill>
+          </a:ln>
+        </p:spPr>
+        <p:style>
+          <a:lnRef idx="1">
+            <a:schemeClr val="accent1"/>
+          </a:lnRef>
+          <a:fillRef idx="3">
+            <a:schemeClr val="accent1"/>
+          </a:fillRef>
+          <a:effectRef idx="2">
+            <a:schemeClr val="accent1"/>
+          </a:effectRef>
+          <a:fontRef idx="minor">
+            <a:schemeClr val="lt1"/>
+          </a:fontRef>
+        </p:style>
+        <p:txBody>
+          <a:bodyPr rtlCol="0" anchor="ctr" wrap="square" lIns="73152" rIns="73152" tIns="36576" bIns="36576"/>
+          <a:lstStyle/>
+          <a:p>
+            <a:pPr algn="ctr"/>
+            <a:r>
+              <a:rPr sz="850" b="0">
+                <a:solidFill>
+                  <a:srgbClr val="1C1C28"/>
+                </a:solidFill>
+              </a:rPr>
+              <a:t>0.3 / 2.1 / 1.8</a:t>
+            </a:r>
+          </a:p>
+        </p:txBody>
+      </p:sp>
+      <p:sp>
+        <p:nvSpPr>
+          <p:cNvPr id="28" name="Rectangle 27"/>
+          <p:cNvSpPr/>
+          <p:nvPr/>
+        </p:nvSpPr>
+        <p:spPr>
+          <a:xfrm>
+            <a:off x="10424160" y="2002536"/>
+            <a:ext cx="1645920" cy="292608"/>
+          </a:xfrm>
+          <a:prstGeom prst="rect">
+            <a:avLst/>
+          </a:prstGeom>
+          <a:solidFill>
+            <a:srgbClr val="F5F5F7"/>
+          </a:solidFill>
+          <a:ln w="3810">
+            <a:solidFill>
+              <a:srgbClr val="DDDDDD"/>
+            </a:solidFill>
+          </a:ln>
+        </p:spPr>
+        <p:style>
+          <a:lnRef idx="1">
+            <a:schemeClr val="accent1"/>
+          </a:lnRef>
+          <a:fillRef idx="3">
+            <a:schemeClr val="accent1"/>
+          </a:fillRef>
+          <a:effectRef idx="2">
+            <a:schemeClr val="accent1"/>
+          </a:effectRef>
+          <a:fontRef idx="minor">
+            <a:schemeClr val="lt1"/>
+          </a:fontRef>
+        </p:style>
+        <p:txBody>
+          <a:bodyPr rtlCol="0" anchor="ctr" wrap="square" lIns="73152" rIns="73152" tIns="36576" bIns="36576"/>
+          <a:lstStyle/>
+          <a:p>
+            <a:pPr algn="ctr"/>
+            <a:r>
+              <a:rPr sz="850" b="0">
+                <a:solidFill>
+                  <a:srgbClr val="1C1C28"/>
+                </a:solidFill>
+              </a:rPr>
+              <a:t>  -</a:t>
+            </a:r>
+          </a:p>
+        </p:txBody>
+      </p:sp>
+      <p:sp>
+        <p:nvSpPr>
+          <p:cNvPr id="29" name="Rectangle 28"/>
+          <p:cNvSpPr/>
+          <p:nvPr/>
+        </p:nvSpPr>
+        <p:spPr>
+          <a:xfrm>
+            <a:off x="411480" y="2295144"/>
+            <a:ext cx="1508760" cy="292608"/>
+          </a:xfrm>
+          <a:prstGeom prst="rect">
+            <a:avLst/>
+          </a:prstGeom>
+          <a:solidFill>
+            <a:srgbClr val="FFFFFF"/>
+          </a:solidFill>
+          <a:ln w="3810">
+            <a:solidFill>
+              <a:srgbClr val="DDDDDD"/>
+            </a:solidFill>
+          </a:ln>
+        </p:spPr>
+        <p:style>
+          <a:lnRef idx="1">
+            <a:schemeClr val="accent1"/>
+          </a:lnRef>
+          <a:fillRef idx="3">
+            <a:schemeClr val="accent1"/>
+          </a:fillRef>
+          <a:effectRef idx="2">
+            <a:schemeClr val="accent1"/>
+          </a:effectRef>
+          <a:fontRef idx="minor">
+            <a:schemeClr val="lt1"/>
+          </a:fontRef>
+        </p:style>
+        <p:txBody>
+          <a:bodyPr rtlCol="0" anchor="ctr" wrap="square" lIns="73152" rIns="73152" tIns="36576" bIns="36576"/>
+          <a:lstStyle/>
+          <a:p>
+            <a:pPr algn="ctr"/>
+            <a:r>
+              <a:rPr sz="850" b="0">
+                <a:solidFill>
+                  <a:srgbClr val="1C1C28"/>
+                </a:solidFill>
+              </a:rPr>
+              <a:t>T850</a:t>
+            </a:r>
+          </a:p>
+        </p:txBody>
+      </p:sp>
+      <p:sp>
+        <p:nvSpPr>
+          <p:cNvPr id="30" name="Rectangle 29"/>
+          <p:cNvSpPr/>
+          <p:nvPr/>
+        </p:nvSpPr>
+        <p:spPr>
+          <a:xfrm>
+            <a:off x="1965960" y="2295144"/>
+            <a:ext cx="1417320" cy="292608"/>
+          </a:xfrm>
+          <a:prstGeom prst="rect">
+            <a:avLst/>
+          </a:prstGeom>
+          <a:solidFill>
+            <a:srgbClr val="FDEDE5"/>
+          </a:solidFill>
+          <a:ln w="3810">
+            <a:solidFill>
+              <a:srgbClr val="DDDDDD"/>
+            </a:solidFill>
+          </a:ln>
+        </p:spPr>
+        <p:style>
+          <a:lnRef idx="1">
+            <a:schemeClr val="accent1"/>
+          </a:lnRef>
+          <a:fillRef idx="3">
+            <a:schemeClr val="accent1"/>
+          </a:fillRef>
+          <a:effectRef idx="2">
+            <a:schemeClr val="accent1"/>
+          </a:effectRef>
+          <a:fontRef idx="minor">
+            <a:schemeClr val="lt1"/>
+          </a:fontRef>
+        </p:style>
+        <p:txBody>
+          <a:bodyPr rtlCol="0" anchor="ctr" wrap="square" lIns="73152" rIns="73152" tIns="36576" bIns="36576"/>
+          <a:lstStyle/>
+          <a:p>
+            <a:pPr algn="ctr"/>
+            <a:r>
+              <a:rPr sz="850" b="0">
+                <a:solidFill>
+                  <a:srgbClr val="C04800"/>
+                </a:solidFill>
+              </a:rPr>
+              <a:t>EnsembleStat</a:t>
+            </a:r>
+          </a:p>
+        </p:txBody>
+      </p:sp>
+      <p:sp>
+        <p:nvSpPr>
+          <p:cNvPr id="31" name="Rectangle 30"/>
+          <p:cNvSpPr/>
+          <p:nvPr/>
+        </p:nvSpPr>
+        <p:spPr>
+          <a:xfrm>
+            <a:off x="3429000" y="2295144"/>
+            <a:ext cx="1417320" cy="292608"/>
+          </a:xfrm>
+          <a:prstGeom prst="rect">
+            <a:avLst/>
+          </a:prstGeom>
+          <a:solidFill>
+            <a:srgbClr val="FFFFFF"/>
+          </a:solidFill>
+          <a:ln w="3810">
+            <a:solidFill>
+              <a:srgbClr val="DDDDDD"/>
+            </a:solidFill>
+          </a:ln>
+        </p:spPr>
+        <p:style>
+          <a:lnRef idx="1">
+            <a:schemeClr val="accent1"/>
+          </a:lnRef>
+          <a:fillRef idx="3">
+            <a:schemeClr val="accent1"/>
+          </a:fillRef>
+          <a:effectRef idx="2">
+            <a:schemeClr val="accent1"/>
+          </a:effectRef>
+          <a:fontRef idx="minor">
+            <a:schemeClr val="lt1"/>
+          </a:fontRef>
+        </p:style>
+        <p:txBody>
+          <a:bodyPr rtlCol="0" anchor="ctr" wrap="square" lIns="73152" rIns="73152" tIns="36576" bIns="36576"/>
+          <a:lstStyle/>
+          <a:p>
+            <a:pPr algn="ctr"/>
+            <a:r>
+              <a:rPr sz="850" b="0">
+                <a:solidFill>
+                  <a:srgbClr val="1C1C28"/>
+                </a:solidFill>
+              </a:rPr>
+              <a:t>2026-04-15</a:t>
+            </a:r>
+          </a:p>
+        </p:txBody>
+      </p:sp>
+      <p:sp>
+        <p:nvSpPr>
+          <p:cNvPr id="32" name="Rectangle 31"/>
+          <p:cNvSpPr/>
+          <p:nvPr/>
+        </p:nvSpPr>
+        <p:spPr>
+          <a:xfrm>
+            <a:off x="4892040" y="2295144"/>
+            <a:ext cx="1280160" cy="292608"/>
+          </a:xfrm>
+          <a:prstGeom prst="rect">
+            <a:avLst/>
+          </a:prstGeom>
+          <a:solidFill>
+            <a:srgbClr val="FFFFFF"/>
+          </a:solidFill>
+          <a:ln w="3810">
+            <a:solidFill>
+              <a:srgbClr val="DDDDDD"/>
+            </a:solidFill>
+          </a:ln>
+        </p:spPr>
+        <p:style>
+          <a:lnRef idx="1">
+            <a:schemeClr val="accent1"/>
+          </a:lnRef>
+          <a:fillRef idx="3">
+            <a:schemeClr val="accent1"/>
+          </a:fillRef>
+          <a:effectRef idx="2">
+            <a:schemeClr val="accent1"/>
+          </a:effectRef>
+          <a:fontRef idx="minor">
+            <a:schemeClr val="lt1"/>
+          </a:fontRef>
+        </p:style>
+        <p:txBody>
+          <a:bodyPr rtlCol="0" anchor="ctr" wrap="square" lIns="73152" rIns="73152" tIns="36576" bIns="36576"/>
+          <a:lstStyle/>
+          <a:p>
+            <a:pPr algn="ctr"/>
+            <a:r>
+              <a:rPr sz="850" b="0">
+                <a:solidFill>
+                  <a:srgbClr val="1C1C28"/>
+                </a:solidFill>
+              </a:rPr>
+              <a:t>24</a:t>
+            </a:r>
+          </a:p>
+        </p:txBody>
+      </p:sp>
+      <p:sp>
+        <p:nvSpPr>
+          <p:cNvPr id="33" name="Rectangle 32"/>
+          <p:cNvSpPr/>
+          <p:nvPr/>
+        </p:nvSpPr>
+        <p:spPr>
+          <a:xfrm>
+            <a:off x="6217920" y="2295144"/>
+            <a:ext cx="1234440" cy="292608"/>
+          </a:xfrm>
+          <a:prstGeom prst="rect">
+            <a:avLst/>
+          </a:prstGeom>
+          <a:solidFill>
+            <a:srgbClr val="FFFFFF"/>
+          </a:solidFill>
+          <a:ln w="3810">
+            <a:solidFill>
+              <a:srgbClr val="DDDDDD"/>
+            </a:solidFill>
+          </a:ln>
+        </p:spPr>
+        <p:style>
+          <a:lnRef idx="1">
+            <a:schemeClr val="accent1"/>
+          </a:lnRef>
+          <a:fillRef idx="3">
+            <a:schemeClr val="accent1"/>
+          </a:fillRef>
+          <a:effectRef idx="2">
+            <a:schemeClr val="accent1"/>
+          </a:effectRef>
+          <a:fontRef idx="minor">
+            <a:schemeClr val="lt1"/>
+          </a:fontRef>
+        </p:style>
+        <p:txBody>
+          <a:bodyPr rtlCol="0" anchor="ctr" wrap="square" lIns="73152" rIns="73152" tIns="36576" bIns="36576"/>
+          <a:lstStyle/>
+          <a:p>
+            <a:pPr algn="ctr"/>
+            <a:r>
+              <a:rPr sz="850" b="0">
+                <a:solidFill>
+                  <a:srgbClr val="1C1C28"/>
+                </a:solidFill>
+              </a:rPr>
+              <a:t>P850</a:t>
+            </a:r>
+          </a:p>
+        </p:txBody>
+      </p:sp>
+      <p:sp>
+        <p:nvSpPr>
+          <p:cNvPr id="34" name="Rectangle 33"/>
+          <p:cNvSpPr/>
+          <p:nvPr/>
+        </p:nvSpPr>
+        <p:spPr>
+          <a:xfrm>
+            <a:off x="7498079" y="2295144"/>
+            <a:ext cx="1234440" cy="292608"/>
+          </a:xfrm>
+          <a:prstGeom prst="rect">
+            <a:avLst/>
+          </a:prstGeom>
+          <a:solidFill>
+            <a:srgbClr val="FFFFFF"/>
+          </a:solidFill>
+          <a:ln w="3810">
+            <a:solidFill>
+              <a:srgbClr val="DDDDDD"/>
+            </a:solidFill>
+          </a:ln>
+        </p:spPr>
+        <p:style>
+          <a:lnRef idx="1">
+            <a:schemeClr val="accent1"/>
+          </a:lnRef>
+          <a:fillRef idx="3">
+            <a:schemeClr val="accent1"/>
+          </a:fillRef>
+          <a:effectRef idx="2">
+            <a:schemeClr val="accent1"/>
+          </a:effectRef>
+          <a:fontRef idx="minor">
+            <a:schemeClr val="lt1"/>
+          </a:fontRef>
+        </p:style>
+        <p:txBody>
+          <a:bodyPr rtlCol="0" anchor="ctr" wrap="square" lIns="73152" rIns="73152" tIns="36576" bIns="36576"/>
+          <a:lstStyle/>
+          <a:p>
+            <a:pPr algn="ctr"/>
+            <a:r>
+              <a:rPr sz="850" b="0">
+                <a:solidFill>
+                  <a:srgbClr val="1C1C28"/>
+                </a:solidFill>
+              </a:rPr>
+              <a:t>NH</a:t>
+            </a:r>
+          </a:p>
+        </p:txBody>
+      </p:sp>
+      <p:sp>
+        <p:nvSpPr>
+          <p:cNvPr id="35" name="Rectangle 34"/>
+          <p:cNvSpPr/>
+          <p:nvPr/>
+        </p:nvSpPr>
+        <p:spPr>
+          <a:xfrm>
+            <a:off x="8778240" y="2295144"/>
+            <a:ext cx="1600200" cy="292608"/>
+          </a:xfrm>
+          <a:prstGeom prst="rect">
+            <a:avLst/>
+          </a:prstGeom>
+          <a:solidFill>
+            <a:srgbClr val="FFFFFF"/>
+          </a:solidFill>
+          <a:ln w="3810">
+            <a:solidFill>
+              <a:srgbClr val="DDDDDD"/>
+            </a:solidFill>
+          </a:ln>
+        </p:spPr>
+        <p:style>
+          <a:lnRef idx="1">
+            <a:schemeClr val="accent1"/>
+          </a:lnRef>
+          <a:fillRef idx="3">
+            <a:schemeClr val="accent1"/>
+          </a:fillRef>
+          <a:effectRef idx="2">
+            <a:schemeClr val="accent1"/>
+          </a:effectRef>
+          <a:fontRef idx="minor">
+            <a:schemeClr val="lt1"/>
+          </a:fontRef>
+        </p:style>
+        <p:txBody>
+          <a:bodyPr rtlCol="0" anchor="ctr" wrap="square" lIns="73152" rIns="73152" tIns="36576" bIns="36576"/>
+          <a:lstStyle/>
+          <a:p>
+            <a:pPr algn="ctr"/>
+            <a:r>
+              <a:rPr sz="850" b="0">
+                <a:solidFill>
+                  <a:srgbClr val="1C1C28"/>
+                </a:solidFill>
+              </a:rPr>
+              <a:t>0.28 / 3.26 / 2.26</a:t>
+            </a:r>
+          </a:p>
+        </p:txBody>
+      </p:sp>
+      <p:sp>
+        <p:nvSpPr>
+          <p:cNvPr id="36" name="Rectangle 35"/>
+          <p:cNvSpPr/>
+          <p:nvPr/>
+        </p:nvSpPr>
+        <p:spPr>
+          <a:xfrm>
+            <a:off x="10424160" y="2295144"/>
+            <a:ext cx="1645920" cy="292608"/>
+          </a:xfrm>
+          <a:prstGeom prst="rect">
+            <a:avLst/>
+          </a:prstGeom>
+          <a:solidFill>
+            <a:srgbClr val="FFFFFF"/>
+          </a:solidFill>
+          <a:ln w="3810">
+            <a:solidFill>
+              <a:srgbClr val="DDDDDD"/>
+            </a:solidFill>
+          </a:ln>
+        </p:spPr>
+        <p:style>
+          <a:lnRef idx="1">
+            <a:schemeClr val="accent1"/>
+          </a:lnRef>
+          <a:fillRef idx="3">
+            <a:schemeClr val="accent1"/>
+          </a:fillRef>
+          <a:effectRef idx="2">
+            <a:schemeClr val="accent1"/>
+          </a:effectRef>
+          <a:fontRef idx="minor">
+            <a:schemeClr val="lt1"/>
+          </a:fontRef>
+        </p:style>
+        <p:txBody>
+          <a:bodyPr rtlCol="0" anchor="ctr" wrap="square" lIns="73152" rIns="73152" tIns="36576" bIns="36576"/>
+          <a:lstStyle/>
+          <a:p>
+            <a:pPr algn="ctr"/>
+            <a:r>
+              <a:rPr sz="850" b="0">
+                <a:solidFill>
+                  <a:srgbClr val="1C1C28"/>
+                </a:solidFill>
+              </a:rPr>
+              <a:t>1.62 / 2.73</a:t>
+            </a:r>
+          </a:p>
+        </p:txBody>
+      </p:sp>
+      <p:sp>
+        <p:nvSpPr>
+          <p:cNvPr id="37" name="Rectangle 36"/>
+          <p:cNvSpPr/>
+          <p:nvPr/>
+        </p:nvSpPr>
+        <p:spPr>
+          <a:xfrm>
+            <a:off x="411480" y="2587752"/>
+            <a:ext cx="1508760" cy="292608"/>
+          </a:xfrm>
+          <a:prstGeom prst="rect">
+            <a:avLst/>
+          </a:prstGeom>
+          <a:solidFill>
+            <a:srgbClr val="F5F5F7"/>
+          </a:solidFill>
+          <a:ln w="3810">
+            <a:solidFill>
+              <a:srgbClr val="DDDDDD"/>
+            </a:solidFill>
+          </a:ln>
+        </p:spPr>
+        <p:style>
+          <a:lnRef idx="1">
+            <a:schemeClr val="accent1"/>
+          </a:lnRef>
+          <a:fillRef idx="3">
+            <a:schemeClr val="accent1"/>
+          </a:fillRef>
+          <a:effectRef idx="2">
+            <a:schemeClr val="accent1"/>
+          </a:effectRef>
+          <a:fontRef idx="minor">
+            <a:schemeClr val="lt1"/>
+          </a:fontRef>
+        </p:style>
+        <p:txBody>
+          <a:bodyPr rtlCol="0" anchor="ctr" wrap="square" lIns="73152" rIns="73152" tIns="36576" bIns="36576"/>
+          <a:lstStyle/>
+          <a:p>
+            <a:pPr algn="ctr"/>
+            <a:r>
+              <a:rPr sz="850" b="0">
+                <a:solidFill>
+                  <a:srgbClr val="1C1C28"/>
+                </a:solidFill>
+              </a:rPr>
+              <a:t>Wind_All</a:t>
+            </a:r>
+          </a:p>
+        </p:txBody>
+      </p:sp>
+      <p:sp>
+        <p:nvSpPr>
+          <p:cNvPr id="38" name="Rectangle 37"/>
+          <p:cNvSpPr/>
+          <p:nvPr/>
+        </p:nvSpPr>
+        <p:spPr>
+          <a:xfrm>
+            <a:off x="1965960" y="2587752"/>
+            <a:ext cx="1417320" cy="292608"/>
+          </a:xfrm>
+          <a:prstGeom prst="rect">
+            <a:avLst/>
+          </a:prstGeom>
+          <a:solidFill>
+            <a:srgbClr val="E6F5E6"/>
+          </a:solidFill>
+          <a:ln w="3810">
+            <a:solidFill>
+              <a:srgbClr val="DDDDDD"/>
+            </a:solidFill>
+          </a:ln>
+        </p:spPr>
+        <p:style>
+          <a:lnRef idx="1">
+            <a:schemeClr val="accent1"/>
+          </a:lnRef>
+          <a:fillRef idx="3">
+            <a:schemeClr val="accent1"/>
+          </a:fillRef>
+          <a:effectRef idx="2">
+            <a:schemeClr val="accent1"/>
+          </a:effectRef>
+          <a:fontRef idx="minor">
+            <a:schemeClr val="lt1"/>
+          </a:fontRef>
+        </p:style>
+        <p:txBody>
+          <a:bodyPr rtlCol="0" anchor="ctr" wrap="square" lIns="73152" rIns="73152" tIns="36576" bIns="36576"/>
+          <a:lstStyle/>
+          <a:p>
+            <a:pPr algn="ctr"/>
+            <a:r>
+              <a:rPr sz="850" b="0">
+                <a:solidFill>
+                  <a:srgbClr val="107C10"/>
+                </a:solidFill>
+              </a:rPr>
+              <a:t>GridStat</a:t>
+            </a:r>
+          </a:p>
+        </p:txBody>
+      </p:sp>
+      <p:sp>
+        <p:nvSpPr>
+          <p:cNvPr id="39" name="Rectangle 38"/>
+          <p:cNvSpPr/>
+          <p:nvPr/>
+        </p:nvSpPr>
+        <p:spPr>
+          <a:xfrm>
+            <a:off x="3429000" y="2587752"/>
+            <a:ext cx="1417320" cy="292608"/>
+          </a:xfrm>
+          <a:prstGeom prst="rect">
+            <a:avLst/>
+          </a:prstGeom>
+          <a:solidFill>
+            <a:srgbClr val="F5F5F7"/>
+          </a:solidFill>
+          <a:ln w="3810">
+            <a:solidFill>
+              <a:srgbClr val="DDDDDD"/>
+            </a:solidFill>
+          </a:ln>
+        </p:spPr>
+        <p:style>
+          <a:lnRef idx="1">
+            <a:schemeClr val="accent1"/>
+          </a:lnRef>
+          <a:fillRef idx="3">
+            <a:schemeClr val="accent1"/>
+          </a:fillRef>
+          <a:effectRef idx="2">
+            <a:schemeClr val="accent1"/>
+          </a:effectRef>
+          <a:fontRef idx="minor">
+            <a:schemeClr val="lt1"/>
+          </a:fontRef>
+        </p:style>
+        <p:txBody>
+          <a:bodyPr rtlCol="0" anchor="ctr" wrap="square" lIns="73152" rIns="73152" tIns="36576" bIns="36576"/>
+          <a:lstStyle/>
+          <a:p>
+            <a:pPr algn="ctr"/>
+            <a:r>
+              <a:rPr sz="850" b="0">
+                <a:solidFill>
+                  <a:srgbClr val="1C1C28"/>
+                </a:solidFill>
+              </a:rPr>
+              <a:t>2026-04-15</a:t>
+            </a:r>
+          </a:p>
+        </p:txBody>
+      </p:sp>
+      <p:sp>
+        <p:nvSpPr>
+          <p:cNvPr id="40" name="Rectangle 39"/>
+          <p:cNvSpPr/>
+          <p:nvPr/>
+        </p:nvSpPr>
+        <p:spPr>
+          <a:xfrm>
+            <a:off x="4892040" y="2587752"/>
+            <a:ext cx="1280160" cy="292608"/>
+          </a:xfrm>
+          <a:prstGeom prst="rect">
+            <a:avLst/>
+          </a:prstGeom>
+          <a:solidFill>
+            <a:srgbClr val="F5F5F7"/>
+          </a:solidFill>
+          <a:ln w="3810">
+            <a:solidFill>
+              <a:srgbClr val="DDDDDD"/>
+            </a:solidFill>
+          </a:ln>
+        </p:spPr>
+        <p:style>
+          <a:lnRef idx="1">
+            <a:schemeClr val="accent1"/>
+          </a:lnRef>
+          <a:fillRef idx="3">
+            <a:schemeClr val="accent1"/>
+          </a:fillRef>
+          <a:effectRef idx="2">
+            <a:schemeClr val="accent1"/>
+          </a:effectRef>
+          <a:fontRef idx="minor">
+            <a:schemeClr val="lt1"/>
+          </a:fontRef>
+        </p:style>
+        <p:txBody>
+          <a:bodyPr rtlCol="0" anchor="ctr" wrap="square" lIns="73152" rIns="73152" tIns="36576" bIns="36576"/>
+          <a:lstStyle/>
+          <a:p>
+            <a:pPr algn="ctr"/>
+            <a:r>
+              <a:rPr sz="850" b="0">
+                <a:solidFill>
+                  <a:srgbClr val="1C1C28"/>
+                </a:solidFill>
+              </a:rPr>
+              <a:t>72</a:t>
+            </a:r>
+          </a:p>
+        </p:txBody>
+      </p:sp>
+      <p:sp>
+        <p:nvSpPr>
+          <p:cNvPr id="41" name="Rectangle 40"/>
+          <p:cNvSpPr/>
+          <p:nvPr/>
+        </p:nvSpPr>
+        <p:spPr>
+          <a:xfrm>
+            <a:off x="6217920" y="2587752"/>
+            <a:ext cx="1234440" cy="292608"/>
+          </a:xfrm>
+          <a:prstGeom prst="rect">
+            <a:avLst/>
+          </a:prstGeom>
+          <a:solidFill>
+            <a:srgbClr val="F5F5F7"/>
+          </a:solidFill>
+          <a:ln w="3810">
+            <a:solidFill>
+              <a:srgbClr val="DDDDDD"/>
+            </a:solidFill>
+          </a:ln>
+        </p:spPr>
+        <p:style>
+          <a:lnRef idx="1">
+            <a:schemeClr val="accent1"/>
+          </a:lnRef>
+          <a:fillRef idx="3">
+            <a:schemeClr val="accent1"/>
+          </a:fillRef>
+          <a:effectRef idx="2">
+            <a:schemeClr val="accent1"/>
+          </a:effectRef>
+          <a:fontRef idx="minor">
+            <a:schemeClr val="lt1"/>
+          </a:fontRef>
+        </p:style>
+        <p:txBody>
+          <a:bodyPr rtlCol="0" anchor="ctr" wrap="square" lIns="73152" rIns="73152" tIns="36576" bIns="36576"/>
+          <a:lstStyle/>
+          <a:p>
+            <a:pPr algn="ctr"/>
+            <a:r>
+              <a:rPr sz="850" b="0">
+                <a:solidFill>
+                  <a:srgbClr val="1C1C28"/>
+                </a:solidFill>
+              </a:rPr>
+              <a:t>P250</a:t>
+            </a:r>
+          </a:p>
+        </p:txBody>
+      </p:sp>
+      <p:sp>
+        <p:nvSpPr>
+          <p:cNvPr id="42" name="Rectangle 41"/>
+          <p:cNvSpPr/>
+          <p:nvPr/>
+        </p:nvSpPr>
+        <p:spPr>
+          <a:xfrm>
+            <a:off x="7498079" y="2587752"/>
+            <a:ext cx="1234440" cy="292608"/>
+          </a:xfrm>
+          <a:prstGeom prst="rect">
+            <a:avLst/>
+          </a:prstGeom>
+          <a:solidFill>
+            <a:srgbClr val="F5F5F7"/>
+          </a:solidFill>
+          <a:ln w="3810">
+            <a:solidFill>
+              <a:srgbClr val="DDDDDD"/>
+            </a:solidFill>
+          </a:ln>
+        </p:spPr>
+        <p:style>
+          <a:lnRef idx="1">
+            <a:schemeClr val="accent1"/>
+          </a:lnRef>
+          <a:fillRef idx="3">
+            <a:schemeClr val="accent1"/>
+          </a:fillRef>
+          <a:effectRef idx="2">
+            <a:schemeClr val="accent1"/>
+          </a:effectRef>
+          <a:fontRef idx="minor">
+            <a:schemeClr val="lt1"/>
+          </a:fontRef>
+        </p:style>
+        <p:txBody>
+          <a:bodyPr rtlCol="0" anchor="ctr" wrap="square" lIns="73152" rIns="73152" tIns="36576" bIns="36576"/>
+          <a:lstStyle/>
+          <a:p>
+            <a:pPr algn="ctr"/>
+            <a:r>
+              <a:rPr sz="850" b="0">
+                <a:solidFill>
+                  <a:srgbClr val="1C1C28"/>
+                </a:solidFill>
+              </a:rPr>
+              <a:t>SH</a:t>
+            </a:r>
+          </a:p>
+        </p:txBody>
+      </p:sp>
+      <p:sp>
+        <p:nvSpPr>
+          <p:cNvPr id="43" name="Rectangle 42"/>
+          <p:cNvSpPr/>
+          <p:nvPr/>
+        </p:nvSpPr>
+        <p:spPr>
+          <a:xfrm>
+            <a:off x="8778240" y="2587752"/>
+            <a:ext cx="1600200" cy="292608"/>
+          </a:xfrm>
+          <a:prstGeom prst="rect">
+            <a:avLst/>
+          </a:prstGeom>
+          <a:solidFill>
+            <a:srgbClr val="F5F5F7"/>
+          </a:solidFill>
+          <a:ln w="3810">
+            <a:solidFill>
+              <a:srgbClr val="DDDDDD"/>
+            </a:solidFill>
+          </a:ln>
+        </p:spPr>
+        <p:style>
+          <a:lnRef idx="1">
+            <a:schemeClr val="accent1"/>
+          </a:lnRef>
+          <a:fillRef idx="3">
+            <a:schemeClr val="accent1"/>
+          </a:fillRef>
+          <a:effectRef idx="2">
+            <a:schemeClr val="accent1"/>
+          </a:effectRef>
+          <a:fontRef idx="minor">
+            <a:schemeClr val="lt1"/>
+          </a:fontRef>
+        </p:style>
+        <p:txBody>
+          <a:bodyPr rtlCol="0" anchor="ctr" wrap="square" lIns="73152" rIns="73152" tIns="36576" bIns="36576"/>
+          <a:lstStyle/>
+          <a:p>
+            <a:pPr algn="ctr"/>
+            <a:r>
+              <a:rPr sz="850" b="0">
+                <a:solidFill>
+                  <a:srgbClr val="1C1C28"/>
+                </a:solidFill>
+              </a:rPr>
+              <a:t>0.1 / 2.4 / 1.9</a:t>
+            </a:r>
+          </a:p>
+        </p:txBody>
+      </p:sp>
+      <p:sp>
+        <p:nvSpPr>
+          <p:cNvPr id="44" name="Rectangle 43"/>
+          <p:cNvSpPr/>
+          <p:nvPr/>
+        </p:nvSpPr>
+        <p:spPr>
+          <a:xfrm>
+            <a:off x="10424160" y="2587752"/>
+            <a:ext cx="1645920" cy="292608"/>
+          </a:xfrm>
+          <a:prstGeom prst="rect">
+            <a:avLst/>
+          </a:prstGeom>
+          <a:solidFill>
+            <a:srgbClr val="F5F5F7"/>
+          </a:solidFill>
+          <a:ln w="3810">
+            <a:solidFill>
+              <a:srgbClr val="DDDDDD"/>
+            </a:solidFill>
+          </a:ln>
+        </p:spPr>
+        <p:style>
+          <a:lnRef idx="1">
+            <a:schemeClr val="accent1"/>
+          </a:lnRef>
+          <a:fillRef idx="3">
+            <a:schemeClr val="accent1"/>
+          </a:fillRef>
+          <a:effectRef idx="2">
+            <a:schemeClr val="accent1"/>
+          </a:effectRef>
+          <a:fontRef idx="minor">
+            <a:schemeClr val="lt1"/>
+          </a:fontRef>
+        </p:style>
+        <p:txBody>
+          <a:bodyPr rtlCol="0" anchor="ctr" wrap="square" lIns="73152" rIns="73152" tIns="36576" bIns="36576"/>
+          <a:lstStyle/>
+          <a:p>
+            <a:pPr algn="ctr"/>
+            <a:r>
+              <a:rPr sz="850" b="0">
+                <a:solidFill>
+                  <a:srgbClr val="1C1C28"/>
+                </a:solidFill>
+              </a:rPr>
+              <a:t>  -</a:t>
+            </a:r>
+          </a:p>
+        </p:txBody>
+      </p:sp>
+      <p:sp>
+        <p:nvSpPr>
+          <p:cNvPr id="45" name="Rectangle 44"/>
+          <p:cNvSpPr/>
+          <p:nvPr/>
+        </p:nvSpPr>
+        <p:spPr>
+          <a:xfrm>
+            <a:off x="411480" y="3044952"/>
+            <a:ext cx="1280160" cy="256032"/>
+          </a:xfrm>
+          <a:prstGeom prst="rect">
+            <a:avLst/>
+          </a:prstGeom>
+          <a:solidFill>
+            <a:srgbClr val="2461E5"/>
+          </a:solidFill>
+          <a:ln>
+            <a:noFill/>
+          </a:ln>
+        </p:spPr>
+        <p:style>
+          <a:lnRef idx="1">
+            <a:schemeClr val="accent1"/>
+          </a:lnRef>
+          <a:fillRef idx="3">
+            <a:schemeClr val="accent1"/>
+          </a:fillRef>
+          <a:effectRef idx="2">
+            <a:schemeClr val="accent1"/>
+          </a:effectRef>
+          <a:fontRef idx="minor">
+            <a:schemeClr val="lt1"/>
+          </a:fontRef>
+        </p:style>
+        <p:txBody>
+          <a:bodyPr rtlCol="0" anchor="ctr" wrap="square" lIns="73152" rIns="73152" tIns="36576" bIns="36576"/>
+          <a:lstStyle/>
+          <a:p>
+            <a:pPr algn="ctr"/>
+            <a:r>
+              <a:rPr sz="800" b="0">
+                <a:solidFill>
+                  <a:srgbClr val="FFFFFF"/>
+                </a:solidFill>
+              </a:rPr>
+              <a:t>Index columns</a:t>
+            </a:r>
+          </a:p>
+        </p:txBody>
+      </p:sp>
+      <p:sp>
+        <p:nvSpPr>
+          <p:cNvPr id="46" name="Rectangle 45"/>
+          <p:cNvSpPr/>
+          <p:nvPr/>
+        </p:nvSpPr>
+        <p:spPr>
+          <a:xfrm>
+            <a:off x="1783080" y="3044952"/>
+            <a:ext cx="1280160" cy="256032"/>
+          </a:xfrm>
+          <a:prstGeom prst="rect">
+            <a:avLst/>
+          </a:prstGeom>
+          <a:solidFill>
+            <a:srgbClr val="107C10"/>
+          </a:solidFill>
+          <a:ln>
+            <a:noFill/>
+          </a:ln>
+        </p:spPr>
+        <p:style>
+          <a:lnRef idx="1">
+            <a:schemeClr val="accent1"/>
+          </a:lnRef>
+          <a:fillRef idx="3">
+            <a:schemeClr val="accent1"/>
+          </a:fillRef>
+          <a:effectRef idx="2">
+            <a:schemeClr val="accent1"/>
+          </a:effectRef>
+          <a:fontRef idx="minor">
+            <a:schemeClr val="lt1"/>
+          </a:fontRef>
+        </p:style>
+        <p:txBody>
+          <a:bodyPr rtlCol="0" anchor="ctr" wrap="square" lIns="73152" rIns="73152" tIns="36576" bIns="36576"/>
+          <a:lstStyle/>
+          <a:p>
+            <a:pPr algn="ctr"/>
+            <a:r>
+              <a:rPr sz="800" b="0">
+                <a:solidFill>
+                  <a:srgbClr val="FFFFFF"/>
+                </a:solidFill>
+              </a:rPr>
+              <a:t>GridStat stats</a:t>
+            </a:r>
+          </a:p>
+        </p:txBody>
+      </p:sp>
+      <p:sp>
+        <p:nvSpPr>
+          <p:cNvPr id="47" name="Rectangle 46"/>
+          <p:cNvSpPr/>
+          <p:nvPr/>
+        </p:nvSpPr>
+        <p:spPr>
+          <a:xfrm>
+            <a:off x="3154680" y="3044952"/>
+            <a:ext cx="1463040" cy="256032"/>
+          </a:xfrm>
+          <a:prstGeom prst="rect">
+            <a:avLst/>
+          </a:prstGeom>
+          <a:solidFill>
+            <a:srgbClr val="C04800"/>
+          </a:solidFill>
+          <a:ln>
+            <a:noFill/>
+          </a:ln>
+        </p:spPr>
+        <p:style>
+          <a:lnRef idx="1">
+            <a:schemeClr val="accent1"/>
+          </a:lnRef>
+          <a:fillRef idx="3">
+            <a:schemeClr val="accent1"/>
+          </a:fillRef>
+          <a:effectRef idx="2">
+            <a:schemeClr val="accent1"/>
+          </a:effectRef>
+          <a:fontRef idx="minor">
+            <a:schemeClr val="lt1"/>
+          </a:fontRef>
+        </p:style>
+        <p:txBody>
+          <a:bodyPr rtlCol="0" anchor="ctr" wrap="square" lIns="73152" rIns="73152" tIns="36576" bIns="36576"/>
+          <a:lstStyle/>
+          <a:p>
+            <a:pPr algn="ctr"/>
+            <a:r>
+              <a:rPr sz="800" b="0">
+                <a:solidFill>
+                  <a:srgbClr val="FFFFFF"/>
+                </a:solidFill>
+              </a:rPr>
+              <a:t>EnsembleStat stats</a:t>
+            </a:r>
+          </a:p>
+        </p:txBody>
+      </p:sp>
+      <p:sp>
+        <p:nvSpPr>
+          <p:cNvPr id="48" name="TextBox 47"/>
+          <p:cNvSpPr txBox="1"/>
+          <p:nvPr/>
+        </p:nvSpPr>
+        <p:spPr>
+          <a:xfrm>
+            <a:off x="411480" y="3392424"/>
+            <a:ext cx="11338560" cy="365760"/>
+          </a:xfrm>
+          <a:prstGeom prst="rect">
+            <a:avLst/>
+          </a:prstGeom>
+          <a:noFill/>
+        </p:spPr>
+        <p:txBody>
+          <a:bodyPr wrap="square">
+            <a:spAutoFit/>
+          </a:bodyPr>
+          <a:lstStyle/>
+          <a:p>
+            <a:pPr algn="l"/>
+            <a:r>
+              <a:rPr sz="900" b="0">
+                <a:solidFill>
+                  <a:srgbClr val="6E6E78"/>
+                </a:solidFill>
+              </a:rPr>
+              <a:t>Constant columns (model, variable, units, obs type) are stripped from rows and embedded as file-level metadata.</a:t>
             </a:r>
           </a:p>
         </p:txBody>
@@ -10153,89 +9888,14 @@
       <p:grpSpPr/>
       <p:sp>
         <p:nvSpPr>
-          <p:cNvPr id="2" name="Picture Placeholder 1"/>
-          <p:cNvSpPr>
-            <a:spLocks noGrp="1"/>
-          </p:cNvSpPr>
-          <p:nvPr>
-            <p:ph type="pic" idx="11" sz="quarter"/>
-          </p:nvPr>
-        </p:nvSpPr>
-        <p:spPr/>
-      </p:sp>
-      <p:sp>
-        <p:nvSpPr>
-          <p:cNvPr id="3" name="Picture Placeholder 2"/>
-          <p:cNvSpPr>
-            <a:spLocks noGrp="1"/>
-          </p:cNvSpPr>
-          <p:nvPr>
-            <p:ph type="pic" idx="12" sz="quarter"/>
-          </p:nvPr>
-        </p:nvSpPr>
-        <p:spPr/>
-      </p:sp>
-      <p:sp>
-        <p:nvSpPr>
-          <p:cNvPr id="4" name="Text Placeholder 3"/>
-          <p:cNvSpPr>
-            <a:spLocks noGrp="1"/>
-          </p:cNvSpPr>
-          <p:nvPr>
-            <p:ph type="body" idx="10" sz="quarter"/>
-          </p:nvPr>
-        </p:nvSpPr>
-        <p:spPr/>
-        <p:txBody>
-          <a:bodyPr/>
-          <a:lstStyle/>
-          <a:p/>
-        </p:txBody>
-      </p:sp>
-      <p:sp>
-        <p:nvSpPr>
-          <p:cNvPr id="5" name="Text Placeholder 4"/>
-          <p:cNvSpPr>
-            <a:spLocks noGrp="1"/>
-          </p:cNvSpPr>
-          <p:nvPr>
-            <p:ph type="body" idx="13" sz="quarter"/>
-          </p:nvPr>
-        </p:nvSpPr>
-        <p:spPr/>
-        <p:txBody>
-          <a:bodyPr/>
-          <a:lstStyle/>
-          <a:p/>
-        </p:txBody>
-      </p:sp>
-      <p:sp>
-        <p:nvSpPr>
-          <p:cNvPr id="6" name="Title 5"/>
-          <p:cNvSpPr>
-            <a:spLocks noGrp="1"/>
-          </p:cNvSpPr>
-          <p:nvPr>
-            <p:ph type="title"/>
-          </p:nvPr>
-        </p:nvSpPr>
-        <p:spPr/>
-        <p:txBody>
-          <a:bodyPr/>
-          <a:lstStyle/>
-          <a:p/>
-        </p:txBody>
-      </p:sp>
-      <p:sp>
-        <p:nvSpPr>
-          <p:cNvPr id="7" name="TextBox 6"/>
+          <p:cNvPr id="2" name="TextBox 1"/>
           <p:cNvSpPr txBox="1"/>
           <p:nvPr/>
         </p:nvSpPr>
         <p:spPr>
           <a:xfrm>
-            <a:off x="512064" y="429768"/>
-            <a:ext cx="11430000" cy="502920"/>
+            <a:off x="411480" y="182880"/>
+            <a:ext cx="11338560" cy="475488"/>
           </a:xfrm>
           <a:prstGeom prst="rect">
             <a:avLst/>
@@ -10249,19 +9909,678 @@
           <a:lstStyle/>
           <a:p>
             <a:r>
-              <a:rPr b="1" sz="2400">
+              <a:rPr b="1" sz="2200">
                 <a:solidFill>
                   <a:srgbClr val="2461E5"/>
                 </a:solidFill>
               </a:rPr>
+              <a:t>How We Can Use the Data</a:t>
+            </a:r>
+          </a:p>
+        </p:txBody>
+      </p:sp>
+      <p:sp>
+        <p:nvSpPr>
+          <p:cNvPr id="3" name="Rectangle 2"/>
+          <p:cNvSpPr/>
+          <p:nvPr/>
+        </p:nvSpPr>
+        <p:spPr>
+          <a:xfrm>
+            <a:off x="411480" y="694944"/>
+            <a:ext cx="11338560" cy="20116"/>
+          </a:xfrm>
+          <a:prstGeom prst="rect">
+            <a:avLst/>
+          </a:prstGeom>
+          <a:solidFill>
+            <a:srgbClr val="2461E5"/>
+          </a:solidFill>
+          <a:ln>
+            <a:noFill/>
+          </a:ln>
+        </p:spPr>
+        <p:style>
+          <a:lnRef idx="1">
+            <a:schemeClr val="accent1"/>
+          </a:lnRef>
+          <a:fillRef idx="3">
+            <a:schemeClr val="accent1"/>
+          </a:fillRef>
+          <a:effectRef idx="2">
+            <a:schemeClr val="accent1"/>
+          </a:effectRef>
+          <a:fontRef idx="minor">
+            <a:schemeClr val="lt1"/>
+          </a:fontRef>
+        </p:style>
+        <p:txBody>
+          <a:bodyPr rtlCol="0" anchor="ctr"/>
+          <a:lstStyle/>
+          <a:p>
+            <a:pPr algn="ctr"/>
+          </a:p>
+        </p:txBody>
+      </p:sp>
+      <p:sp>
+        <p:nvSpPr>
+          <p:cNvPr id="4" name="Rounded Rectangle 3"/>
+          <p:cNvSpPr/>
+          <p:nvPr/>
+        </p:nvSpPr>
+        <p:spPr>
+          <a:xfrm>
+            <a:off x="411480" y="960120"/>
+            <a:ext cx="2286000" cy="566928"/>
+          </a:xfrm>
+          <a:prstGeom prst="roundRect">
+            <a:avLst/>
+          </a:prstGeom>
+          <a:solidFill>
+            <a:srgbClr val="2461E5"/>
+          </a:solidFill>
+          <a:ln>
+            <a:noFill/>
+          </a:ln>
+        </p:spPr>
+        <p:style>
+          <a:lnRef idx="1">
+            <a:schemeClr val="accent1"/>
+          </a:lnRef>
+          <a:fillRef idx="3">
+            <a:schemeClr val="accent1"/>
+          </a:fillRef>
+          <a:effectRef idx="2">
+            <a:schemeClr val="accent1"/>
+          </a:effectRef>
+          <a:fontRef idx="minor">
+            <a:schemeClr val="lt1"/>
+          </a:fontRef>
+        </p:style>
+        <p:txBody>
+          <a:bodyPr rtlCol="0" anchor="ctr" wrap="square" lIns="73152" rIns="73152" tIns="36576" bIns="36576"/>
+          <a:lstStyle/>
+          <a:p>
+            <a:pPr algn="ctr"/>
+            <a:r>
+              <a:rPr sz="1100" b="1">
+                <a:solidFill>
+                  <a:srgbClr val="FFFFFF"/>
+                </a:solidFill>
+              </a:rPr>
+              <a:t>Single Model
+Exploration</a:t>
+            </a:r>
+          </a:p>
+        </p:txBody>
+      </p:sp>
+      <p:sp>
+        <p:nvSpPr>
+          <p:cNvPr id="5" name="TextBox 4"/>
+          <p:cNvSpPr txBox="1"/>
+          <p:nvPr/>
+        </p:nvSpPr>
+        <p:spPr>
+          <a:xfrm>
+            <a:off x="411480" y="1600200"/>
+            <a:ext cx="2331720" cy="1005840"/>
+          </a:xfrm>
+          <a:prstGeom prst="rect">
+            <a:avLst/>
+          </a:prstGeom>
+          <a:noFill/>
+        </p:spPr>
+        <p:txBody>
+          <a:bodyPr wrap="square">
+            <a:spAutoFit/>
+          </a:bodyPr>
+          <a:lstStyle/>
+          <a:p>
+            <a:pPr algn="l"/>
+            <a:r>
+              <a:rPr sz="1000" b="0">
+                <a:solidFill>
+                  <a:srgbClr val="1C1C28"/>
+                </a:solidFill>
+              </a:rPr>
+              <a:t>Load one model's file, filter to a parameter,</a:t>
+            </a:r>
+          </a:p>
+          <a:p>
+            <a:pPr algn="l"/>
+            <a:r>
+              <a:rPr sz="1000" b="0">
+                <a:solidFill>
+                  <a:srgbClr val="1C1C28"/>
+                </a:solidFill>
+              </a:rPr>
+              <a:t>level and domain, and plot any metric by lead time.</a:t>
+            </a:r>
+          </a:p>
+        </p:txBody>
+      </p:sp>
+      <p:sp>
+        <p:nvSpPr>
+          <p:cNvPr id="6" name="Rounded Rectangle 5"/>
+          <p:cNvSpPr/>
+          <p:nvPr/>
+        </p:nvSpPr>
+        <p:spPr>
+          <a:xfrm>
+            <a:off x="411480" y="2679191"/>
+            <a:ext cx="2286000" cy="566928"/>
+          </a:xfrm>
+          <a:prstGeom prst="roundRect">
+            <a:avLst/>
+          </a:prstGeom>
+          <a:solidFill>
+            <a:srgbClr val="2461E5"/>
+          </a:solidFill>
+          <a:ln>
+            <a:noFill/>
+          </a:ln>
+        </p:spPr>
+        <p:style>
+          <a:lnRef idx="1">
+            <a:schemeClr val="accent1"/>
+          </a:lnRef>
+          <a:fillRef idx="3">
+            <a:schemeClr val="accent1"/>
+          </a:fillRef>
+          <a:effectRef idx="2">
+            <a:schemeClr val="accent1"/>
+          </a:effectRef>
+          <a:fontRef idx="minor">
+            <a:schemeClr val="lt1"/>
+          </a:fontRef>
+        </p:style>
+        <p:txBody>
+          <a:bodyPr rtlCol="0" anchor="ctr" wrap="square" lIns="73152" rIns="73152" tIns="36576" bIns="36576"/>
+          <a:lstStyle/>
+          <a:p>
+            <a:pPr algn="ctr"/>
+            <a:r>
+              <a:rPr sz="1100" b="1">
+                <a:solidFill>
+                  <a:srgbClr val="FFFFFF"/>
+                </a:solidFill>
+              </a:rPr>
+              <a:t>Cross-Model
+Comparison</a:t>
+            </a:r>
+          </a:p>
+        </p:txBody>
+      </p:sp>
+      <p:sp>
+        <p:nvSpPr>
+          <p:cNvPr id="7" name="TextBox 6"/>
+          <p:cNvSpPr txBox="1"/>
+          <p:nvPr/>
+        </p:nvSpPr>
+        <p:spPr>
+          <a:xfrm>
+            <a:off x="411480" y="3319272"/>
+            <a:ext cx="2331720" cy="1005840"/>
+          </a:xfrm>
+          <a:prstGeom prst="rect">
+            <a:avLst/>
+          </a:prstGeom>
+          <a:noFill/>
+        </p:spPr>
+        <p:txBody>
+          <a:bodyPr wrap="square">
+            <a:spAutoFit/>
+          </a:bodyPr>
+          <a:lstStyle/>
+          <a:p>
+            <a:pPr algn="l"/>
+            <a:r>
+              <a:rPr sz="1000" b="0">
+                <a:solidFill>
+                  <a:srgbClr val="1C1C28"/>
+                </a:solidFill>
+              </a:rPr>
+              <a:t>Load two files side-by-side, filter to the same</a:t>
+            </a:r>
+          </a:p>
+          <a:p>
+            <a:pPr algn="l"/>
+            <a:r>
+              <a:rPr sz="1000" b="0">
+                <a:solidFill>
+                  <a:srgbClr val="1C1C28"/>
+                </a:solidFill>
+              </a:rPr>
+              <a:t>parameter and domain, and compare RMSE or bias.</a:t>
+            </a:r>
+          </a:p>
+        </p:txBody>
+      </p:sp>
+      <p:sp>
+        <p:nvSpPr>
+          <p:cNvPr id="8" name="Rounded Rectangle 7"/>
+          <p:cNvSpPr/>
+          <p:nvPr/>
+        </p:nvSpPr>
+        <p:spPr>
+          <a:xfrm>
+            <a:off x="411480" y="4398264"/>
+            <a:ext cx="2286000" cy="566928"/>
+          </a:xfrm>
+          <a:prstGeom prst="roundRect">
+            <a:avLst/>
+          </a:prstGeom>
+          <a:solidFill>
+            <a:srgbClr val="C04800"/>
+          </a:solidFill>
+          <a:ln>
+            <a:noFill/>
+          </a:ln>
+        </p:spPr>
+        <p:style>
+          <a:lnRef idx="1">
+            <a:schemeClr val="accent1"/>
+          </a:lnRef>
+          <a:fillRef idx="3">
+            <a:schemeClr val="accent1"/>
+          </a:fillRef>
+          <a:effectRef idx="2">
+            <a:schemeClr val="accent1"/>
+          </a:effectRef>
+          <a:fontRef idx="minor">
+            <a:schemeClr val="lt1"/>
+          </a:fontRef>
+        </p:style>
+        <p:txBody>
+          <a:bodyPr rtlCol="0" anchor="ctr" wrap="square" lIns="73152" rIns="73152" tIns="36576" bIns="36576"/>
+          <a:lstStyle/>
+          <a:p>
+            <a:pPr algn="ctr"/>
+            <a:r>
+              <a:rPr sz="1100" b="1">
+                <a:solidFill>
+                  <a:srgbClr val="FFFFFF"/>
+                </a:solidFill>
+              </a:rPr>
+              <a:t>Ensemble
+Diagnostics</a:t>
+            </a:r>
+          </a:p>
+        </p:txBody>
+      </p:sp>
+      <p:sp>
+        <p:nvSpPr>
+          <p:cNvPr id="9" name="TextBox 8"/>
+          <p:cNvSpPr txBox="1"/>
+          <p:nvPr/>
+        </p:nvSpPr>
+        <p:spPr>
+          <a:xfrm>
+            <a:off x="411480" y="5038344"/>
+            <a:ext cx="2331720" cy="1005840"/>
+          </a:xfrm>
+          <a:prstGeom prst="rect">
+            <a:avLst/>
+          </a:prstGeom>
+          <a:noFill/>
+        </p:spPr>
+        <p:txBody>
+          <a:bodyPr wrap="square">
+            <a:spAutoFit/>
+          </a:bodyPr>
+          <a:lstStyle/>
+          <a:p>
+            <a:pPr algn="l"/>
+            <a:r>
+              <a:rPr sz="1000" b="0">
+                <a:solidFill>
+                  <a:srgbClr val="1C1C28"/>
+                </a:solidFill>
+              </a:rPr>
+              <a:t>Filter STAT_TYPE = EnsembleStat to access CRPS</a:t>
+            </a:r>
+          </a:p>
+          <a:p>
+            <a:pPr algn="l"/>
+            <a:r>
+              <a:rPr sz="1000" b="0">
+                <a:solidFill>
+                  <a:srgbClr val="1C1C28"/>
+                </a:solidFill>
+              </a:rPr>
+              <a:t>and Spread. Check Spread ~ RMSE for calibration.</a:t>
+            </a:r>
+          </a:p>
+        </p:txBody>
+      </p:sp>
+      <p:sp>
+        <p:nvSpPr>
+          <p:cNvPr id="10" name="Rectangle 9"/>
+          <p:cNvSpPr/>
+          <p:nvPr/>
+        </p:nvSpPr>
+        <p:spPr>
+          <a:xfrm>
+            <a:off x="2926080" y="914400"/>
+            <a:ext cx="9052560" cy="5120640"/>
+          </a:xfrm>
+          <a:prstGeom prst="rect">
+            <a:avLst/>
+          </a:prstGeom>
+          <a:solidFill>
+            <a:srgbClr val="1E1E2E"/>
+          </a:solidFill>
+          <a:ln>
+            <a:noFill/>
+          </a:ln>
+        </p:spPr>
+        <p:style>
+          <a:lnRef idx="1">
+            <a:schemeClr val="accent1"/>
+          </a:lnRef>
+          <a:fillRef idx="3">
+            <a:schemeClr val="accent1"/>
+          </a:fillRef>
+          <a:effectRef idx="2">
+            <a:schemeClr val="accent1"/>
+          </a:effectRef>
+          <a:fontRef idx="minor">
+            <a:schemeClr val="lt1"/>
+          </a:fontRef>
+        </p:style>
+        <p:txBody>
+          <a:bodyPr rtlCol="0" anchor="ctr" wrap="none" lIns="182880" tIns="128016" bIns="73152"/>
+          <a:lstStyle/>
+          <a:p>
+            <a:pPr algn="ctr"/>
+            <a:r>
+              <a:rPr sz="950">
+                <a:solidFill>
+                  <a:srgbClr val="569CD6"/>
+                </a:solidFill>
+              </a:rPr>
+              <a:t>import pyarrow.parquet as pq</a:t>
+            </a:r>
+          </a:p>
+          <a:p>
+            <a:r>
+              <a:rPr sz="950">
+                <a:solidFill>
+                  <a:srgbClr val="CED1D8"/>
+                </a:solidFill>
+              </a:rPr>
+              <a:t/>
+            </a:r>
+          </a:p>
+          <a:p>
+            <a:r>
+              <a:rPr sz="950">
+                <a:solidFill>
+                  <a:srgbClr val="6A9955"/>
+                </a:solidFill>
+              </a:rPr>
+              <a:t># Load a model dataset</a:t>
+            </a:r>
+          </a:p>
+          <a:p>
+            <a:r>
+              <a:rPr sz="950">
+                <a:solidFill>
+                  <a:srgbClr val="CED1D8"/>
+                </a:solidFill>
+              </a:rPr>
+              <a:t>g4 = pq.read_table(</a:t>
+            </a:r>
+          </a:p>
+          <a:p>
+            <a:r>
+              <a:rPr sz="950">
+                <a:solidFill>
+                  <a:srgbClr val="CE9178"/>
+                </a:solidFill>
+              </a:rPr>
+              <a:t>    'AGlobal4_Analysis.parquet'</a:t>
+            </a:r>
+          </a:p>
+          <a:p>
+            <a:r>
+              <a:rPr sz="950">
+                <a:solidFill>
+                  <a:srgbClr val="CED1D8"/>
+                </a:solidFill>
+              </a:rPr>
+              <a:t>).to_pandas()</a:t>
+            </a:r>
+          </a:p>
+          <a:p>
+            <a:r>
+              <a:rPr sz="950">
+                <a:solidFill>
+                  <a:srgbClr val="CED1D8"/>
+                </a:solidFill>
+              </a:rPr>
+              <a:t/>
+            </a:r>
+          </a:p>
+          <a:p>
+            <a:r>
+              <a:rPr sz="950">
+                <a:solidFill>
+                  <a:srgbClr val="6A9955"/>
+                </a:solidFill>
+              </a:rPr>
+              <a:t># Filter to one parameter</a:t>
+            </a:r>
+          </a:p>
+          <a:p>
+            <a:r>
+              <a:rPr sz="950">
+                <a:solidFill>
+                  <a:srgbClr val="CED1D8"/>
+                </a:solidFill>
+              </a:rPr>
+              <a:t>t = g4[g4['PARAMETER'] == 'T_AllLevels']</a:t>
+            </a:r>
+          </a:p>
+          <a:p>
+            <a:r>
+              <a:rPr sz="950">
+                <a:solidFill>
+                  <a:srgbClr val="CED1D8"/>
+                </a:solidFill>
+              </a:rPr>
+              <a:t/>
+            </a:r>
+          </a:p>
+          <a:p>
+            <a:r>
+              <a:rPr sz="950">
+                <a:solidFill>
+                  <a:srgbClr val="6A9955"/>
+                </a:solidFill>
+              </a:rPr>
+              <a:t># Cross-model comparison</a:t>
+            </a:r>
+          </a:p>
+          <a:p>
+            <a:r>
+              <a:rPr sz="950">
+                <a:solidFill>
+                  <a:srgbClr val="CED1D8"/>
+                </a:solidFill>
+              </a:rPr>
+              <a:t>g4e = pq.read_table(</a:t>
+            </a:r>
+          </a:p>
+          <a:p>
+            <a:r>
+              <a:rPr sz="950">
+                <a:solidFill>
+                  <a:srgbClr val="CE9178"/>
+                </a:solidFill>
+              </a:rPr>
+              <a:t>    'AGlobal4E_Analysis.parquet',</a:t>
+            </a:r>
+          </a:p>
+          <a:p>
+            <a:r>
+              <a:rPr sz="950">
+                <a:solidFill>
+                  <a:srgbClr val="CED1D8"/>
+                </a:solidFill>
+              </a:rPr>
+              <a:t>    filters=[('PARAMETER','=','MSLP')]</a:t>
+            </a:r>
+          </a:p>
+          <a:p>
+            <a:r>
+              <a:rPr sz="950">
+                <a:solidFill>
+                  <a:srgbClr val="CED1D8"/>
+                </a:solidFill>
+              </a:rPr>
+              <a:t>).to_pandas()</a:t>
+            </a:r>
+          </a:p>
+          <a:p>
+            <a:r>
+              <a:rPr sz="950">
+                <a:solidFill>
+                  <a:srgbClr val="CED1D8"/>
+                </a:solidFill>
+              </a:rPr>
+              <a:t/>
+            </a:r>
+          </a:p>
+          <a:p>
+            <a:r>
+              <a:rPr sz="950">
+                <a:solidFill>
+                  <a:srgbClr val="6A9955"/>
+                </a:solidFill>
+              </a:rPr>
+              <a:t># Ensemble stats only</a:t>
+            </a:r>
+          </a:p>
+          <a:p>
+            <a:r>
+              <a:rPr sz="950">
+                <a:solidFill>
+                  <a:srgbClr val="CED1D8"/>
+                </a:solidFill>
+              </a:rPr>
+              <a:t>ens = g4e[</a:t>
+            </a:r>
+          </a:p>
+          <a:p>
+            <a:r>
+              <a:rPr sz="950">
+                <a:solidFill>
+                  <a:srgbClr val="CED1D8"/>
+                </a:solidFill>
+              </a:rPr>
+              <a:t>    g4e['STAT_TYPE'] == 'EnsembleStat']</a:t>
+            </a:r>
+          </a:p>
+        </p:txBody>
+      </p:sp>
+    </p:spTree>
+  </p:cSld>
+  <p:clrMapOvr>
+    <a:masterClrMapping/>
+  </p:clrMapOvr>
+</p:sld>
+</file>
+
+<file path=ppt/slides/slide6.xml><?xml version="1.0" encoding="utf-8"?>
+<p:sld xmlns:a="http://schemas.openxmlformats.org/drawingml/2006/main" xmlns:p="http://schemas.openxmlformats.org/presentationml/2006/main" xmlns:r="http://schemas.openxmlformats.org/officeDocument/2006/relationships">
+  <p:cSld>
+    <p:spTree>
+      <p:nvGrpSpPr>
+        <p:cNvPr id="1" name=""/>
+        <p:cNvGrpSpPr/>
+        <p:nvPr/>
+      </p:nvGrpSpPr>
+      <p:grpSpPr/>
+      <p:sp>
+        <p:nvSpPr>
+          <p:cNvPr id="2" name="TextBox 1"/>
+          <p:cNvSpPr txBox="1"/>
+          <p:nvPr/>
+        </p:nvSpPr>
+        <p:spPr>
+          <a:xfrm>
+            <a:off x="411480" y="182880"/>
+            <a:ext cx="11338560" cy="475488"/>
+          </a:xfrm>
+          <a:prstGeom prst="rect">
+            <a:avLst/>
+          </a:prstGeom>
+          <a:noFill/>
+        </p:spPr>
+        <p:txBody>
+          <a:bodyPr wrap="none">
+            <a:spAutoFit/>
+          </a:bodyPr>
+          <a:lstStyle/>
+          <a:p>
+            <a:r>
+              <a:rPr b="1" sz="2200">
+                <a:solidFill>
+                  <a:srgbClr val="2461E5"/>
+                </a:solidFill>
+              </a:rPr>
               <a:t>Example Results</a:t>
             </a:r>
+          </a:p>
+        </p:txBody>
+      </p:sp>
+      <p:sp>
+        <p:nvSpPr>
+          <p:cNvPr id="3" name="Rectangle 2"/>
+          <p:cNvSpPr/>
+          <p:nvPr/>
+        </p:nvSpPr>
+        <p:spPr>
+          <a:xfrm>
+            <a:off x="411480" y="694944"/>
+            <a:ext cx="11338560" cy="20116"/>
+          </a:xfrm>
+          <a:prstGeom prst="rect">
+            <a:avLst/>
+          </a:prstGeom>
+          <a:solidFill>
+            <a:srgbClr val="2461E5"/>
+          </a:solidFill>
+          <a:ln>
+            <a:noFill/>
+          </a:ln>
+        </p:spPr>
+        <p:style>
+          <a:lnRef idx="1">
+            <a:schemeClr val="accent1"/>
+          </a:lnRef>
+          <a:fillRef idx="3">
+            <a:schemeClr val="accent1"/>
+          </a:fillRef>
+          <a:effectRef idx="2">
+            <a:schemeClr val="accent1"/>
+          </a:effectRef>
+          <a:fontRef idx="minor">
+            <a:schemeClr val="lt1"/>
+          </a:fontRef>
+        </p:style>
+        <p:txBody>
+          <a:bodyPr rtlCol="0" anchor="ctr"/>
+          <a:lstStyle/>
+          <a:p>
+            <a:pPr algn="ctr"/>
           </a:p>
         </p:txBody>
       </p:sp>
       <p:pic>
         <p:nvPicPr>
-          <p:cNvPr id="8" name="Picture 7" descr="image.png"/>
+          <p:cNvPr id="4" name="Picture 3" descr="image.png"/>
           <p:cNvPicPr>
             <a:picLocks noChangeAspect="1"/>
           </p:cNvPicPr>
@@ -10275,8 +10594,8 @@
         </p:blipFill>
         <p:spPr>
           <a:xfrm>
-            <a:off x="365760" y="1005840"/>
-            <a:ext cx="5669280" cy="3566160"/>
+            <a:off x="365760" y="960120"/>
+            <a:ext cx="5577840" cy="3520440"/>
           </a:xfrm>
           <a:prstGeom prst="rect">
             <a:avLst/>
@@ -10285,7 +10604,7 @@
       </p:pic>
       <p:pic>
         <p:nvPicPr>
-          <p:cNvPr id="9" name="Picture 8" descr="image.png"/>
+          <p:cNvPr id="5" name="Picture 4" descr="image.png"/>
           <p:cNvPicPr>
             <a:picLocks noChangeAspect="1"/>
           </p:cNvPicPr>
@@ -10299,8 +10618,8 @@
         </p:blipFill>
         <p:spPr>
           <a:xfrm>
-            <a:off x="6263640" y="1005840"/>
-            <a:ext cx="5669280" cy="3566160"/>
+            <a:off x="6263640" y="960120"/>
+            <a:ext cx="5577840" cy="3520440"/>
           </a:xfrm>
           <a:prstGeom prst="rect">
             <a:avLst/>
@@ -10309,14 +10628,14 @@
       </p:pic>
       <p:sp>
         <p:nvSpPr>
-          <p:cNvPr id="10" name="TextBox 9"/>
+          <p:cNvPr id="6" name="TextBox 5"/>
           <p:cNvSpPr txBox="1"/>
           <p:nvPr/>
         </p:nvSpPr>
         <p:spPr>
           <a:xfrm>
-            <a:off x="365760" y="4663440"/>
-            <a:ext cx="5669280" cy="365760"/>
+            <a:off x="365760" y="4572000"/>
+            <a:ext cx="5577840" cy="365760"/>
           </a:xfrm>
           <a:prstGeom prst="rect">
             <a:avLst/>
@@ -10333,24 +10652,24 @@
             <a:r>
               <a:rPr sz="900" b="0">
                 <a:solidFill>
-                  <a:srgbClr val="606060"/>
-                </a:solidFill>
-              </a:rPr>
-              <a:t>Cross-model comparison: MSLP RMSE by lead time over the Northern Hemisphere.</a:t>
-            </a:r>
-          </a:p>
-        </p:txBody>
-      </p:sp>
-      <p:sp>
-        <p:nvSpPr>
-          <p:cNvPr id="11" name="TextBox 10"/>
+                  <a:srgbClr val="6E6E78"/>
+                </a:solidFill>
+              </a:rPr>
+              <a:t>Cross-model comparison: MSLP RMSE by lead time over NH (12Z inits only).</a:t>
+            </a:r>
+          </a:p>
+        </p:txBody>
+      </p:sp>
+      <p:sp>
+        <p:nvSpPr>
+          <p:cNvPr id="7" name="TextBox 6"/>
           <p:cNvSpPr txBox="1"/>
           <p:nvPr/>
         </p:nvSpPr>
         <p:spPr>
           <a:xfrm>
-            <a:off x="6263640" y="4663440"/>
-            <a:ext cx="5669280" cy="365760"/>
+            <a:off x="6263640" y="4572000"/>
+            <a:ext cx="5577840" cy="365760"/>
           </a:xfrm>
           <a:prstGeom prst="rect">
             <a:avLst/>
@@ -10367,24 +10686,24 @@
             <a:r>
               <a:rPr sz="900" b="0">
                 <a:solidFill>
-                  <a:srgbClr val="606060"/>
-                </a:solidFill>
-              </a:rPr>
-              <a:t>Ensemble calibration check: Spread ≈ RMSE indicates a well-calibrated ensemble.</a:t>
-            </a:r>
-          </a:p>
-        </p:txBody>
-      </p:sp>
-      <p:sp>
-        <p:nvSpPr>
-          <p:cNvPr id="12" name="TextBox 11"/>
+                  <a:srgbClr val="6E6E78"/>
+                </a:solidFill>
+              </a:rPr>
+              <a:t>Ensemble calibration: Spread ~ RMSE indicates a well-calibrated ensemble.</a:t>
+            </a:r>
+          </a:p>
+        </p:txBody>
+      </p:sp>
+      <p:sp>
+        <p:nvSpPr>
+          <p:cNvPr id="8" name="TextBox 7"/>
           <p:cNvSpPr txBox="1"/>
           <p:nvPr/>
         </p:nvSpPr>
         <p:spPr>
           <a:xfrm>
-            <a:off x="411480" y="5166360"/>
-            <a:ext cx="11430000" cy="731520"/>
+            <a:off x="411480" y="5102352"/>
+            <a:ext cx="11338560" cy="640080"/>
           </a:xfrm>
           <a:prstGeom prst="rect">
             <a:avLst/>
@@ -10401,10 +10720,10 @@
             <a:r>
               <a:rPr sz="850" b="0">
                 <a:solidFill>
-                  <a:srgbClr val="606060"/>
-                </a:solidFill>
-              </a:rPr>
-              <a:t>Loaded with:   pq.read_table('AGlobal4_Analysis.parquet', filters=[('PARAMETER','=','MSLP')]).to_pandas()</a:t>
+                  <a:srgbClr val="6E6E78"/>
+                </a:solidFill>
+              </a:rPr>
+              <a:t>Load:    pq.read_table("AGlobal4_Analysis.parquet", filters=[("PARAMETER","=","MSLP")]).to_pandas()</a:t>
             </a:r>
           </a:p>
           <a:p>
@@ -10412,10 +10731,10 @@
             <a:r>
               <a:rPr sz="850" b="0">
                 <a:solidFill>
-                  <a:srgbClr val="606060"/>
-                </a:solidFill>
-              </a:rPr>
-              <a:t>Filtered with: df[df['STAT_TYPE'] == 'EnsembleStat'] | df[df['VX_MASK'] == 'NH']</a:t>
+                  <a:srgbClr val="6E6E78"/>
+                </a:solidFill>
+              </a:rPr>
+              <a:t>Filter:  df[df["STAT_TYPE"] == "EnsembleStat"]  |  df[df["VX_MASK"] == "NH"]</a:t>
             </a:r>
           </a:p>
         </p:txBody>
